--- a/tema3/diapositivas/conexion-mongodb.pptx
+++ b/tema3/diapositivas/conexion-mongodb.pptx
@@ -4,6 +4,9 @@
   <p:sldMasterIdLst>
     <p:sldMasterId id="2147483648" r:id="rId1"/>
   </p:sldMasterIdLst>
+  <p:notesMasterIdLst>
+    <p:notesMasterId r:id="rId30"/>
+  </p:notesMasterIdLst>
   <p:sldIdLst>
     <p:sldId id="256" r:id="rId2"/>
     <p:sldId id="257" r:id="rId3"/>
@@ -34,9 +37,6 @@
     <p:sldId id="282" r:id="rId28"/>
     <p:sldId id="283" r:id="rId29"/>
   </p:sldIdLst>
-  <p:notesMasterIdLst>
-    <p:notesMasterId r:id="rId30"/>
-  </p:notesMasterIdLst>
   <p:sldSz cx="12192000" cy="6858000"/>
   <p:notesSz cx="6858000" cy="12192000"/>
   <p:defaultTextStyle>
@@ -131,6 +131,11 @@
       </a:defRPr>
     </a:lvl9pPr>
   </p:defaultTextStyle>
+  <p:extLst>
+    <p:ext uri="{EFAFB233-063F-42B5-8137-9DF3F51BA10A}">
+      <p15:sldGuideLst xmlns:p15="http://schemas.microsoft.com/office/powerpoint/2012/main"/>
+    </p:ext>
+  </p:extLst>
 </p:presentation>
 </file>
 
@@ -156,234 +161,10 @@
           <a:chExt cx="0" cy="0"/>
         </a:xfrm>
       </p:grpSpPr>
-      <p:sp>
-        <p:nvSpPr>
-          <p:cNvPr id="2" name="Header Placeholder 1"/>
-          <p:cNvSpPr>
-            <a:spLocks noGrp="1"/>
-          </p:cNvSpPr>
-          <p:nvPr>
-            <p:ph type="hdr" sz="quarter"/>
-          </p:nvPr>
-        </p:nvSpPr>
-        <p:spPr>
-          <a:xfrm>
-            <a:off x="0" y="0"/>
-            <a:ext cx="2971800" cy="458788"/>
-          </a:xfrm>
-          <a:prstGeom prst="rect">
-            <a:avLst/>
-          </a:prstGeom>
-        </p:spPr>
-        <p:txBody>
-          <a:bodyPr vert="horz" lIns="91440" tIns="45720" rIns="91440" bIns="45720" rtlCol="0"/>
-          <a:lstStyle>
-            <a:lvl1pPr algn="l">
-              <a:defRPr sz="1200"/>
-            </a:lvl1pPr>
-          </a:lstStyle>
-          <a:p>
-            <a:endParaRPr lang="en-US"/>
-          </a:p>
-        </p:txBody>
-      </p:sp>
-      <p:sp>
-        <p:nvSpPr>
-          <p:cNvPr id="3" name="Date Placeholder 2"/>
-          <p:cNvSpPr>
-            <a:spLocks noGrp="1"/>
-          </p:cNvSpPr>
-          <p:nvPr>
-            <p:ph type="dt" idx="1"/>
-          </p:nvPr>
-        </p:nvSpPr>
-        <p:spPr>
-          <a:xfrm>
-            <a:off x="3884613" y="0"/>
-            <a:ext cx="2971800" cy="458788"/>
-          </a:xfrm>
-          <a:prstGeom prst="rect">
-            <a:avLst/>
-          </a:prstGeom>
-        </p:spPr>
-        <p:txBody>
-          <a:bodyPr vert="horz" lIns="91440" tIns="45720" rIns="91440" bIns="45720" rtlCol="0"/>
-          <a:lstStyle>
-            <a:lvl1pPr algn="r">
-              <a:defRPr sz="1200"/>
-            </a:lvl1pPr>
-          </a:lstStyle>
-          <a:p>
-            <a:fld id="{5282F153-3F37-0F45-9E97-73ACFA13230C}" type="datetimeFigureOut">
-              <a:rPr lang="en-US"/>
-              <a:t>7/23/19</a:t>
-            </a:fld>
-            <a:endParaRPr lang="en-US"/>
-          </a:p>
-        </p:txBody>
-      </p:sp>
-      <p:sp>
-        <p:nvSpPr>
-          <p:cNvPr id="4" name="Slide Image Placeholder 3"/>
-          <p:cNvSpPr>
-            <a:spLocks noGrp="1" noRot="1" noChangeAspect="1"/>
-          </p:cNvSpPr>
-          <p:nvPr>
-            <p:ph type="sldImg" idx="2"/>
-          </p:nvPr>
-        </p:nvSpPr>
-        <p:spPr>
-          <a:xfrm>
-            <a:off x="685800" y="1143000"/>
-            <a:ext cx="5486400" cy="3086100"/>
-          </a:xfrm>
-          <a:prstGeom prst="rect">
-            <a:avLst/>
-          </a:prstGeom>
-          <a:noFill/>
-          <a:ln w="12700">
-            <a:solidFill>
-              <a:prstClr val="black"/>
-            </a:solidFill>
-          </a:ln>
-        </p:spPr>
-        <p:txBody>
-          <a:bodyPr vert="horz" lIns="91440" tIns="45720" rIns="91440" bIns="45720" rtlCol="0" anchor="ctr"/>
-          <a:lstStyle/>
-          <a:p>
-            <a:endParaRPr lang="en-US"/>
-          </a:p>
-        </p:txBody>
-      </p:sp>
-      <p:sp>
-        <p:nvSpPr>
-          <p:cNvPr id="5" name="Notes Placeholder 4"/>
-          <p:cNvSpPr>
-            <a:spLocks noGrp="1"/>
-          </p:cNvSpPr>
-          <p:nvPr>
-            <p:ph type="body" sz="quarter" idx="3"/>
-          </p:nvPr>
-        </p:nvSpPr>
-        <p:spPr>
-          <a:xfrm>
-            <a:off x="685800" y="4400550"/>
-            <a:ext cx="5486400" cy="3600450"/>
-          </a:xfrm>
-          <a:prstGeom prst="rect">
-            <a:avLst/>
-          </a:prstGeom>
-        </p:spPr>
-        <p:txBody>
-          <a:bodyPr vert="horz" lIns="91440" tIns="45720" rIns="91440" bIns="45720" rtlCol="0"/>
-          <a:lstStyle/>
-          <a:p>
-            <a:pPr lvl="0"/>
-            <a:r>
-              <a:rPr lang="en-US"/>
-              <a:t>Click to edit Master text styles</a:t>
-            </a:r>
-          </a:p>
-          <a:p>
-            <a:pPr lvl="1"/>
-            <a:r>
-              <a:rPr lang="en-US"/>
-              <a:t>Second level</a:t>
-            </a:r>
-          </a:p>
-          <a:p>
-            <a:pPr lvl="2"/>
-            <a:r>
-              <a:rPr lang="en-US"/>
-              <a:t>Third level</a:t>
-            </a:r>
-          </a:p>
-          <a:p>
-            <a:pPr lvl="3"/>
-            <a:r>
-              <a:rPr lang="en-US"/>
-              <a:t>Fourth level</a:t>
-            </a:r>
-          </a:p>
-          <a:p>
-            <a:pPr lvl="4"/>
-            <a:r>
-              <a:rPr lang="en-US"/>
-              <a:t>Fifth level</a:t>
-            </a:r>
-          </a:p>
-        </p:txBody>
-      </p:sp>
-      <p:sp>
-        <p:nvSpPr>
-          <p:cNvPr id="6" name="Footer Placeholder 5"/>
-          <p:cNvSpPr>
-            <a:spLocks noGrp="1"/>
-          </p:cNvSpPr>
-          <p:nvPr>
-            <p:ph type="ftr" sz="quarter" idx="4"/>
-          </p:nvPr>
-        </p:nvSpPr>
-        <p:spPr>
-          <a:xfrm>
-            <a:off x="0" y="8685213"/>
-            <a:ext cx="2971800" cy="458787"/>
-          </a:xfrm>
-          <a:prstGeom prst="rect">
-            <a:avLst/>
-          </a:prstGeom>
-        </p:spPr>
-        <p:txBody>
-          <a:bodyPr vert="horz" lIns="91440" tIns="45720" rIns="91440" bIns="45720" rtlCol="0" anchor="b"/>
-          <a:lstStyle>
-            <a:lvl1pPr algn="l">
-              <a:defRPr sz="1200"/>
-            </a:lvl1pPr>
-          </a:lstStyle>
-          <a:p>
-            <a:endParaRPr lang="en-US"/>
-          </a:p>
-        </p:txBody>
-      </p:sp>
-      <p:sp>
-        <p:nvSpPr>
-          <p:cNvPr id="7" name="Slide Number Placeholder 6"/>
-          <p:cNvSpPr>
-            <a:spLocks noGrp="1"/>
-          </p:cNvSpPr>
-          <p:nvPr>
-            <p:ph type="sldNum" sz="quarter" idx="5"/>
-          </p:nvPr>
-        </p:nvSpPr>
-        <p:spPr>
-          <a:xfrm>
-            <a:off x="3884613" y="8685213"/>
-            <a:ext cx="2971800" cy="458787"/>
-          </a:xfrm>
-          <a:prstGeom prst="rect">
-            <a:avLst/>
-          </a:prstGeom>
-        </p:spPr>
-        <p:txBody>
-          <a:bodyPr vert="horz" lIns="91440" tIns="45720" rIns="91440" bIns="45720" rtlCol="0" anchor="b"/>
-          <a:lstStyle>
-            <a:lvl1pPr algn="r">
-              <a:defRPr sz="1200"/>
-            </a:lvl1pPr>
-          </a:lstStyle>
-          <a:p>
-            <a:fld id="{CE5E9CC1-C706-0F49-92D6-E571CC5EEA8F}" type="slidenum">
-              <a:rPr lang="en-US"/>
-              <a:t>‹#›</a:t>
-            </a:fld>
-            <a:endParaRPr lang="en-US"/>
-          </a:p>
-        </p:txBody>
-      </p:sp>
     </p:spTree>
     <p:extLst>
       <p:ext uri="{BB962C8B-B14F-4D97-AF65-F5344CB8AC3E}">
-        <p14:creationId xmlns:p14="http://schemas.microsoft.com/office/powerpoint/2010/main" val="1024086991"/>
+        <p14:creationId xmlns:p14="http://schemas.microsoft.com/office/powerpoint/2010/main" val="1189226451"/>
       </p:ext>
     </p:extLst>
   </p:cSld>
@@ -527,10 +308,6 @@
           <a:bodyPr/>
           <a:lstStyle/>
           <a:p>
-            <a:r>
-              <a:rPr lang="en-US" dirty="0"/>
-              <a:t/>
-            </a:r>
             <a:endParaRPr lang="en-US" dirty="0"/>
           </a:p>
         </p:txBody>
@@ -615,10 +392,6 @@
           <a:bodyPr/>
           <a:lstStyle/>
           <a:p>
-            <a:r>
-              <a:rPr lang="en-US" dirty="0"/>
-              <a:t/>
-            </a:r>
             <a:endParaRPr lang="en-US" dirty="0"/>
           </a:p>
         </p:txBody>
@@ -703,10 +476,6 @@
           <a:bodyPr/>
           <a:lstStyle/>
           <a:p>
-            <a:r>
-              <a:rPr lang="en-US" dirty="0"/>
-              <a:t/>
-            </a:r>
             <a:endParaRPr lang="en-US" dirty="0"/>
           </a:p>
         </p:txBody>
@@ -791,10 +560,6 @@
           <a:bodyPr/>
           <a:lstStyle/>
           <a:p>
-            <a:r>
-              <a:rPr lang="en-US" dirty="0"/>
-              <a:t/>
-            </a:r>
             <a:endParaRPr lang="en-US" dirty="0"/>
           </a:p>
         </p:txBody>
@@ -879,10 +644,6 @@
           <a:bodyPr/>
           <a:lstStyle/>
           <a:p>
-            <a:r>
-              <a:rPr lang="en-US" dirty="0"/>
-              <a:t/>
-            </a:r>
             <a:endParaRPr lang="en-US" dirty="0"/>
           </a:p>
         </p:txBody>
@@ -967,10 +728,6 @@
           <a:bodyPr/>
           <a:lstStyle/>
           <a:p>
-            <a:r>
-              <a:rPr lang="en-US" dirty="0"/>
-              <a:t/>
-            </a:r>
             <a:endParaRPr lang="en-US" dirty="0"/>
           </a:p>
         </p:txBody>
@@ -1055,10 +812,6 @@
           <a:bodyPr/>
           <a:lstStyle/>
           <a:p>
-            <a:r>
-              <a:rPr lang="en-US" dirty="0"/>
-              <a:t/>
-            </a:r>
             <a:endParaRPr lang="en-US" dirty="0"/>
           </a:p>
         </p:txBody>
@@ -1143,10 +896,6 @@
           <a:bodyPr/>
           <a:lstStyle/>
           <a:p>
-            <a:r>
-              <a:rPr lang="en-US" dirty="0"/>
-              <a:t/>
-            </a:r>
             <a:endParaRPr lang="en-US" dirty="0"/>
           </a:p>
         </p:txBody>
@@ -1231,10 +980,6 @@
           <a:bodyPr/>
           <a:lstStyle/>
           <a:p>
-            <a:r>
-              <a:rPr lang="en-US" dirty="0"/>
-              <a:t/>
-            </a:r>
             <a:endParaRPr lang="en-US" dirty="0"/>
           </a:p>
         </p:txBody>
@@ -1319,10 +1064,6 @@
           <a:bodyPr/>
           <a:lstStyle/>
           <a:p>
-            <a:r>
-              <a:rPr lang="en-US" dirty="0"/>
-              <a:t/>
-            </a:r>
             <a:endParaRPr lang="en-US" dirty="0"/>
           </a:p>
         </p:txBody>
@@ -1407,10 +1148,6 @@
           <a:bodyPr/>
           <a:lstStyle/>
           <a:p>
-            <a:r>
-              <a:rPr lang="en-US" dirty="0"/>
-              <a:t/>
-            </a:r>
             <a:endParaRPr lang="en-US" dirty="0"/>
           </a:p>
         </p:txBody>
@@ -1495,10 +1232,6 @@
           <a:bodyPr/>
           <a:lstStyle/>
           <a:p>
-            <a:r>
-              <a:rPr lang="en-US" dirty="0"/>
-              <a:t/>
-            </a:r>
             <a:endParaRPr lang="en-US" dirty="0"/>
           </a:p>
         </p:txBody>
@@ -1583,10 +1316,6 @@
           <a:bodyPr/>
           <a:lstStyle/>
           <a:p>
-            <a:r>
-              <a:rPr lang="en-US" dirty="0"/>
-              <a:t/>
-            </a:r>
             <a:endParaRPr lang="en-US" dirty="0"/>
           </a:p>
         </p:txBody>
@@ -1671,10 +1400,6 @@
           <a:bodyPr/>
           <a:lstStyle/>
           <a:p>
-            <a:r>
-              <a:rPr lang="en-US" dirty="0"/>
-              <a:t/>
-            </a:r>
             <a:endParaRPr lang="en-US" dirty="0"/>
           </a:p>
         </p:txBody>
@@ -1759,10 +1484,6 @@
           <a:bodyPr/>
           <a:lstStyle/>
           <a:p>
-            <a:r>
-              <a:rPr lang="en-US" dirty="0"/>
-              <a:t/>
-            </a:r>
             <a:endParaRPr lang="en-US" dirty="0"/>
           </a:p>
         </p:txBody>
@@ -1847,10 +1568,6 @@
           <a:bodyPr/>
           <a:lstStyle/>
           <a:p>
-            <a:r>
-              <a:rPr lang="en-US" dirty="0"/>
-              <a:t/>
-            </a:r>
             <a:endParaRPr lang="en-US" dirty="0"/>
           </a:p>
         </p:txBody>
@@ -1935,10 +1652,6 @@
           <a:bodyPr/>
           <a:lstStyle/>
           <a:p>
-            <a:r>
-              <a:rPr lang="en-US" dirty="0"/>
-              <a:t/>
-            </a:r>
             <a:endParaRPr lang="en-US" dirty="0"/>
           </a:p>
         </p:txBody>
@@ -2023,10 +1736,6 @@
           <a:bodyPr/>
           <a:lstStyle/>
           <a:p>
-            <a:r>
-              <a:rPr lang="en-US" dirty="0"/>
-              <a:t/>
-            </a:r>
             <a:endParaRPr lang="en-US" dirty="0"/>
           </a:p>
         </p:txBody>
@@ -2111,10 +1820,6 @@
           <a:bodyPr/>
           <a:lstStyle/>
           <a:p>
-            <a:r>
-              <a:rPr lang="en-US" dirty="0"/>
-              <a:t/>
-            </a:r>
             <a:endParaRPr lang="en-US" dirty="0"/>
           </a:p>
         </p:txBody>
@@ -2199,10 +1904,6 @@
           <a:bodyPr/>
           <a:lstStyle/>
           <a:p>
-            <a:r>
-              <a:rPr lang="en-US" dirty="0"/>
-              <a:t/>
-            </a:r>
             <a:endParaRPr lang="en-US" dirty="0"/>
           </a:p>
         </p:txBody>
@@ -2287,10 +1988,6 @@
           <a:bodyPr/>
           <a:lstStyle/>
           <a:p>
-            <a:r>
-              <a:rPr lang="en-US" dirty="0"/>
-              <a:t/>
-            </a:r>
             <a:endParaRPr lang="en-US" dirty="0"/>
           </a:p>
         </p:txBody>
@@ -2375,10 +2072,6 @@
           <a:bodyPr/>
           <a:lstStyle/>
           <a:p>
-            <a:r>
-              <a:rPr lang="en-US" dirty="0"/>
-              <a:t/>
-            </a:r>
             <a:endParaRPr lang="en-US" dirty="0"/>
           </a:p>
         </p:txBody>
@@ -2463,10 +2156,6 @@
           <a:bodyPr/>
           <a:lstStyle/>
           <a:p>
-            <a:r>
-              <a:rPr lang="en-US" dirty="0"/>
-              <a:t/>
-            </a:r>
             <a:endParaRPr lang="en-US" dirty="0"/>
           </a:p>
         </p:txBody>
@@ -2551,10 +2240,6 @@
           <a:bodyPr/>
           <a:lstStyle/>
           <a:p>
-            <a:r>
-              <a:rPr lang="en-US" dirty="0"/>
-              <a:t/>
-            </a:r>
             <a:endParaRPr lang="en-US" dirty="0"/>
           </a:p>
         </p:txBody>
@@ -2639,10 +2324,6 @@
           <a:bodyPr/>
           <a:lstStyle/>
           <a:p>
-            <a:r>
-              <a:rPr lang="en-US" dirty="0"/>
-              <a:t/>
-            </a:r>
             <a:endParaRPr lang="en-US" dirty="0"/>
           </a:p>
         </p:txBody>
@@ -2727,10 +2408,6 @@
           <a:bodyPr/>
           <a:lstStyle/>
           <a:p>
-            <a:r>
-              <a:rPr lang="en-US" dirty="0"/>
-              <a:t/>
-            </a:r>
             <a:endParaRPr lang="en-US" dirty="0"/>
           </a:p>
         </p:txBody>
@@ -2815,10 +2492,6 @@
           <a:bodyPr/>
           <a:lstStyle/>
           <a:p>
-            <a:r>
-              <a:rPr lang="en-US" dirty="0"/>
-              <a:t/>
-            </a:r>
             <a:endParaRPr lang="en-US" dirty="0"/>
           </a:p>
         </p:txBody>
@@ -2903,10 +2576,6 @@
           <a:bodyPr/>
           <a:lstStyle/>
           <a:p>
-            <a:r>
-              <a:rPr lang="en-US" dirty="0"/>
-              <a:t/>
-            </a:r>
             <a:endParaRPr lang="en-US" dirty="0"/>
           </a:p>
         </p:txBody>
@@ -2980,6 +2649,11 @@
 <file path=ppt/slideMasters/slideMaster1.xml><?xml version="1.0" encoding="utf-8"?>
 <p:sldMaster xmlns:a="http://schemas.openxmlformats.org/drawingml/2006/main" xmlns:r="http://schemas.openxmlformats.org/officeDocument/2006/relationships" xmlns:p="http://schemas.openxmlformats.org/presentationml/2006/main">
   <p:cSld>
+    <p:bg>
+      <p:bgRef idx="1001">
+        <a:schemeClr val="bg1"/>
+      </p:bgRef>
+    </p:bg>
     <p:spTree>
       <p:nvGrpSpPr>
         <p:cNvPr id="1" name=""/>
@@ -3262,6 +2936,7 @@
         <a:solidFill>
           <a:srgbClr val="7F0000"/>
         </a:solidFill>
+        <a:effectLst/>
       </p:bgPr>
     </p:bg>
     <p:spTree>
@@ -3299,7 +2974,7 @@
           <a:bodyPr wrap="square" rtlCol="0" anchor="ctr"/>
           <a:lstStyle/>
           <a:p>
-            <a:pPr indent="0" marL="0">
+            <a:pPr marL="0" indent="0">
               <a:buNone/>
             </a:pPr>
             <a:r>
@@ -3338,7 +3013,7 @@
           <a:bodyPr wrap="square" rtlCol="0" anchor="ctr"/>
           <a:lstStyle/>
           <a:p>
-            <a:pPr algn="l" indent="0" marL="0">
+            <a:pPr marL="0" indent="0" algn="l">
               <a:buNone/>
             </a:pPr>
             <a:r>
@@ -3355,7 +3030,7 @@
             <a:endParaRPr lang="en-US" sz="3800" dirty="0"/>
           </a:p>
           <a:p>
-            <a:pPr algn="l" indent="0" marL="0">
+            <a:pPr marL="0" indent="0" algn="l">
               <a:buNone/>
             </a:pPr>
             <a:r>
@@ -3397,6 +3072,13 @@
             <a:prstDash val="solid"/>
           </a:ln>
         </p:spPr>
+        <p:txBody>
+          <a:bodyPr/>
+          <a:lstStyle/>
+          <a:p>
+            <a:endParaRPr lang="es-ES"/>
+          </a:p>
+        </p:txBody>
       </p:sp>
       <p:sp>
         <p:nvSpPr>
@@ -3419,7 +3101,7 @@
           <a:bodyPr wrap="square" rtlCol="0" anchor="ctr"/>
           <a:lstStyle/>
           <a:p>
-            <a:pPr indent="0" marL="0">
+            <a:pPr marL="0" indent="0">
               <a:buNone/>
             </a:pPr>
             <a:r>
@@ -3486,6 +3168,13 @@
             <a:prstDash val="solid"/>
           </a:ln>
         </p:spPr>
+        <p:txBody>
+          <a:bodyPr/>
+          <a:lstStyle/>
+          <a:p>
+            <a:endParaRPr lang="es-ES"/>
+          </a:p>
+        </p:txBody>
       </p:sp>
       <p:sp>
         <p:nvSpPr>
@@ -3508,7 +3197,7 @@
           <a:bodyPr wrap="square" rtlCol="0" anchor="ctr"/>
           <a:lstStyle/>
           <a:p>
-            <a:pPr indent="0" marL="0">
+            <a:pPr marL="0" indent="0">
               <a:buNone/>
             </a:pPr>
             <a:r>
@@ -3547,7 +3236,7 @@
           <a:bodyPr wrap="square" rtlCol="0" anchor="ctr"/>
           <a:lstStyle/>
           <a:p>
-            <a:pPr algn="r" indent="0" marL="0">
+            <a:pPr marL="0" indent="0" algn="r">
               <a:buNone/>
             </a:pPr>
             <a:r>
@@ -3573,8 +3262,8 @@
         </p:nvSpPr>
         <p:spPr>
           <a:xfrm>
-            <a:off x="548640" y="1371600"/>
-            <a:ext cx="11091672" cy="1920240"/>
+            <a:off x="548640" y="2103120"/>
+            <a:ext cx="11091672" cy="2286000"/>
           </a:xfrm>
           <a:prstGeom prst="rect">
             <a:avLst/>
@@ -3589,6 +3278,13 @@
             <a:prstDash val="solid"/>
           </a:ln>
         </p:spPr>
+        <p:txBody>
+          <a:bodyPr/>
+          <a:lstStyle/>
+          <a:p>
+            <a:endParaRPr lang="es-ES"/>
+          </a:p>
+        </p:txBody>
       </p:sp>
       <p:sp>
         <p:nvSpPr>
@@ -3598,8 +3294,8 @@
         </p:nvSpPr>
         <p:spPr>
           <a:xfrm>
-            <a:off x="548640" y="1371600"/>
-            <a:ext cx="73152" cy="1920240"/>
+            <a:off x="548640" y="2103120"/>
+            <a:ext cx="73152" cy="2286000"/>
           </a:xfrm>
           <a:prstGeom prst="rect">
             <a:avLst/>
@@ -3614,6 +3310,13 @@
             <a:prstDash val="solid"/>
           </a:ln>
         </p:spPr>
+        <p:txBody>
+          <a:bodyPr/>
+          <a:lstStyle/>
+          <a:p>
+            <a:endParaRPr lang="es-ES"/>
+          </a:p>
+        </p:txBody>
       </p:sp>
       <p:sp>
         <p:nvSpPr>
@@ -3623,8 +3326,8 @@
         </p:nvSpPr>
         <p:spPr>
           <a:xfrm>
-            <a:off x="822960" y="1481328"/>
-            <a:ext cx="10588752" cy="1700784"/>
+            <a:off x="822960" y="2212848"/>
+            <a:ext cx="10588752" cy="2066544"/>
           </a:xfrm>
           <a:prstGeom prst="rect">
             <a:avLst/>
@@ -3636,11 +3339,11 @@
           <a:bodyPr wrap="square" rtlCol="0" anchor="t"/>
           <a:lstStyle/>
           <a:p>
-            <a:pPr indent="0" marL="0">
-              <a:buNone/>
-            </a:pPr>
-            <a:r>
-              <a:rPr lang="en-US" sz="1650" dirty="0">
+            <a:pPr marL="0" indent="0">
+              <a:buNone/>
+            </a:pPr>
+            <a:r>
+              <a:rPr lang="en-US" sz="1900" dirty="0">
                 <a:solidFill>
                   <a:srgbClr val="263238"/>
                 </a:solidFill>
@@ -3650,14 +3353,14 @@
               </a:rPr>
               <a:t>// Un documento</a:t>
             </a:r>
-            <a:endParaRPr lang="en-US" sz="1650" dirty="0"/>
-          </a:p>
-          <a:p>
-            <a:pPr indent="0" marL="0">
-              <a:buNone/>
-            </a:pPr>
-            <a:r>
-              <a:rPr lang="en-US" sz="1650" dirty="0">
+            <a:endParaRPr lang="en-US" sz="1900" dirty="0"/>
+          </a:p>
+          <a:p>
+            <a:pPr marL="0" indent="0">
+              <a:buNone/>
+            </a:pPr>
+            <a:r>
+              <a:rPr lang="en-US" sz="1900" dirty="0">
                 <a:solidFill>
                   <a:srgbClr val="263238"/>
                 </a:solidFill>
@@ -3667,20 +3370,20 @@
               </a:rPr>
               <a:t>{ "_id": ObjectId("..."), "libroId": 1, "autor": "ana", "puntuacion": 8 }</a:t>
             </a:r>
-            <a:endParaRPr lang="en-US" sz="1650" dirty="0"/>
-          </a:p>
-          <a:p>
-            <a:pPr indent="0" marL="0">
-              <a:buNone/>
-            </a:pPr>
-            <a:endParaRPr lang="en-US" sz="1650" dirty="0"/>
-          </a:p>
-          <a:p>
-            <a:pPr indent="0" marL="0">
-              <a:buNone/>
-            </a:pPr>
-            <a:r>
-              <a:rPr lang="en-US" sz="1650" dirty="0">
+            <a:endParaRPr lang="en-US" sz="1900" dirty="0"/>
+          </a:p>
+          <a:p>
+            <a:pPr marL="0" indent="0">
+              <a:buNone/>
+            </a:pPr>
+            <a:endParaRPr lang="en-US" sz="1900" dirty="0"/>
+          </a:p>
+          <a:p>
+            <a:pPr marL="0" indent="0">
+              <a:buNone/>
+            </a:pPr>
+            <a:r>
+              <a:rPr lang="en-US" sz="1900" dirty="0">
                 <a:solidFill>
                   <a:srgbClr val="263238"/>
                 </a:solidFill>
@@ -3690,14 +3393,14 @@
               </a:rPr>
               <a:t>// El equivalente a un SELECT sencillo</a:t>
             </a:r>
-            <a:endParaRPr lang="en-US" sz="1650" dirty="0"/>
-          </a:p>
-          <a:p>
-            <a:pPr indent="0" marL="0">
-              <a:buNone/>
-            </a:pPr>
-            <a:r>
-              <a:rPr lang="en-US" sz="1650" dirty="0">
+            <a:endParaRPr lang="en-US" sz="1900" dirty="0"/>
+          </a:p>
+          <a:p>
+            <a:pPr marL="0" indent="0">
+              <a:buNone/>
+            </a:pPr>
+            <a:r>
+              <a:rPr lang="en-US" sz="1900" dirty="0">
                 <a:solidFill>
                   <a:srgbClr val="263238"/>
                 </a:solidFill>
@@ -3707,7 +3410,7 @@
               </a:rPr>
               <a:t>db.nota_lectura.find({ "libroId": 1 })</a:t>
             </a:r>
-            <a:endParaRPr lang="en-US" sz="1650" dirty="0"/>
+            <a:endParaRPr lang="en-US" sz="1900" dirty="0"/>
           </a:p>
         </p:txBody>
       </p:sp>
@@ -3719,7 +3422,7 @@
         </p:nvSpPr>
         <p:spPr>
           <a:xfrm>
-            <a:off x="548640" y="3611880"/>
+            <a:off x="548640" y="4754880"/>
             <a:ext cx="11091672" cy="822960"/>
           </a:xfrm>
           <a:prstGeom prst="rect">
@@ -3732,11 +3435,11 @@
           <a:bodyPr wrap="square" rtlCol="0" anchor="t"/>
           <a:lstStyle/>
           <a:p>
-            <a:pPr indent="0" marL="0">
-              <a:buNone/>
-            </a:pPr>
-            <a:r>
-              <a:rPr lang="en-US" sz="1700" dirty="0">
+            <a:pPr marL="0" indent="0">
+              <a:buNone/>
+            </a:pPr>
+            <a:r>
+              <a:rPr lang="en-US" sz="1800" dirty="0">
                 <a:solidFill>
                   <a:srgbClr val="757575"/>
                 </a:solidFill>
@@ -3746,7 +3449,7 @@
               </a:rPr>
               <a:t>Vale la pena verlo en esta forma cruda antes de que Spring lo esconda tras un repositorio — mongosh es la consola de MongoDB, análoga a psql.</a:t>
             </a:r>
-            <a:endParaRPr lang="en-US" sz="1700" dirty="0"/>
+            <a:endParaRPr lang="en-US" sz="1800" dirty="0"/>
           </a:p>
         </p:txBody>
       </p:sp>
@@ -3799,6 +3502,13 @@
             <a:prstDash val="solid"/>
           </a:ln>
         </p:spPr>
+        <p:txBody>
+          <a:bodyPr/>
+          <a:lstStyle/>
+          <a:p>
+            <a:endParaRPr lang="es-ES"/>
+          </a:p>
+        </p:txBody>
       </p:sp>
       <p:sp>
         <p:nvSpPr>
@@ -3821,7 +3531,7 @@
           <a:bodyPr wrap="square" rtlCol="0" anchor="ctr"/>
           <a:lstStyle/>
           <a:p>
-            <a:pPr indent="0" marL="0">
+            <a:pPr marL="0" indent="0">
               <a:buNone/>
             </a:pPr>
             <a:r>
@@ -3860,7 +3570,7 @@
           <a:bodyPr wrap="square" rtlCol="0" anchor="ctr"/>
           <a:lstStyle/>
           <a:p>
-            <a:pPr algn="r" indent="0" marL="0">
+            <a:pPr marL="0" indent="0" algn="r">
               <a:buNone/>
             </a:pPr>
             <a:r>
@@ -3886,8 +3596,8 @@
         </p:nvSpPr>
         <p:spPr>
           <a:xfrm>
-            <a:off x="548640" y="1234440"/>
-            <a:ext cx="11091672" cy="1371600"/>
+            <a:off x="548640" y="1920240"/>
+            <a:ext cx="11091672" cy="1463040"/>
           </a:xfrm>
           <a:prstGeom prst="rect">
             <a:avLst/>
@@ -3899,11 +3609,11 @@
           <a:bodyPr wrap="square" rtlCol="0" anchor="t"/>
           <a:lstStyle/>
           <a:p>
-            <a:pPr indent="0" marL="0">
-              <a:buNone/>
-            </a:pPr>
-            <a:r>
-              <a:rPr lang="en-US" sz="1750" dirty="0">
+            <a:pPr marL="0" indent="0">
+              <a:buNone/>
+            </a:pPr>
+            <a:r>
+              <a:rPr lang="en-US" sz="1950" dirty="0">
                 <a:solidFill>
                   <a:srgbClr val="212121"/>
                 </a:solidFill>
@@ -3913,7 +3623,7 @@
               </a:rPr>
               <a:t>Cuando los datos son autocontenidos y su estructura puede evolucionar con flexibilidad, el modelo documental encaja bien. Cuando el dominio tiene muchas relaciones entre entidades que deben mantenerse consistentes —una venta con clientes, productos y facturas—, el modelo relacional suele resultar más natural.</a:t>
             </a:r>
-            <a:endParaRPr lang="en-US" sz="1750" dirty="0"/>
+            <a:endParaRPr lang="en-US" sz="1950" dirty="0"/>
           </a:p>
         </p:txBody>
       </p:sp>
@@ -3925,8 +3635,8 @@
         </p:nvSpPr>
         <p:spPr>
           <a:xfrm>
-            <a:off x="548640" y="2880360"/>
-            <a:ext cx="11091672" cy="1554480"/>
+            <a:off x="548640" y="3749040"/>
+            <a:ext cx="11091672" cy="1828800"/>
           </a:xfrm>
           <a:prstGeom prst="roundRect">
             <a:avLst/>
@@ -3941,6 +3651,13 @@
             <a:prstDash val="solid"/>
           </a:ln>
         </p:spPr>
+        <p:txBody>
+          <a:bodyPr/>
+          <a:lstStyle/>
+          <a:p>
+            <a:endParaRPr lang="es-ES"/>
+          </a:p>
+        </p:txBody>
       </p:sp>
       <p:sp>
         <p:nvSpPr>
@@ -3950,8 +3667,8 @@
         </p:nvSpPr>
         <p:spPr>
           <a:xfrm>
-            <a:off x="822960" y="2971800"/>
-            <a:ext cx="10543032" cy="1371600"/>
+            <a:off x="822960" y="3840480"/>
+            <a:ext cx="10543032" cy="1645920"/>
           </a:xfrm>
           <a:prstGeom prst="rect">
             <a:avLst/>
@@ -3963,11 +3680,11 @@
           <a:bodyPr wrap="square" rtlCol="0" anchor="ctr"/>
           <a:lstStyle/>
           <a:p>
-            <a:pPr indent="0" marL="0">
-              <a:buNone/>
-            </a:pPr>
-            <a:r>
-              <a:rPr lang="en-US" sz="1700" dirty="0">
+            <a:pPr marL="0" indent="0">
+              <a:buNone/>
+            </a:pPr>
+            <a:r>
+              <a:rPr lang="en-US" sz="1900" dirty="0">
                 <a:solidFill>
                   <a:srgbClr val="212121"/>
                 </a:solidFill>
@@ -3977,7 +3694,7 @@
               </a:rPr>
               <a:t>Esto no significa que MongoDB carezca de transacciones: las operaciones sobre un único documento son atómicas, y también admite transacciones sobre varios documentos. La diferencia está sobre todo en cómo modelas los datos y sus relaciones, no en que un motor tenga transacciones y el otro no.</a:t>
             </a:r>
-            <a:endParaRPr lang="en-US" sz="1700" dirty="0"/>
+            <a:endParaRPr lang="en-US" sz="1900" dirty="0"/>
           </a:p>
         </p:txBody>
       </p:sp>
@@ -4030,6 +3747,13 @@
             <a:prstDash val="solid"/>
           </a:ln>
         </p:spPr>
+        <p:txBody>
+          <a:bodyPr/>
+          <a:lstStyle/>
+          <a:p>
+            <a:endParaRPr lang="es-ES"/>
+          </a:p>
+        </p:txBody>
       </p:sp>
       <p:sp>
         <p:nvSpPr>
@@ -4052,7 +3776,7 @@
           <a:bodyPr wrap="square" rtlCol="0" anchor="ctr"/>
           <a:lstStyle/>
           <a:p>
-            <a:pPr indent="0" marL="0">
+            <a:pPr marL="0" indent="0">
               <a:buNone/>
             </a:pPr>
             <a:r>
@@ -4091,7 +3815,7 @@
           <a:bodyPr wrap="square" rtlCol="0" anchor="ctr"/>
           <a:lstStyle/>
           <a:p>
-            <a:pPr algn="r" indent="0" marL="0">
+            <a:pPr marL="0" indent="0" algn="r">
               <a:buNone/>
             </a:pPr>
             <a:r>
@@ -4117,8 +3841,8 @@
         </p:nvSpPr>
         <p:spPr>
           <a:xfrm>
-            <a:off x="548640" y="1371600"/>
-            <a:ext cx="11091672" cy="1371600"/>
+            <a:off x="548640" y="2148840"/>
+            <a:ext cx="11091672" cy="1463040"/>
           </a:xfrm>
           <a:prstGeom prst="rect">
             <a:avLst/>
@@ -4130,11 +3854,11 @@
           <a:bodyPr wrap="square" rtlCol="0" anchor="t"/>
           <a:lstStyle/>
           <a:p>
-            <a:pPr indent="0" marL="0">
-              <a:buNone/>
-            </a:pPr>
-            <a:r>
-              <a:rPr lang="en-US" sz="1800" dirty="0">
+            <a:pPr marL="0" indent="0">
+              <a:buNone/>
+            </a:pPr>
+            <a:r>
+              <a:rPr lang="en-US" sz="2000" dirty="0">
                 <a:solidFill>
                   <a:srgbClr val="212121"/>
                 </a:solidFill>
@@ -4144,7 +3868,7 @@
               </a:rPr>
               <a:t>El catálogo (Libro/Editorial) vive en PostgreSQL — relaciones claras, transacciones fuertes. Pero los lectores pueden escribir notas de lectura: documentos independientes entre sí, sin relaciones que mantener, con forma que podría evolucionar. Eso encaja mejor en MongoDB.</a:t>
             </a:r>
-            <a:endParaRPr lang="en-US" sz="1800" dirty="0"/>
+            <a:endParaRPr lang="en-US" sz="2000" dirty="0"/>
           </a:p>
         </p:txBody>
       </p:sp>
@@ -4156,8 +3880,8 @@
         </p:nvSpPr>
         <p:spPr>
           <a:xfrm>
-            <a:off x="548640" y="3063240"/>
-            <a:ext cx="11091672" cy="502920"/>
+            <a:off x="548640" y="4023360"/>
+            <a:ext cx="11091672" cy="548640"/>
           </a:xfrm>
           <a:prstGeom prst="rect">
             <a:avLst/>
@@ -4169,11 +3893,11 @@
           <a:bodyPr wrap="square" rtlCol="0" anchor="t"/>
           <a:lstStyle/>
           <a:p>
-            <a:pPr indent="0" marL="0">
-              <a:buNone/>
-            </a:pPr>
-            <a:r>
-              <a:rPr lang="en-US" sz="1650" dirty="0">
+            <a:pPr marL="0" indent="0">
+              <a:buNone/>
+            </a:pPr>
+            <a:r>
+              <a:rPr lang="en-US" sz="1800" dirty="0">
                 <a:solidFill>
                   <a:srgbClr val="757575"/>
                 </a:solidFill>
@@ -4183,7 +3907,7 @@
               </a:rPr>
               <a:t>Usar dos motores a la vez es una decisión de arquitectura habitual, no una moda — cada uno se usa donde encaja mejor:</a:t>
             </a:r>
-            <a:endParaRPr lang="en-US" sz="1650" dirty="0"/>
+            <a:endParaRPr lang="en-US" sz="1800" dirty="0"/>
           </a:p>
         </p:txBody>
       </p:sp>
@@ -4236,6 +3960,13 @@
             <a:prstDash val="solid"/>
           </a:ln>
         </p:spPr>
+        <p:txBody>
+          <a:bodyPr/>
+          <a:lstStyle/>
+          <a:p>
+            <a:endParaRPr lang="es-ES"/>
+          </a:p>
+        </p:txBody>
       </p:sp>
       <p:sp>
         <p:nvSpPr>
@@ -4258,7 +3989,7 @@
           <a:bodyPr wrap="square" rtlCol="0" anchor="ctr"/>
           <a:lstStyle/>
           <a:p>
-            <a:pPr indent="0" marL="0">
+            <a:pPr marL="0" indent="0">
               <a:buNone/>
             </a:pPr>
             <a:r>
@@ -4297,7 +4028,7 @@
           <a:bodyPr wrap="square" rtlCol="0" anchor="ctr"/>
           <a:lstStyle/>
           <a:p>
-            <a:pPr algn="r" indent="0" marL="0">
+            <a:pPr marL="0" indent="0" algn="r">
               <a:buNone/>
             </a:pPr>
             <a:r>
@@ -4323,8 +4054,8 @@
         </p:nvSpPr>
         <p:spPr>
           <a:xfrm>
-            <a:off x="4174236" y="1645920"/>
-            <a:ext cx="3840480" cy="731520"/>
+            <a:off x="3991356" y="1554480"/>
+            <a:ext cx="4206240" cy="868680"/>
           </a:xfrm>
           <a:prstGeom prst="roundRect">
             <a:avLst/>
@@ -4339,6 +4070,13 @@
             <a:prstDash val="solid"/>
           </a:ln>
         </p:spPr>
+        <p:txBody>
+          <a:bodyPr/>
+          <a:lstStyle/>
+          <a:p>
+            <a:endParaRPr lang="es-ES"/>
+          </a:p>
+        </p:txBody>
       </p:sp>
       <p:sp>
         <p:nvSpPr>
@@ -4348,8 +4086,8 @@
         </p:nvSpPr>
         <p:spPr>
           <a:xfrm>
-            <a:off x="4174236" y="1645920"/>
-            <a:ext cx="3840480" cy="731520"/>
+            <a:off x="3991356" y="1554480"/>
+            <a:ext cx="4206240" cy="868680"/>
           </a:xfrm>
           <a:prstGeom prst="rect">
             <a:avLst/>
@@ -4361,11 +4099,11 @@
           <a:bodyPr wrap="square" rtlCol="0" anchor="ctr"/>
           <a:lstStyle/>
           <a:p>
-            <a:pPr algn="ctr" indent="0" marL="0">
-              <a:buNone/>
-            </a:pPr>
-            <a:r>
-              <a:rPr lang="en-US" sz="1800" b="1" dirty="0">
+            <a:pPr marL="0" indent="0" algn="ctr">
+              <a:buNone/>
+            </a:pPr>
+            <a:r>
+              <a:rPr lang="en-US" sz="2000" b="1" dirty="0">
                 <a:solidFill>
                   <a:srgbClr val="212121"/>
                 </a:solidFill>
@@ -4375,55 +4113,9 @@
               </a:rPr>
               <a:t>🖥️ Tu aplicación Spring Boot</a:t>
             </a:r>
-            <a:endParaRPr lang="en-US" sz="1800" dirty="0"/>
-          </a:p>
-        </p:txBody>
-      </p:sp>
-      <p:sp>
-        <p:nvSpPr>
-          <p:cNvPr id="7" name="Shape 5"/>
-          <p:cNvSpPr/>
-          <p:nvPr/>
-        </p:nvSpPr>
-        <p:spPr>
-          <a:xfrm>
-            <a:off x="6094476" y="2377440"/>
-            <a:ext cx="2910078" cy="914400"/>
-          </a:xfrm>
-          <a:prstGeom prst="line">
-            <a:avLst/>
-          </a:prstGeom>
-          <a:noFill/>
-          <a:ln w="15875">
-            <a:solidFill>
-              <a:srgbClr val="C62828"/>
-            </a:solidFill>
-            <a:prstDash val="solid"/>
-          </a:ln>
-        </p:spPr>
-      </p:sp>
-      <p:sp>
-        <p:nvSpPr>
-          <p:cNvPr id="8" name="Shape 6"/>
-          <p:cNvSpPr/>
-          <p:nvPr/>
-        </p:nvSpPr>
-        <p:spPr>
-          <a:xfrm>
-            <a:off x="6094476" y="2377440"/>
-            <a:ext cx="2910078" cy="914400"/>
-          </a:xfrm>
-          <a:prstGeom prst="line">
-            <a:avLst/>
-          </a:prstGeom>
-          <a:noFill/>
-          <a:ln w="15875">
-            <a:solidFill>
-              <a:srgbClr val="C62828"/>
-            </a:solidFill>
-            <a:prstDash val="solid"/>
-          </a:ln>
-        </p:spPr>
+            <a:endParaRPr lang="en-US" sz="2000" dirty="0"/>
+          </a:p>
+        </p:txBody>
       </p:sp>
       <p:sp>
         <p:nvSpPr>
@@ -4433,8 +4125,8 @@
         </p:nvSpPr>
         <p:spPr>
           <a:xfrm>
-            <a:off x="548640" y="2423160"/>
-            <a:ext cx="5271516" cy="457200"/>
+            <a:off x="548640" y="2884932"/>
+            <a:ext cx="5271516" cy="502920"/>
           </a:xfrm>
           <a:prstGeom prst="rect">
             <a:avLst/>
@@ -4446,11 +4138,11 @@
           <a:bodyPr wrap="square" rtlCol="0" anchor="ctr"/>
           <a:lstStyle/>
           <a:p>
-            <a:pPr algn="ctr" indent="0" marL="0">
-              <a:buNone/>
-            </a:pPr>
-            <a:r>
-              <a:rPr lang="en-US" sz="1400" b="1" i="1" dirty="0">
+            <a:pPr marL="0" indent="0" algn="ctr">
+              <a:buNone/>
+            </a:pPr>
+            <a:r>
+              <a:rPr lang="en-US" sz="1600" b="1" i="1" dirty="0">
                 <a:solidFill>
                   <a:srgbClr val="C62828"/>
                 </a:solidFill>
@@ -4460,7 +4152,7 @@
               </a:rPr>
               <a:t>Spring Data JPA</a:t>
             </a:r>
-            <a:endParaRPr lang="en-US" sz="1400" dirty="0"/>
+            <a:endParaRPr lang="en-US" sz="1600" dirty="0"/>
           </a:p>
         </p:txBody>
       </p:sp>
@@ -4472,8 +4164,8 @@
         </p:nvSpPr>
         <p:spPr>
           <a:xfrm>
-            <a:off x="6368796" y="2423160"/>
-            <a:ext cx="5271516" cy="457200"/>
+            <a:off x="6368796" y="2874948"/>
+            <a:ext cx="5271516" cy="502920"/>
           </a:xfrm>
           <a:prstGeom prst="rect">
             <a:avLst/>
@@ -4485,11 +4177,11 @@
           <a:bodyPr wrap="square" rtlCol="0" anchor="ctr"/>
           <a:lstStyle/>
           <a:p>
-            <a:pPr algn="ctr" indent="0" marL="0">
-              <a:buNone/>
-            </a:pPr>
-            <a:r>
-              <a:rPr lang="en-US" sz="1400" b="1" i="1" dirty="0">
+            <a:pPr marL="0" indent="0" algn="ctr">
+              <a:buNone/>
+            </a:pPr>
+            <a:r>
+              <a:rPr lang="en-US" sz="1600" b="1" i="1" dirty="0">
                 <a:solidFill>
                   <a:srgbClr val="C62828"/>
                 </a:solidFill>
@@ -4499,7 +4191,7 @@
               </a:rPr>
               <a:t>Spring Data MongoDB</a:t>
             </a:r>
-            <a:endParaRPr lang="en-US" sz="1400" dirty="0"/>
+            <a:endParaRPr lang="en-US" sz="1600" dirty="0"/>
           </a:p>
         </p:txBody>
       </p:sp>
@@ -4511,8 +4203,8 @@
         </p:nvSpPr>
         <p:spPr>
           <a:xfrm>
-            <a:off x="548640" y="3291840"/>
-            <a:ext cx="5271516" cy="914400"/>
+            <a:off x="548640" y="3429000"/>
+            <a:ext cx="5271516" cy="1143000"/>
           </a:xfrm>
           <a:prstGeom prst="roundRect">
             <a:avLst/>
@@ -4527,6 +4219,13 @@
             <a:prstDash val="solid"/>
           </a:ln>
         </p:spPr>
+        <p:txBody>
+          <a:bodyPr/>
+          <a:lstStyle/>
+          <a:p>
+            <a:endParaRPr lang="es-ES"/>
+          </a:p>
+        </p:txBody>
       </p:sp>
       <p:sp>
         <p:nvSpPr>
@@ -4536,8 +4235,8 @@
         </p:nvSpPr>
         <p:spPr>
           <a:xfrm>
-            <a:off x="548640" y="3291840"/>
-            <a:ext cx="5271516" cy="914400"/>
+            <a:off x="548640" y="3429000"/>
+            <a:ext cx="5271516" cy="1143000"/>
           </a:xfrm>
           <a:prstGeom prst="rect">
             <a:avLst/>
@@ -4549,11 +4248,11 @@
           <a:bodyPr wrap="square" rtlCol="0" anchor="ctr"/>
           <a:lstStyle/>
           <a:p>
-            <a:pPr algn="ctr" indent="0" marL="0">
-              <a:buNone/>
-            </a:pPr>
-            <a:r>
-              <a:rPr lang="en-US" sz="1700" dirty="0">
+            <a:pPr marL="0" indent="0" algn="ctr">
+              <a:buNone/>
+            </a:pPr>
+            <a:r>
+              <a:rPr lang="en-US" sz="1900" dirty="0">
                 <a:solidFill>
                   <a:srgbClr val="212121"/>
                 </a:solidFill>
@@ -4563,14 +4262,14 @@
               </a:rPr>
               <a:t>🐘 PostgreSQL</a:t>
             </a:r>
-            <a:endParaRPr lang="en-US" sz="1700" dirty="0"/>
-          </a:p>
-          <a:p>
-            <a:pPr algn="ctr" indent="0" marL="0">
-              <a:buNone/>
-            </a:pPr>
-            <a:r>
-              <a:rPr lang="en-US" sz="1700" dirty="0">
+            <a:endParaRPr lang="en-US" sz="1900" dirty="0"/>
+          </a:p>
+          <a:p>
+            <a:pPr marL="0" indent="0" algn="ctr">
+              <a:buNone/>
+            </a:pPr>
+            <a:r>
+              <a:rPr lang="en-US" sz="1900" dirty="0">
                 <a:solidFill>
                   <a:srgbClr val="212121"/>
                 </a:solidFill>
@@ -4580,7 +4279,7 @@
               </a:rPr>
               <a:t>Libro, Editorial</a:t>
             </a:r>
-            <a:endParaRPr lang="en-US" sz="1700" dirty="0"/>
+            <a:endParaRPr lang="en-US" sz="1900" dirty="0"/>
           </a:p>
         </p:txBody>
       </p:sp>
@@ -4592,8 +4291,8 @@
         </p:nvSpPr>
         <p:spPr>
           <a:xfrm>
-            <a:off x="6368796" y="3291840"/>
-            <a:ext cx="5271516" cy="914400"/>
+            <a:off x="6368796" y="3429000"/>
+            <a:ext cx="5271516" cy="1143000"/>
           </a:xfrm>
           <a:prstGeom prst="roundRect">
             <a:avLst/>
@@ -4608,6 +4307,13 @@
             <a:prstDash val="solid"/>
           </a:ln>
         </p:spPr>
+        <p:txBody>
+          <a:bodyPr/>
+          <a:lstStyle/>
+          <a:p>
+            <a:endParaRPr lang="es-ES"/>
+          </a:p>
+        </p:txBody>
       </p:sp>
       <p:sp>
         <p:nvSpPr>
@@ -4617,8 +4323,8 @@
         </p:nvSpPr>
         <p:spPr>
           <a:xfrm>
-            <a:off x="6368796" y="3291840"/>
-            <a:ext cx="5271516" cy="914400"/>
+            <a:off x="6368796" y="3429000"/>
+            <a:ext cx="5271516" cy="1143000"/>
           </a:xfrm>
           <a:prstGeom prst="rect">
             <a:avLst/>
@@ -4630,11 +4336,11 @@
           <a:bodyPr wrap="square" rtlCol="0" anchor="ctr"/>
           <a:lstStyle/>
           <a:p>
-            <a:pPr algn="ctr" indent="0" marL="0">
-              <a:buNone/>
-            </a:pPr>
-            <a:r>
-              <a:rPr lang="en-US" sz="1700" dirty="0">
+            <a:pPr marL="0" indent="0" algn="ctr">
+              <a:buNone/>
+            </a:pPr>
+            <a:r>
+              <a:rPr lang="en-US" sz="1900" dirty="0">
                 <a:solidFill>
                   <a:srgbClr val="212121"/>
                 </a:solidFill>
@@ -4644,14 +4350,14 @@
               </a:rPr>
               <a:t>🍃 MongoDB</a:t>
             </a:r>
-            <a:endParaRPr lang="en-US" sz="1700" dirty="0"/>
-          </a:p>
-          <a:p>
-            <a:pPr algn="ctr" indent="0" marL="0">
-              <a:buNone/>
-            </a:pPr>
-            <a:r>
-              <a:rPr lang="en-US" sz="1700" dirty="0">
+            <a:endParaRPr lang="en-US" sz="1900" dirty="0"/>
+          </a:p>
+          <a:p>
+            <a:pPr marL="0" indent="0" algn="ctr">
+              <a:buNone/>
+            </a:pPr>
+            <a:r>
+              <a:rPr lang="en-US" sz="1900" dirty="0">
                 <a:solidFill>
                   <a:srgbClr val="212121"/>
                 </a:solidFill>
@@ -4661,7 +4367,7 @@
               </a:rPr>
               <a:t>NotaLectura</a:t>
             </a:r>
-            <a:endParaRPr lang="en-US" sz="1700" dirty="0"/>
+            <a:endParaRPr lang="en-US" sz="1900" dirty="0"/>
           </a:p>
         </p:txBody>
       </p:sp>
@@ -4673,7 +4379,7 @@
         </p:nvSpPr>
         <p:spPr>
           <a:xfrm>
-            <a:off x="548640" y="4526280"/>
+            <a:off x="548640" y="4937760"/>
             <a:ext cx="11091672" cy="822960"/>
           </a:xfrm>
           <a:prstGeom prst="rect">
@@ -4686,11 +4392,11 @@
           <a:bodyPr wrap="square" rtlCol="0" anchor="t"/>
           <a:lstStyle/>
           <a:p>
-            <a:pPr indent="0" marL="0">
-              <a:buNone/>
-            </a:pPr>
-            <a:r>
-              <a:rPr lang="en-US" sz="1550" dirty="0">
+            <a:pPr marL="0" indent="0">
+              <a:buNone/>
+            </a:pPr>
+            <a:r>
+              <a:rPr lang="en-US" sz="1700" dirty="0">
                 <a:solidFill>
                   <a:srgbClr val="757575"/>
                 </a:solidFill>
@@ -4700,7 +4406,7 @@
               </a:rPr>
               <a:t>Cada motor a través de su propio Spring Data — no hay ningún puente automático entre ellos, y esa ausencia de puente es lo que resuelves tú mismo en el resto de este apartado.</a:t>
             </a:r>
-            <a:endParaRPr lang="en-US" sz="1550" dirty="0"/>
+            <a:endParaRPr lang="en-US" sz="1700" dirty="0"/>
           </a:p>
         </p:txBody>
       </p:sp>
@@ -4753,6 +4459,13 @@
             <a:prstDash val="solid"/>
           </a:ln>
         </p:spPr>
+        <p:txBody>
+          <a:bodyPr/>
+          <a:lstStyle/>
+          <a:p>
+            <a:endParaRPr lang="es-ES"/>
+          </a:p>
+        </p:txBody>
       </p:sp>
       <p:sp>
         <p:nvSpPr>
@@ -4775,7 +4488,7 @@
           <a:bodyPr wrap="square" rtlCol="0" anchor="ctr"/>
           <a:lstStyle/>
           <a:p>
-            <a:pPr indent="0" marL="0">
+            <a:pPr marL="0" indent="0">
               <a:buNone/>
             </a:pPr>
             <a:r>
@@ -4814,7 +4527,7 @@
           <a:bodyPr wrap="square" rtlCol="0" anchor="ctr"/>
           <a:lstStyle/>
           <a:p>
-            <a:pPr algn="r" indent="0" marL="0">
+            <a:pPr marL="0" indent="0" algn="r">
               <a:buNone/>
             </a:pPr>
             <a:r>
@@ -4840,8 +4553,8 @@
         </p:nvSpPr>
         <p:spPr>
           <a:xfrm>
-            <a:off x="548640" y="1371600"/>
-            <a:ext cx="11091672" cy="1005840"/>
+            <a:off x="548640" y="1920240"/>
+            <a:ext cx="11091672" cy="1097280"/>
           </a:xfrm>
           <a:prstGeom prst="rect">
             <a:avLst/>
@@ -4853,11 +4566,11 @@
           <a:bodyPr wrap="square" rtlCol="0" anchor="t"/>
           <a:lstStyle/>
           <a:p>
-            <a:pPr indent="0" marL="0">
-              <a:buNone/>
-            </a:pPr>
-            <a:r>
-              <a:rPr lang="en-US" sz="1800" dirty="0">
+            <a:pPr marL="0" indent="0">
+              <a:buNone/>
+            </a:pPr>
+            <a:r>
+              <a:rPr lang="en-US" sz="2000" dirty="0">
                 <a:solidFill>
                   <a:srgbClr val="212121"/>
                 </a:solidFill>
@@ -4867,7 +4580,7 @@
               </a:rPr>
               <a:t>Antes de escribir ninguna entidad ni repositorio, tu aplicación necesita saber cómo llegar a MongoDB — igual que necesitó saber cómo llegar a PostgreSQL antes de poder usar @Entity. Una dependencia nueva en el pom.xml:</a:t>
             </a:r>
-            <a:endParaRPr lang="en-US" sz="1800" dirty="0"/>
+            <a:endParaRPr lang="en-US" sz="2000" dirty="0"/>
           </a:p>
         </p:txBody>
       </p:sp>
@@ -4879,8 +4592,8 @@
         </p:nvSpPr>
         <p:spPr>
           <a:xfrm>
-            <a:off x="548640" y="2697480"/>
-            <a:ext cx="11091672" cy="1463040"/>
+            <a:off x="548640" y="3383280"/>
+            <a:ext cx="11091672" cy="1828800"/>
           </a:xfrm>
           <a:prstGeom prst="rect">
             <a:avLst/>
@@ -4895,6 +4608,13 @@
             <a:prstDash val="solid"/>
           </a:ln>
         </p:spPr>
+        <p:txBody>
+          <a:bodyPr/>
+          <a:lstStyle/>
+          <a:p>
+            <a:endParaRPr lang="es-ES"/>
+          </a:p>
+        </p:txBody>
       </p:sp>
       <p:sp>
         <p:nvSpPr>
@@ -4904,8 +4624,8 @@
         </p:nvSpPr>
         <p:spPr>
           <a:xfrm>
-            <a:off x="548640" y="2697480"/>
-            <a:ext cx="73152" cy="1463040"/>
+            <a:off x="548640" y="3383280"/>
+            <a:ext cx="73152" cy="1828800"/>
           </a:xfrm>
           <a:prstGeom prst="rect">
             <a:avLst/>
@@ -4920,6 +4640,13 @@
             <a:prstDash val="solid"/>
           </a:ln>
         </p:spPr>
+        <p:txBody>
+          <a:bodyPr/>
+          <a:lstStyle/>
+          <a:p>
+            <a:endParaRPr lang="es-ES"/>
+          </a:p>
+        </p:txBody>
       </p:sp>
       <p:sp>
         <p:nvSpPr>
@@ -4929,8 +4656,8 @@
         </p:nvSpPr>
         <p:spPr>
           <a:xfrm>
-            <a:off x="822960" y="2807208"/>
-            <a:ext cx="10588752" cy="1243584"/>
+            <a:off x="822960" y="3493008"/>
+            <a:ext cx="10588752" cy="1609344"/>
           </a:xfrm>
           <a:prstGeom prst="rect">
             <a:avLst/>
@@ -4942,11 +4669,11 @@
           <a:bodyPr wrap="square" rtlCol="0" anchor="t"/>
           <a:lstStyle/>
           <a:p>
-            <a:pPr indent="0" marL="0">
-              <a:buNone/>
-            </a:pPr>
-            <a:r>
-              <a:rPr lang="en-US" sz="1700" dirty="0">
+            <a:pPr marL="0" indent="0">
+              <a:buNone/>
+            </a:pPr>
+            <a:r>
+              <a:rPr lang="en-US" sz="1900" dirty="0">
                 <a:solidFill>
                   <a:srgbClr val="263238"/>
                 </a:solidFill>
@@ -4956,14 +4683,14 @@
               </a:rPr>
               <a:t>&lt;dependency&gt;</a:t>
             </a:r>
-            <a:endParaRPr lang="en-US" sz="1700" dirty="0"/>
-          </a:p>
-          <a:p>
-            <a:pPr indent="0" marL="0">
-              <a:buNone/>
-            </a:pPr>
-            <a:r>
-              <a:rPr lang="en-US" sz="1700" dirty="0">
+            <a:endParaRPr lang="en-US" sz="1900" dirty="0"/>
+          </a:p>
+          <a:p>
+            <a:pPr marL="0" indent="0">
+              <a:buNone/>
+            </a:pPr>
+            <a:r>
+              <a:rPr lang="en-US" sz="1900" dirty="0">
                 <a:solidFill>
                   <a:srgbClr val="263238"/>
                 </a:solidFill>
@@ -4973,14 +4700,14 @@
               </a:rPr>
               <a:t>    &lt;groupId&gt;org.springframework.boot&lt;/groupId&gt;</a:t>
             </a:r>
-            <a:endParaRPr lang="en-US" sz="1700" dirty="0"/>
-          </a:p>
-          <a:p>
-            <a:pPr indent="0" marL="0">
-              <a:buNone/>
-            </a:pPr>
-            <a:r>
-              <a:rPr lang="en-US" sz="1700" dirty="0">
+            <a:endParaRPr lang="en-US" sz="1900" dirty="0"/>
+          </a:p>
+          <a:p>
+            <a:pPr marL="0" indent="0">
+              <a:buNone/>
+            </a:pPr>
+            <a:r>
+              <a:rPr lang="en-US" sz="1900" dirty="0">
                 <a:solidFill>
                   <a:srgbClr val="263238"/>
                 </a:solidFill>
@@ -4990,14 +4717,14 @@
               </a:rPr>
               <a:t>    &lt;artifactId&gt;spring-boot-starter-data-mongodb&lt;/artifactId&gt;</a:t>
             </a:r>
-            <a:endParaRPr lang="en-US" sz="1700" dirty="0"/>
-          </a:p>
-          <a:p>
-            <a:pPr indent="0" marL="0">
-              <a:buNone/>
-            </a:pPr>
-            <a:r>
-              <a:rPr lang="en-US" sz="1700" dirty="0">
+            <a:endParaRPr lang="en-US" sz="1900" dirty="0"/>
+          </a:p>
+          <a:p>
+            <a:pPr marL="0" indent="0">
+              <a:buNone/>
+            </a:pPr>
+            <a:r>
+              <a:rPr lang="en-US" sz="1900" dirty="0">
                 <a:solidFill>
                   <a:srgbClr val="263238"/>
                 </a:solidFill>
@@ -5007,7 +4734,7 @@
               </a:rPr>
               <a:t>&lt;/dependency&gt;</a:t>
             </a:r>
-            <a:endParaRPr lang="en-US" sz="1700" dirty="0"/>
+            <a:endParaRPr lang="en-US" sz="1900" dirty="0"/>
           </a:p>
         </p:txBody>
       </p:sp>
@@ -5060,6 +4787,13 @@
             <a:prstDash val="solid"/>
           </a:ln>
         </p:spPr>
+        <p:txBody>
+          <a:bodyPr/>
+          <a:lstStyle/>
+          <a:p>
+            <a:endParaRPr lang="es-ES"/>
+          </a:p>
+        </p:txBody>
       </p:sp>
       <p:sp>
         <p:nvSpPr>
@@ -5082,7 +4816,7 @@
           <a:bodyPr wrap="square" rtlCol="0" anchor="ctr"/>
           <a:lstStyle/>
           <a:p>
-            <a:pPr indent="0" marL="0">
+            <a:pPr marL="0" indent="0">
               <a:buNone/>
             </a:pPr>
             <a:r>
@@ -5121,7 +4855,7 @@
           <a:bodyPr wrap="square" rtlCol="0" anchor="ctr"/>
           <a:lstStyle/>
           <a:p>
-            <a:pPr algn="r" indent="0" marL="0">
+            <a:pPr marL="0" indent="0" algn="r">
               <a:buNone/>
             </a:pPr>
             <a:r>
@@ -5147,8 +4881,8 @@
         </p:nvSpPr>
         <p:spPr>
           <a:xfrm>
-            <a:off x="548640" y="1280160"/>
-            <a:ext cx="11091672" cy="502920"/>
+            <a:off x="548640" y="1417320"/>
+            <a:ext cx="11091672" cy="548640"/>
           </a:xfrm>
           <a:prstGeom prst="rect">
             <a:avLst/>
@@ -5160,11 +4894,11 @@
           <a:bodyPr wrap="square" rtlCol="0" anchor="t"/>
           <a:lstStyle/>
           <a:p>
-            <a:pPr indent="0" marL="0">
-              <a:buNone/>
-            </a:pPr>
-            <a:r>
-              <a:rPr lang="en-US" sz="1800" dirty="0">
+            <a:pPr marL="0" indent="0">
+              <a:buNone/>
+            </a:pPr>
+            <a:r>
+              <a:rPr lang="en-US" sz="2000" dirty="0">
                 <a:solidFill>
                   <a:srgbClr val="212121"/>
                 </a:solidFill>
@@ -5174,7 +4908,7 @@
               </a:rPr>
               <a:t>En application-dev.yml, en paralelo al datasource de PostgreSQL que ya conoces del Tema 1:</a:t>
             </a:r>
-            <a:endParaRPr lang="en-US" sz="1800" dirty="0"/>
+            <a:endParaRPr lang="en-US" sz="2000" dirty="0"/>
           </a:p>
         </p:txBody>
       </p:sp>
@@ -5186,8 +4920,8 @@
         </p:nvSpPr>
         <p:spPr>
           <a:xfrm>
-            <a:off x="548640" y="2011680"/>
-            <a:ext cx="11091672" cy="1188720"/>
+            <a:off x="548640" y="2240280"/>
+            <a:ext cx="11091672" cy="1371600"/>
           </a:xfrm>
           <a:prstGeom prst="rect">
             <a:avLst/>
@@ -5202,6 +4936,13 @@
             <a:prstDash val="solid"/>
           </a:ln>
         </p:spPr>
+        <p:txBody>
+          <a:bodyPr/>
+          <a:lstStyle/>
+          <a:p>
+            <a:endParaRPr lang="es-ES"/>
+          </a:p>
+        </p:txBody>
       </p:sp>
       <p:sp>
         <p:nvSpPr>
@@ -5211,8 +4952,8 @@
         </p:nvSpPr>
         <p:spPr>
           <a:xfrm>
-            <a:off x="548640" y="2011680"/>
-            <a:ext cx="73152" cy="1188720"/>
+            <a:off x="548640" y="2240280"/>
+            <a:ext cx="73152" cy="1371600"/>
           </a:xfrm>
           <a:prstGeom prst="rect">
             <a:avLst/>
@@ -5227,6 +4968,13 @@
             <a:prstDash val="solid"/>
           </a:ln>
         </p:spPr>
+        <p:txBody>
+          <a:bodyPr/>
+          <a:lstStyle/>
+          <a:p>
+            <a:endParaRPr lang="es-ES"/>
+          </a:p>
+        </p:txBody>
       </p:sp>
       <p:sp>
         <p:nvSpPr>
@@ -5236,8 +4984,8 @@
         </p:nvSpPr>
         <p:spPr>
           <a:xfrm>
-            <a:off x="822960" y="2121408"/>
-            <a:ext cx="10588752" cy="969264"/>
+            <a:off x="822960" y="2350008"/>
+            <a:ext cx="10588752" cy="1152144"/>
           </a:xfrm>
           <a:prstGeom prst="rect">
             <a:avLst/>
@@ -5249,11 +4997,11 @@
           <a:bodyPr wrap="square" rtlCol="0" anchor="t"/>
           <a:lstStyle/>
           <a:p>
-            <a:pPr indent="0" marL="0">
-              <a:buNone/>
-            </a:pPr>
-            <a:r>
-              <a:rPr lang="en-US" sz="1700" dirty="0">
+            <a:pPr marL="0" indent="0">
+              <a:buNone/>
+            </a:pPr>
+            <a:r>
+              <a:rPr lang="en-US" sz="1900" dirty="0">
                 <a:solidFill>
                   <a:srgbClr val="263238"/>
                 </a:solidFill>
@@ -5263,14 +5011,14 @@
               </a:rPr>
               <a:t>spring:</a:t>
             </a:r>
-            <a:endParaRPr lang="en-US" sz="1700" dirty="0"/>
-          </a:p>
-          <a:p>
-            <a:pPr indent="0" marL="0">
-              <a:buNone/>
-            </a:pPr>
-            <a:r>
-              <a:rPr lang="en-US" sz="1700" dirty="0">
+            <a:endParaRPr lang="en-US" sz="1900" dirty="0"/>
+          </a:p>
+          <a:p>
+            <a:pPr marL="0" indent="0">
+              <a:buNone/>
+            </a:pPr>
+            <a:r>
+              <a:rPr lang="en-US" sz="1900" dirty="0">
                 <a:solidFill>
                   <a:srgbClr val="263238"/>
                 </a:solidFill>
@@ -5280,14 +5028,14 @@
               </a:rPr>
               <a:t>  mongodb:</a:t>
             </a:r>
-            <a:endParaRPr lang="en-US" sz="1700" dirty="0"/>
-          </a:p>
-          <a:p>
-            <a:pPr indent="0" marL="0">
-              <a:buNone/>
-            </a:pPr>
-            <a:r>
-              <a:rPr lang="en-US" sz="1700" dirty="0">
+            <a:endParaRPr lang="en-US" sz="1900" dirty="0"/>
+          </a:p>
+          <a:p>
+            <a:pPr marL="0" indent="0">
+              <a:buNone/>
+            </a:pPr>
+            <a:r>
+              <a:rPr lang="en-US" sz="1900" dirty="0">
                 <a:solidFill>
                   <a:srgbClr val="263238"/>
                 </a:solidFill>
@@ -5297,7 +5045,7 @@
               </a:rPr>
               <a:t>    uri: mongodb://localhost:27017/libreria_db</a:t>
             </a:r>
-            <a:endParaRPr lang="en-US" sz="1700" dirty="0"/>
+            <a:endParaRPr lang="en-US" sz="1900" dirty="0"/>
           </a:p>
         </p:txBody>
       </p:sp>
@@ -5309,8 +5057,8 @@
         </p:nvSpPr>
         <p:spPr>
           <a:xfrm>
-            <a:off x="548640" y="3474720"/>
-            <a:ext cx="11091672" cy="1554480"/>
+            <a:off x="548640" y="3931920"/>
+            <a:ext cx="11091672" cy="1828800"/>
           </a:xfrm>
           <a:prstGeom prst="roundRect">
             <a:avLst/>
@@ -5325,6 +5073,13 @@
             <a:prstDash val="solid"/>
           </a:ln>
         </p:spPr>
+        <p:txBody>
+          <a:bodyPr/>
+          <a:lstStyle/>
+          <a:p>
+            <a:endParaRPr lang="es-ES"/>
+          </a:p>
+        </p:txBody>
       </p:sp>
       <p:sp>
         <p:nvSpPr>
@@ -5334,8 +5089,8 @@
         </p:nvSpPr>
         <p:spPr>
           <a:xfrm>
-            <a:off x="822960" y="3566160"/>
-            <a:ext cx="10543032" cy="1371600"/>
+            <a:off x="822960" y="4023360"/>
+            <a:ext cx="10543032" cy="1645920"/>
           </a:xfrm>
           <a:prstGeom prst="rect">
             <a:avLst/>
@@ -5347,11 +5102,11 @@
           <a:bodyPr wrap="square" rtlCol="0" anchor="ctr"/>
           <a:lstStyle/>
           <a:p>
-            <a:pPr indent="0" marL="0">
-              <a:buNone/>
-            </a:pPr>
-            <a:r>
-              <a:rPr lang="en-US" sz="1650" dirty="0">
+            <a:pPr marL="0" indent="0">
+              <a:buNone/>
+            </a:pPr>
+            <a:r>
+              <a:rPr lang="en-US" sz="1800" dirty="0">
                 <a:solidFill>
                   <a:srgbClr val="212121"/>
                 </a:solidFill>
@@ -5361,7 +5116,7 @@
               </a:rPr>
               <a:t>La propiedad real es spring.mongodb.uri, no spring.data.mongodb.uri. Es fácil confundirse con tutoriales antiguos: en la versión de Spring Boot de este curso, mongodb cuelga directamente de spring, no de spring.data. Comprueba siempre tu application-dev.yml antes de dar por buena una propiedad.</a:t>
             </a:r>
-            <a:endParaRPr lang="en-US" sz="1650" dirty="0"/>
+            <a:endParaRPr lang="en-US" sz="1800" dirty="0"/>
           </a:p>
         </p:txBody>
       </p:sp>
@@ -5414,6 +5169,13 @@
             <a:prstDash val="solid"/>
           </a:ln>
         </p:spPr>
+        <p:txBody>
+          <a:bodyPr/>
+          <a:lstStyle/>
+          <a:p>
+            <a:endParaRPr lang="es-ES"/>
+          </a:p>
+        </p:txBody>
       </p:sp>
       <p:sp>
         <p:nvSpPr>
@@ -5436,7 +5198,7 @@
           <a:bodyPr wrap="square" rtlCol="0" anchor="ctr"/>
           <a:lstStyle/>
           <a:p>
-            <a:pPr indent="0" marL="0">
+            <a:pPr marL="0" indent="0">
               <a:buNone/>
             </a:pPr>
             <a:r>
@@ -5475,7 +5237,7 @@
           <a:bodyPr wrap="square" rtlCol="0" anchor="ctr"/>
           <a:lstStyle/>
           <a:p>
-            <a:pPr algn="r" indent="0" marL="0">
+            <a:pPr marL="0" indent="0" algn="r">
               <a:buNone/>
             </a:pPr>
             <a:r>
@@ -5501,8 +5263,8 @@
         </p:nvSpPr>
         <p:spPr>
           <a:xfrm>
-            <a:off x="548640" y="1234440"/>
-            <a:ext cx="11091672" cy="2743200"/>
+            <a:off x="548640" y="1417320"/>
+            <a:ext cx="11091672" cy="3108960"/>
           </a:xfrm>
           <a:prstGeom prst="rect">
             <a:avLst/>
@@ -5517,6 +5279,13 @@
             <a:prstDash val="solid"/>
           </a:ln>
         </p:spPr>
+        <p:txBody>
+          <a:bodyPr/>
+          <a:lstStyle/>
+          <a:p>
+            <a:endParaRPr lang="es-ES"/>
+          </a:p>
+        </p:txBody>
       </p:sp>
       <p:sp>
         <p:nvSpPr>
@@ -5526,8 +5295,8 @@
         </p:nvSpPr>
         <p:spPr>
           <a:xfrm>
-            <a:off x="548640" y="1234440"/>
-            <a:ext cx="73152" cy="2743200"/>
+            <a:off x="548640" y="1417320"/>
+            <a:ext cx="73152" cy="3108960"/>
           </a:xfrm>
           <a:prstGeom prst="rect">
             <a:avLst/>
@@ -5542,6 +5311,13 @@
             <a:prstDash val="solid"/>
           </a:ln>
         </p:spPr>
+        <p:txBody>
+          <a:bodyPr/>
+          <a:lstStyle/>
+          <a:p>
+            <a:endParaRPr lang="es-ES"/>
+          </a:p>
+        </p:txBody>
       </p:sp>
       <p:sp>
         <p:nvSpPr>
@@ -5551,8 +5327,8 @@
         </p:nvSpPr>
         <p:spPr>
           <a:xfrm>
-            <a:off x="822960" y="1344168"/>
-            <a:ext cx="10588752" cy="2523744"/>
+            <a:off x="822960" y="1527048"/>
+            <a:ext cx="10588752" cy="2889504"/>
           </a:xfrm>
           <a:prstGeom prst="rect">
             <a:avLst/>
@@ -5564,11 +5340,11 @@
           <a:bodyPr wrap="square" rtlCol="0" anchor="t"/>
           <a:lstStyle/>
           <a:p>
-            <a:pPr indent="0" marL="0">
-              <a:buNone/>
-            </a:pPr>
-            <a:r>
-              <a:rPr lang="en-US" sz="1450" dirty="0">
+            <a:pPr marL="0" indent="0">
+              <a:buNone/>
+            </a:pPr>
+            <a:r>
+              <a:rPr lang="en-US" sz="1650" dirty="0">
                 <a:solidFill>
                   <a:srgbClr val="263238"/>
                 </a:solidFill>
@@ -5578,14 +5354,14 @@
               </a:rPr>
               <a:t>@Document(collection = "nota_lectura")</a:t>
             </a:r>
-            <a:endParaRPr lang="en-US" sz="1450" dirty="0"/>
-          </a:p>
-          <a:p>
-            <a:pPr indent="0" marL="0">
-              <a:buNone/>
-            </a:pPr>
-            <a:r>
-              <a:rPr lang="en-US" sz="1450" dirty="0">
+            <a:endParaRPr lang="en-US" sz="1650" dirty="0"/>
+          </a:p>
+          <a:p>
+            <a:pPr marL="0" indent="0">
+              <a:buNone/>
+            </a:pPr>
+            <a:r>
+              <a:rPr lang="en-US" sz="1650" dirty="0">
                 <a:solidFill>
                   <a:srgbClr val="263238"/>
                 </a:solidFill>
@@ -5595,20 +5371,20 @@
               </a:rPr>
               <a:t>public class NotaLectura {</a:t>
             </a:r>
-            <a:endParaRPr lang="en-US" sz="1450" dirty="0"/>
-          </a:p>
-          <a:p>
-            <a:pPr indent="0" marL="0">
-              <a:buNone/>
-            </a:pPr>
-            <a:endParaRPr lang="en-US" sz="1450" dirty="0"/>
-          </a:p>
-          <a:p>
-            <a:pPr indent="0" marL="0">
-              <a:buNone/>
-            </a:pPr>
-            <a:r>
-              <a:rPr lang="en-US" sz="1450" dirty="0">
+            <a:endParaRPr lang="en-US" sz="1650" dirty="0"/>
+          </a:p>
+          <a:p>
+            <a:pPr marL="0" indent="0">
+              <a:buNone/>
+            </a:pPr>
+            <a:endParaRPr lang="en-US" sz="1650" dirty="0"/>
+          </a:p>
+          <a:p>
+            <a:pPr marL="0" indent="0">
+              <a:buNone/>
+            </a:pPr>
+            <a:r>
+              <a:rPr lang="en-US" sz="1650" dirty="0">
                 <a:solidFill>
                   <a:srgbClr val="263238"/>
                 </a:solidFill>
@@ -5618,14 +5394,14 @@
               </a:rPr>
               <a:t>    @Id</a:t>
             </a:r>
-            <a:endParaRPr lang="en-US" sz="1450" dirty="0"/>
-          </a:p>
-          <a:p>
-            <a:pPr indent="0" marL="0">
-              <a:buNone/>
-            </a:pPr>
-            <a:r>
-              <a:rPr lang="en-US" sz="1450" dirty="0">
+            <a:endParaRPr lang="en-US" sz="1650" dirty="0"/>
+          </a:p>
+          <a:p>
+            <a:pPr marL="0" indent="0">
+              <a:buNone/>
+            </a:pPr>
+            <a:r>
+              <a:rPr lang="en-US" sz="1650" dirty="0">
                 <a:solidFill>
                   <a:srgbClr val="263238"/>
                 </a:solidFill>
@@ -5635,20 +5411,20 @@
               </a:rPr>
               <a:t>    private String id; // Spring Data mapea aquí el ObjectId de MongoDB</a:t>
             </a:r>
-            <a:endParaRPr lang="en-US" sz="1450" dirty="0"/>
-          </a:p>
-          <a:p>
-            <a:pPr indent="0" marL="0">
-              <a:buNone/>
-            </a:pPr>
-            <a:endParaRPr lang="en-US" sz="1450" dirty="0"/>
-          </a:p>
-          <a:p>
-            <a:pPr indent="0" marL="0">
-              <a:buNone/>
-            </a:pPr>
-            <a:r>
-              <a:rPr lang="en-US" sz="1450" dirty="0">
+            <a:endParaRPr lang="en-US" sz="1650" dirty="0"/>
+          </a:p>
+          <a:p>
+            <a:pPr marL="0" indent="0">
+              <a:buNone/>
+            </a:pPr>
+            <a:endParaRPr lang="en-US" sz="1650" dirty="0"/>
+          </a:p>
+          <a:p>
+            <a:pPr marL="0" indent="0">
+              <a:buNone/>
+            </a:pPr>
+            <a:r>
+              <a:rPr lang="en-US" sz="1650" dirty="0">
                 <a:solidFill>
                   <a:srgbClr val="263238"/>
                 </a:solidFill>
@@ -5658,14 +5434,14 @@
               </a:rPr>
               <a:t>    private Long libroId; // relación "lógica" con el catálogo en PostgreSQL</a:t>
             </a:r>
-            <a:endParaRPr lang="en-US" sz="1450" dirty="0"/>
-          </a:p>
-          <a:p>
-            <a:pPr indent="0" marL="0">
-              <a:buNone/>
-            </a:pPr>
-            <a:r>
-              <a:rPr lang="en-US" sz="1450" dirty="0">
+            <a:endParaRPr lang="en-US" sz="1650" dirty="0"/>
+          </a:p>
+          <a:p>
+            <a:pPr marL="0" indent="0">
+              <a:buNone/>
+            </a:pPr>
+            <a:r>
+              <a:rPr lang="en-US" sz="1650" dirty="0">
                 <a:solidFill>
                   <a:srgbClr val="263238"/>
                 </a:solidFill>
@@ -5675,14 +5451,14 @@
               </a:rPr>
               <a:t>    private String autor;</a:t>
             </a:r>
-            <a:endParaRPr lang="en-US" sz="1450" dirty="0"/>
-          </a:p>
-          <a:p>
-            <a:pPr indent="0" marL="0">
-              <a:buNone/>
-            </a:pPr>
-            <a:r>
-              <a:rPr lang="en-US" sz="1450" dirty="0">
+            <a:endParaRPr lang="en-US" sz="1650" dirty="0"/>
+          </a:p>
+          <a:p>
+            <a:pPr marL="0" indent="0">
+              <a:buNone/>
+            </a:pPr>
+            <a:r>
+              <a:rPr lang="en-US" sz="1650" dirty="0">
                 <a:solidFill>
                   <a:srgbClr val="263238"/>
                 </a:solidFill>
@@ -5692,14 +5468,14 @@
               </a:rPr>
               <a:t>    private Integer puntuacion;</a:t>
             </a:r>
-            <a:endParaRPr lang="en-US" sz="1450" dirty="0"/>
-          </a:p>
-          <a:p>
-            <a:pPr indent="0" marL="0">
-              <a:buNone/>
-            </a:pPr>
-            <a:r>
-              <a:rPr lang="en-US" sz="1450" dirty="0">
+            <a:endParaRPr lang="en-US" sz="1650" dirty="0"/>
+          </a:p>
+          <a:p>
+            <a:pPr marL="0" indent="0">
+              <a:buNone/>
+            </a:pPr>
+            <a:r>
+              <a:rPr lang="en-US" sz="1650" dirty="0">
                 <a:solidFill>
                   <a:srgbClr val="263238"/>
                 </a:solidFill>
@@ -5709,14 +5485,14 @@
               </a:rPr>
               <a:t>    private String comentario;</a:t>
             </a:r>
-            <a:endParaRPr lang="en-US" sz="1450" dirty="0"/>
-          </a:p>
-          <a:p>
-            <a:pPr indent="0" marL="0">
-              <a:buNone/>
-            </a:pPr>
-            <a:r>
-              <a:rPr lang="en-US" sz="1450" dirty="0">
+            <a:endParaRPr lang="en-US" sz="1650" dirty="0"/>
+          </a:p>
+          <a:p>
+            <a:pPr marL="0" indent="0">
+              <a:buNone/>
+            </a:pPr>
+            <a:r>
+              <a:rPr lang="en-US" sz="1650" dirty="0">
                 <a:solidFill>
                   <a:srgbClr val="263238"/>
                 </a:solidFill>
@@ -5726,7 +5502,7 @@
               </a:rPr>
               <a:t>}</a:t>
             </a:r>
-            <a:endParaRPr lang="en-US" sz="1450" dirty="0"/>
+            <a:endParaRPr lang="en-US" sz="1650" dirty="0"/>
           </a:p>
         </p:txBody>
       </p:sp>
@@ -5738,8 +5514,8 @@
         </p:nvSpPr>
         <p:spPr>
           <a:xfrm>
-            <a:off x="548640" y="4251960"/>
-            <a:ext cx="11091672" cy="822960"/>
+            <a:off x="548640" y="4846320"/>
+            <a:ext cx="11091672" cy="914400"/>
           </a:xfrm>
           <a:prstGeom prst="rect">
             <a:avLst/>
@@ -5751,11 +5527,11 @@
           <a:bodyPr wrap="square" rtlCol="0" anchor="t"/>
           <a:lstStyle/>
           <a:p>
-            <a:pPr indent="0" marL="0">
-              <a:buNone/>
-            </a:pPr>
-            <a:r>
-              <a:rPr lang="en-US" sz="1450" dirty="0">
+            <a:pPr marL="0" indent="0">
+              <a:buNone/>
+            </a:pPr>
+            <a:r>
+              <a:rPr lang="en-US" sz="1650" dirty="0">
                 <a:solidFill>
                   <a:srgbClr val="757575"/>
                 </a:solidFill>
@@ -5765,7 +5541,7 @@
               </a:rPr>
               <a:t>@Document(collection = "nota_lectura") es el equivalente Mongo de @Entity/@Table. El @Id se declara String porque Spring Data puede mapear a él el ObjectId que MongoDB genera cuando no proporcionas un _id.</a:t>
             </a:r>
-            <a:endParaRPr lang="en-US" sz="1450" dirty="0"/>
+            <a:endParaRPr lang="en-US" sz="1650" dirty="0"/>
           </a:p>
         </p:txBody>
       </p:sp>
@@ -5818,6 +5594,13 @@
             <a:prstDash val="solid"/>
           </a:ln>
         </p:spPr>
+        <p:txBody>
+          <a:bodyPr/>
+          <a:lstStyle/>
+          <a:p>
+            <a:endParaRPr lang="es-ES"/>
+          </a:p>
+        </p:txBody>
       </p:sp>
       <p:sp>
         <p:nvSpPr>
@@ -5840,7 +5623,7 @@
           <a:bodyPr wrap="square" rtlCol="0" anchor="ctr"/>
           <a:lstStyle/>
           <a:p>
-            <a:pPr indent="0" marL="0">
+            <a:pPr marL="0" indent="0">
               <a:buNone/>
             </a:pPr>
             <a:r>
@@ -5879,7 +5662,7 @@
           <a:bodyPr wrap="square" rtlCol="0" anchor="ctr"/>
           <a:lstStyle/>
           <a:p>
-            <a:pPr algn="r" indent="0" marL="0">
+            <a:pPr marL="0" indent="0" algn="r">
               <a:buNone/>
             </a:pPr>
             <a:r>
@@ -5905,8 +5688,8 @@
         </p:nvSpPr>
         <p:spPr>
           <a:xfrm>
-            <a:off x="548640" y="2286000"/>
-            <a:ext cx="11091672" cy="1828800"/>
+            <a:off x="548640" y="2651760"/>
+            <a:ext cx="11091672" cy="2194560"/>
           </a:xfrm>
           <a:prstGeom prst="roundRect">
             <a:avLst/>
@@ -5921,6 +5704,13 @@
             <a:prstDash val="solid"/>
           </a:ln>
         </p:spPr>
+        <p:txBody>
+          <a:bodyPr/>
+          <a:lstStyle/>
+          <a:p>
+            <a:endParaRPr lang="es-ES"/>
+          </a:p>
+        </p:txBody>
       </p:sp>
       <p:sp>
         <p:nvSpPr>
@@ -5930,8 +5720,8 @@
         </p:nvSpPr>
         <p:spPr>
           <a:xfrm>
-            <a:off x="822960" y="2377440"/>
-            <a:ext cx="10543032" cy="1645920"/>
+            <a:off x="822960" y="2743200"/>
+            <a:ext cx="10543032" cy="2011680"/>
           </a:xfrm>
           <a:prstGeom prst="rect">
             <a:avLst/>
@@ -5943,11 +5733,11 @@
           <a:bodyPr wrap="square" rtlCol="0" anchor="ctr"/>
           <a:lstStyle/>
           <a:p>
-            <a:pPr indent="0" marL="0">
-              <a:buNone/>
-            </a:pPr>
-            <a:r>
-              <a:rPr lang="en-US" sz="2000" dirty="0">
+            <a:pPr marL="0" indent="0">
+              <a:buNone/>
+            </a:pPr>
+            <a:r>
+              <a:rPr lang="en-US" sz="2300" dirty="0">
                 <a:solidFill>
                   <a:srgbClr val="212121"/>
                 </a:solidFill>
@@ -5957,7 +5747,7 @@
               </a:rPr>
               <a:t>Aunque el campo se llame libroId y apunte conceptualmente a un Libro de PostgreSQL, no hay ninguna integridad referencial automática entre dos motores de base de datos distintos. MongoDB no sabe nada de PostgreSQL, ni al revés — es responsabilidad de tu código mantener esa relación con sentido.</a:t>
             </a:r>
-            <a:endParaRPr lang="en-US" sz="2000" dirty="0"/>
+            <a:endParaRPr lang="en-US" sz="2300" dirty="0"/>
           </a:p>
         </p:txBody>
       </p:sp>
@@ -6010,6 +5800,13 @@
             <a:prstDash val="solid"/>
           </a:ln>
         </p:spPr>
+        <p:txBody>
+          <a:bodyPr/>
+          <a:lstStyle/>
+          <a:p>
+            <a:endParaRPr lang="es-ES"/>
+          </a:p>
+        </p:txBody>
       </p:sp>
       <p:sp>
         <p:nvSpPr>
@@ -6032,7 +5829,7 @@
           <a:bodyPr wrap="square" rtlCol="0" anchor="ctr"/>
           <a:lstStyle/>
           <a:p>
-            <a:pPr indent="0" marL="0">
+            <a:pPr marL="0" indent="0">
               <a:buNone/>
             </a:pPr>
             <a:r>
@@ -6071,7 +5868,7 @@
           <a:bodyPr wrap="square" rtlCol="0" anchor="ctr"/>
           <a:lstStyle/>
           <a:p>
-            <a:pPr algn="r" indent="0" marL="0">
+            <a:pPr marL="0" indent="0" algn="r">
               <a:buNone/>
             </a:pPr>
             <a:r>
@@ -6097,8 +5894,8 @@
         </p:nvSpPr>
         <p:spPr>
           <a:xfrm>
-            <a:off x="548640" y="1371600"/>
-            <a:ext cx="11091672" cy="1463040"/>
+            <a:off x="548640" y="2148840"/>
+            <a:ext cx="11091672" cy="1828800"/>
           </a:xfrm>
           <a:prstGeom prst="rect">
             <a:avLst/>
@@ -6113,6 +5910,13 @@
             <a:prstDash val="solid"/>
           </a:ln>
         </p:spPr>
+        <p:txBody>
+          <a:bodyPr/>
+          <a:lstStyle/>
+          <a:p>
+            <a:endParaRPr lang="es-ES"/>
+          </a:p>
+        </p:txBody>
       </p:sp>
       <p:sp>
         <p:nvSpPr>
@@ -6122,8 +5926,8 @@
         </p:nvSpPr>
         <p:spPr>
           <a:xfrm>
-            <a:off x="548640" y="1371600"/>
-            <a:ext cx="73152" cy="1463040"/>
+            <a:off x="548640" y="2148840"/>
+            <a:ext cx="73152" cy="1828800"/>
           </a:xfrm>
           <a:prstGeom prst="rect">
             <a:avLst/>
@@ -6138,6 +5942,13 @@
             <a:prstDash val="solid"/>
           </a:ln>
         </p:spPr>
+        <p:txBody>
+          <a:bodyPr/>
+          <a:lstStyle/>
+          <a:p>
+            <a:endParaRPr lang="es-ES"/>
+          </a:p>
+        </p:txBody>
       </p:sp>
       <p:sp>
         <p:nvSpPr>
@@ -6147,8 +5958,8 @@
         </p:nvSpPr>
         <p:spPr>
           <a:xfrm>
-            <a:off x="822960" y="1481328"/>
-            <a:ext cx="10588752" cy="1243584"/>
+            <a:off x="822960" y="2258568"/>
+            <a:ext cx="10588752" cy="1609344"/>
           </a:xfrm>
           <a:prstGeom prst="rect">
             <a:avLst/>
@@ -6160,11 +5971,11 @@
           <a:bodyPr wrap="square" rtlCol="0" anchor="t"/>
           <a:lstStyle/>
           <a:p>
-            <a:pPr indent="0" marL="0">
-              <a:buNone/>
-            </a:pPr>
-            <a:r>
-              <a:rPr lang="en-US" sz="1650" dirty="0">
+            <a:pPr marL="0" indent="0">
+              <a:buNone/>
+            </a:pPr>
+            <a:r>
+              <a:rPr lang="en-US" sz="1900" dirty="0">
                 <a:solidFill>
                   <a:srgbClr val="263238"/>
                 </a:solidFill>
@@ -6174,14 +5985,14 @@
               </a:rPr>
               <a:t>public interface NotaLecturaRepository</a:t>
             </a:r>
-            <a:endParaRPr lang="en-US" sz="1650" dirty="0"/>
-          </a:p>
-          <a:p>
-            <a:pPr indent="0" marL="0">
-              <a:buNone/>
-            </a:pPr>
-            <a:r>
-              <a:rPr lang="en-US" sz="1650" dirty="0">
+            <a:endParaRPr lang="en-US" sz="1900" dirty="0"/>
+          </a:p>
+          <a:p>
+            <a:pPr marL="0" indent="0">
+              <a:buNone/>
+            </a:pPr>
+            <a:r>
+              <a:rPr lang="en-US" sz="1900" dirty="0">
                 <a:solidFill>
                   <a:srgbClr val="263238"/>
                 </a:solidFill>
@@ -6191,14 +6002,14 @@
               </a:rPr>
               <a:t>        extends MongoRepository&lt;NotaLectura, String&gt; {</a:t>
             </a:r>
-            <a:endParaRPr lang="en-US" sz="1650" dirty="0"/>
-          </a:p>
-          <a:p>
-            <a:pPr indent="0" marL="0">
-              <a:buNone/>
-            </a:pPr>
-            <a:r>
-              <a:rPr lang="en-US" sz="1650" dirty="0">
+            <a:endParaRPr lang="en-US" sz="1900" dirty="0"/>
+          </a:p>
+          <a:p>
+            <a:pPr marL="0" indent="0">
+              <a:buNone/>
+            </a:pPr>
+            <a:r>
+              <a:rPr lang="en-US" sz="1900" dirty="0">
                 <a:solidFill>
                   <a:srgbClr val="263238"/>
                 </a:solidFill>
@@ -6208,14 +6019,14 @@
               </a:rPr>
               <a:t>    List&lt;NotaLectura&gt; findByLibroId(Long libroId);</a:t>
             </a:r>
-            <a:endParaRPr lang="en-US" sz="1650" dirty="0"/>
-          </a:p>
-          <a:p>
-            <a:pPr indent="0" marL="0">
-              <a:buNone/>
-            </a:pPr>
-            <a:r>
-              <a:rPr lang="en-US" sz="1650" dirty="0">
+            <a:endParaRPr lang="en-US" sz="1900" dirty="0"/>
+          </a:p>
+          <a:p>
+            <a:pPr marL="0" indent="0">
+              <a:buNone/>
+            </a:pPr>
+            <a:r>
+              <a:rPr lang="en-US" sz="1900" dirty="0">
                 <a:solidFill>
                   <a:srgbClr val="263238"/>
                 </a:solidFill>
@@ -6225,7 +6036,7 @@
               </a:rPr>
               <a:t>}</a:t>
             </a:r>
-            <a:endParaRPr lang="en-US" sz="1650" dirty="0"/>
+            <a:endParaRPr lang="en-US" sz="1900" dirty="0"/>
           </a:p>
         </p:txBody>
       </p:sp>
@@ -6237,7 +6048,7 @@
         </p:nvSpPr>
         <p:spPr>
           <a:xfrm>
-            <a:off x="548640" y="3154680"/>
+            <a:off x="548640" y="4343400"/>
             <a:ext cx="11091672" cy="822960"/>
           </a:xfrm>
           <a:prstGeom prst="rect">
@@ -6250,11 +6061,11 @@
           <a:bodyPr wrap="square" rtlCol="0" anchor="t"/>
           <a:lstStyle/>
           <a:p>
-            <a:pPr indent="0" marL="0">
-              <a:buNone/>
-            </a:pPr>
-            <a:r>
-              <a:rPr lang="en-US" sz="1750" dirty="0">
+            <a:pPr marL="0" indent="0">
+              <a:buNone/>
+            </a:pPr>
+            <a:r>
+              <a:rPr lang="en-US" sz="1900" dirty="0">
                 <a:solidFill>
                   <a:srgbClr val="757575"/>
                 </a:solidFill>
@@ -6264,7 +6075,7 @@
               </a:rPr>
               <a:t>Spring Data también genera consultas automáticas por el nombre del método en MongoDB, exactamente igual que hacía JpaRepository en el Tema 1 — sin que escribas una sola query explícita.</a:t>
             </a:r>
-            <a:endParaRPr lang="en-US" sz="1750" dirty="0"/>
+            <a:endParaRPr lang="en-US" sz="1900" dirty="0"/>
           </a:p>
         </p:txBody>
       </p:sp>
@@ -6317,6 +6128,13 @@
             <a:prstDash val="solid"/>
           </a:ln>
         </p:spPr>
+        <p:txBody>
+          <a:bodyPr/>
+          <a:lstStyle/>
+          <a:p>
+            <a:endParaRPr lang="es-ES"/>
+          </a:p>
+        </p:txBody>
       </p:sp>
       <p:sp>
         <p:nvSpPr>
@@ -6339,7 +6157,7 @@
           <a:bodyPr wrap="square" rtlCol="0" anchor="ctr"/>
           <a:lstStyle/>
           <a:p>
-            <a:pPr indent="0" marL="0">
+            <a:pPr marL="0" indent="0">
               <a:buNone/>
             </a:pPr>
             <a:r>
@@ -6378,7 +6196,7 @@
           <a:bodyPr wrap="square" rtlCol="0" anchor="ctr"/>
           <a:lstStyle/>
           <a:p>
-            <a:pPr algn="r" indent="0" marL="0">
+            <a:pPr marL="0" indent="0" algn="r">
               <a:buNone/>
             </a:pPr>
             <a:r>
@@ -6404,8 +6222,8 @@
         </p:nvSpPr>
         <p:spPr>
           <a:xfrm>
-            <a:off x="548640" y="1234440"/>
-            <a:ext cx="11091672" cy="2651760"/>
+            <a:off x="548640" y="1554480"/>
+            <a:ext cx="11091672" cy="2926080"/>
           </a:xfrm>
           <a:prstGeom prst="rect">
             <a:avLst/>
@@ -6420,6 +6238,13 @@
             <a:prstDash val="solid"/>
           </a:ln>
         </p:spPr>
+        <p:txBody>
+          <a:bodyPr/>
+          <a:lstStyle/>
+          <a:p>
+            <a:endParaRPr lang="es-ES"/>
+          </a:p>
+        </p:txBody>
       </p:sp>
       <p:sp>
         <p:nvSpPr>
@@ -6429,8 +6254,8 @@
         </p:nvSpPr>
         <p:spPr>
           <a:xfrm>
-            <a:off x="548640" y="1234440"/>
-            <a:ext cx="73152" cy="2651760"/>
+            <a:off x="548640" y="1554480"/>
+            <a:ext cx="73152" cy="2926080"/>
           </a:xfrm>
           <a:prstGeom prst="rect">
             <a:avLst/>
@@ -6445,6 +6270,13 @@
             <a:prstDash val="solid"/>
           </a:ln>
         </p:spPr>
+        <p:txBody>
+          <a:bodyPr/>
+          <a:lstStyle/>
+          <a:p>
+            <a:endParaRPr lang="es-ES"/>
+          </a:p>
+        </p:txBody>
       </p:sp>
       <p:sp>
         <p:nvSpPr>
@@ -6454,8 +6286,8 @@
         </p:nvSpPr>
         <p:spPr>
           <a:xfrm>
-            <a:off x="822960" y="1344168"/>
-            <a:ext cx="10588752" cy="2432304"/>
+            <a:off x="822960" y="1664208"/>
+            <a:ext cx="10588752" cy="2706624"/>
           </a:xfrm>
           <a:prstGeom prst="rect">
             <a:avLst/>
@@ -6467,11 +6299,11 @@
           <a:bodyPr wrap="square" rtlCol="0" anchor="t"/>
           <a:lstStyle/>
           <a:p>
-            <a:pPr indent="0" marL="0">
-              <a:buNone/>
-            </a:pPr>
-            <a:r>
-              <a:rPr lang="en-US" sz="1450" dirty="0">
+            <a:pPr marL="0" indent="0">
+              <a:buNone/>
+            </a:pPr>
+            <a:r>
+              <a:rPr lang="en-US" sz="1600" dirty="0">
                 <a:solidFill>
                   <a:srgbClr val="263238"/>
                 </a:solidFill>
@@ -6481,14 +6313,14 @@
               </a:rPr>
               <a:t>public List&lt;NotaLecturaResponseDTO&gt; findByLibroId(Long libroId) {</a:t>
             </a:r>
-            <a:endParaRPr lang="en-US" sz="1450" dirty="0"/>
-          </a:p>
-          <a:p>
-            <a:pPr indent="0" marL="0">
-              <a:buNone/>
-            </a:pPr>
-            <a:r>
-              <a:rPr lang="en-US" sz="1450" dirty="0">
+            <a:endParaRPr lang="en-US" sz="1600" dirty="0"/>
+          </a:p>
+          <a:p>
+            <a:pPr marL="0" indent="0">
+              <a:buNone/>
+            </a:pPr>
+            <a:r>
+              <a:rPr lang="en-US" sz="1600" dirty="0">
                 <a:solidFill>
                   <a:srgbClr val="263238"/>
                 </a:solidFill>
@@ -6498,14 +6330,14 @@
               </a:rPr>
               <a:t>    // 1. Verificamos que el libro exista en PostgreSQL</a:t>
             </a:r>
-            <a:endParaRPr lang="en-US" sz="1450" dirty="0"/>
-          </a:p>
-          <a:p>
-            <a:pPr indent="0" marL="0">
-              <a:buNone/>
-            </a:pPr>
-            <a:r>
-              <a:rPr lang="en-US" sz="1450" dirty="0">
+            <a:endParaRPr lang="en-US" sz="1600" dirty="0"/>
+          </a:p>
+          <a:p>
+            <a:pPr marL="0" indent="0">
+              <a:buNone/>
+            </a:pPr>
+            <a:r>
+              <a:rPr lang="en-US" sz="1600" dirty="0">
                 <a:solidFill>
                   <a:srgbClr val="263238"/>
                 </a:solidFill>
@@ -6515,14 +6347,14 @@
               </a:rPr>
               <a:t>    if (!libroRepository.existsById(libroId)) {</a:t>
             </a:r>
-            <a:endParaRPr lang="en-US" sz="1450" dirty="0"/>
-          </a:p>
-          <a:p>
-            <a:pPr indent="0" marL="0">
-              <a:buNone/>
-            </a:pPr>
-            <a:r>
-              <a:rPr lang="en-US" sz="1450" dirty="0">
+            <a:endParaRPr lang="en-US" sz="1600" dirty="0"/>
+          </a:p>
+          <a:p>
+            <a:pPr marL="0" indent="0">
+              <a:buNone/>
+            </a:pPr>
+            <a:r>
+              <a:rPr lang="en-US" sz="1600" dirty="0">
                 <a:solidFill>
                   <a:srgbClr val="263238"/>
                 </a:solidFill>
@@ -6530,16 +6362,16 @@
                 <a:ea typeface="Courier New" pitchFamily="34" charset="-122"/>
                 <a:cs typeface="Courier New" pitchFamily="34" charset="-120"/>
               </a:rPr>
-              <a:t>        throw new ResponseStatusException(HttpStatus.NOT_FOUND, "Libro no encontrado");</a:t>
-            </a:r>
-            <a:endParaRPr lang="en-US" sz="1450" dirty="0"/>
-          </a:p>
-          <a:p>
-            <a:pPr indent="0" marL="0">
-              <a:buNone/>
-            </a:pPr>
-            <a:r>
-              <a:rPr lang="en-US" sz="1450" dirty="0">
+              <a:t>        throw new ResponseStatusException(</a:t>
+            </a:r>
+            <a:endParaRPr lang="en-US" sz="1600" dirty="0"/>
+          </a:p>
+          <a:p>
+            <a:pPr marL="0" indent="0">
+              <a:buNone/>
+            </a:pPr>
+            <a:r>
+              <a:rPr lang="en-US" sz="1600" dirty="0">
                 <a:solidFill>
                   <a:srgbClr val="263238"/>
                 </a:solidFill>
@@ -6547,16 +6379,16 @@
                 <a:ea typeface="Courier New" pitchFamily="34" charset="-122"/>
                 <a:cs typeface="Courier New" pitchFamily="34" charset="-120"/>
               </a:rPr>
-              <a:t>    }</a:t>
-            </a:r>
-            <a:endParaRPr lang="en-US" sz="1450" dirty="0"/>
-          </a:p>
-          <a:p>
-            <a:pPr indent="0" marL="0">
-              <a:buNone/>
-            </a:pPr>
-            <a:r>
-              <a:rPr lang="en-US" sz="1450" dirty="0">
+              <a:t>                HttpStatus.NOT_FOUND, "Libro no encontrado");</a:t>
+            </a:r>
+            <a:endParaRPr lang="en-US" sz="1600" dirty="0"/>
+          </a:p>
+          <a:p>
+            <a:pPr marL="0" indent="0">
+              <a:buNone/>
+            </a:pPr>
+            <a:r>
+              <a:rPr lang="en-US" sz="1600" dirty="0">
                 <a:solidFill>
                   <a:srgbClr val="263238"/>
                 </a:solidFill>
@@ -6564,16 +6396,16 @@
                 <a:ea typeface="Courier New" pitchFamily="34" charset="-122"/>
                 <a:cs typeface="Courier New" pitchFamily="34" charset="-120"/>
               </a:rPr>
-              <a:t>    // 2. Buscamos en MongoDB y mapeamos</a:t>
-            </a:r>
-            <a:endParaRPr lang="en-US" sz="1450" dirty="0"/>
-          </a:p>
-          <a:p>
-            <a:pPr indent="0" marL="0">
-              <a:buNone/>
-            </a:pPr>
-            <a:r>
-              <a:rPr lang="en-US" sz="1450" dirty="0">
+              <a:t>    }</a:t>
+            </a:r>
+            <a:endParaRPr lang="en-US" sz="1600" dirty="0"/>
+          </a:p>
+          <a:p>
+            <a:pPr marL="0" indent="0">
+              <a:buNone/>
+            </a:pPr>
+            <a:r>
+              <a:rPr lang="en-US" sz="1600" dirty="0">
                 <a:solidFill>
                   <a:srgbClr val="263238"/>
                 </a:solidFill>
@@ -6581,16 +6413,16 @@
                 <a:ea typeface="Courier New" pitchFamily="34" charset="-122"/>
                 <a:cs typeface="Courier New" pitchFamily="34" charset="-120"/>
               </a:rPr>
-              <a:t>    return notaLecturaRepository.findByLibroId(libroId).stream()</a:t>
-            </a:r>
-            <a:endParaRPr lang="en-US" sz="1450" dirty="0"/>
-          </a:p>
-          <a:p>
-            <a:pPr indent="0" marL="0">
-              <a:buNone/>
-            </a:pPr>
-            <a:r>
-              <a:rPr lang="en-US" sz="1450" dirty="0">
+              <a:t>    // 2. Buscamos en MongoDB y mapeamos</a:t>
+            </a:r>
+            <a:endParaRPr lang="en-US" sz="1600" dirty="0"/>
+          </a:p>
+          <a:p>
+            <a:pPr marL="0" indent="0">
+              <a:buNone/>
+            </a:pPr>
+            <a:r>
+              <a:rPr lang="en-US" sz="1600" dirty="0">
                 <a:solidFill>
                   <a:srgbClr val="263238"/>
                 </a:solidFill>
@@ -6598,16 +6430,16 @@
                 <a:ea typeface="Courier New" pitchFamily="34" charset="-122"/>
                 <a:cs typeface="Courier New" pitchFamily="34" charset="-120"/>
               </a:rPr>
-              <a:t>            .map(this::mapToDTO).toList();</a:t>
-            </a:r>
-            <a:endParaRPr lang="en-US" sz="1450" dirty="0"/>
-          </a:p>
-          <a:p>
-            <a:pPr indent="0" marL="0">
-              <a:buNone/>
-            </a:pPr>
-            <a:r>
-              <a:rPr lang="en-US" sz="1450" dirty="0">
+              <a:t>    return notaLecturaRepository.findByLibroId(libroId).stream()</a:t>
+            </a:r>
+            <a:endParaRPr lang="en-US" sz="1600" dirty="0"/>
+          </a:p>
+          <a:p>
+            <a:pPr marL="0" indent="0">
+              <a:buNone/>
+            </a:pPr>
+            <a:r>
+              <a:rPr lang="en-US" sz="1600" dirty="0">
                 <a:solidFill>
                   <a:srgbClr val="263238"/>
                 </a:solidFill>
@@ -6615,9 +6447,26 @@
                 <a:ea typeface="Courier New" pitchFamily="34" charset="-122"/>
                 <a:cs typeface="Courier New" pitchFamily="34" charset="-120"/>
               </a:rPr>
+              <a:t>            .map(this::mapToDTO).toList();</a:t>
+            </a:r>
+            <a:endParaRPr lang="en-US" sz="1600" dirty="0"/>
+          </a:p>
+          <a:p>
+            <a:pPr marL="0" indent="0">
+              <a:buNone/>
+            </a:pPr>
+            <a:r>
+              <a:rPr lang="en-US" sz="1600" dirty="0">
+                <a:solidFill>
+                  <a:srgbClr val="263238"/>
+                </a:solidFill>
+                <a:latin typeface="Courier New" pitchFamily="34" charset="0"/>
+                <a:ea typeface="Courier New" pitchFamily="34" charset="-122"/>
+                <a:cs typeface="Courier New" pitchFamily="34" charset="-120"/>
+              </a:rPr>
               <a:t>}</a:t>
             </a:r>
-            <a:endParaRPr lang="en-US" sz="1450" dirty="0"/>
+            <a:endParaRPr lang="en-US" sz="1600" dirty="0"/>
           </a:p>
         </p:txBody>
       </p:sp>
@@ -6629,8 +6478,8 @@
         </p:nvSpPr>
         <p:spPr>
           <a:xfrm>
-            <a:off x="548640" y="4160520"/>
-            <a:ext cx="11091672" cy="777240"/>
+            <a:off x="548640" y="4800600"/>
+            <a:ext cx="11091672" cy="822960"/>
           </a:xfrm>
           <a:prstGeom prst="rect">
             <a:avLst/>
@@ -6642,11 +6491,11 @@
           <a:bodyPr wrap="square" rtlCol="0" anchor="t"/>
           <a:lstStyle/>
           <a:p>
-            <a:pPr indent="0" marL="0">
-              <a:buNone/>
-            </a:pPr>
-            <a:r>
-              <a:rPr lang="en-US" sz="1450" dirty="0">
+            <a:pPr marL="0" indent="0">
+              <a:buNone/>
+            </a:pPr>
+            <a:r>
+              <a:rPr lang="en-US" sz="1650" dirty="0">
                 <a:solidFill>
                   <a:srgbClr val="757575"/>
                 </a:solidFill>
@@ -6656,7 +6505,7 @@
               </a:rPr>
               <a:t>Como Mongo no puede validar una clave foránea hacia una tabla de PostgreSQL, el propio código de la aplicación tiene que hacerlo — comprobando primero contra PostgreSQL antes de tocar Mongo.</a:t>
             </a:r>
-            <a:endParaRPr lang="en-US" sz="1450" dirty="0"/>
+            <a:endParaRPr lang="en-US" sz="1650" dirty="0"/>
           </a:p>
         </p:txBody>
       </p:sp>
@@ -6709,6 +6558,13 @@
             <a:prstDash val="solid"/>
           </a:ln>
         </p:spPr>
+        <p:txBody>
+          <a:bodyPr/>
+          <a:lstStyle/>
+          <a:p>
+            <a:endParaRPr lang="es-ES"/>
+          </a:p>
+        </p:txBody>
       </p:sp>
       <p:sp>
         <p:nvSpPr>
@@ -6731,7 +6587,7 @@
           <a:bodyPr wrap="square" rtlCol="0" anchor="ctr"/>
           <a:lstStyle/>
           <a:p>
-            <a:pPr indent="0" marL="0">
+            <a:pPr marL="0" indent="0">
               <a:buNone/>
             </a:pPr>
             <a:r>
@@ -6770,7 +6626,7 @@
           <a:bodyPr wrap="square" rtlCol="0" anchor="ctr"/>
           <a:lstStyle/>
           <a:p>
-            <a:pPr algn="r" indent="0" marL="0">
+            <a:pPr marL="0" indent="0" algn="r">
               <a:buNone/>
             </a:pPr>
             <a:r>
@@ -6796,8 +6652,8 @@
         </p:nvSpPr>
         <p:spPr>
           <a:xfrm>
-            <a:off x="548640" y="1737360"/>
-            <a:ext cx="11091672" cy="1737360"/>
+            <a:off x="548640" y="2651760"/>
+            <a:ext cx="11091672" cy="2194560"/>
           </a:xfrm>
           <a:prstGeom prst="roundRect">
             <a:avLst/>
@@ -6812,6 +6668,13 @@
             <a:prstDash val="solid"/>
           </a:ln>
         </p:spPr>
+        <p:txBody>
+          <a:bodyPr/>
+          <a:lstStyle/>
+          <a:p>
+            <a:endParaRPr lang="es-ES"/>
+          </a:p>
+        </p:txBody>
       </p:sp>
       <p:sp>
         <p:nvSpPr>
@@ -6821,8 +6684,8 @@
         </p:nvSpPr>
         <p:spPr>
           <a:xfrm>
-            <a:off x="822960" y="1828800"/>
-            <a:ext cx="10543032" cy="1554480"/>
+            <a:off x="822960" y="2743200"/>
+            <a:ext cx="10543032" cy="2011680"/>
           </a:xfrm>
           <a:prstGeom prst="rect">
             <a:avLst/>
@@ -6834,11 +6697,11 @@
           <a:bodyPr wrap="square" rtlCol="0" anchor="ctr"/>
           <a:lstStyle/>
           <a:p>
-            <a:pPr indent="0" marL="0">
-              <a:buNone/>
-            </a:pPr>
-            <a:r>
-              <a:rPr lang="en-US" sz="2100" dirty="0">
+            <a:pPr marL="0" indent="0">
+              <a:buNone/>
+            </a:pPr>
+            <a:r>
+              <a:rPr lang="en-US" sz="2400" dirty="0">
                 <a:solidFill>
                   <a:srgbClr val="212121"/>
                 </a:solidFill>
@@ -6848,7 +6711,7 @@
               </a:rPr>
               <a:t>Hasta ahora, todo lo que has persistido ha vivido dentro de PostgreSQL — incluso el JSONB del Tema 2 seguía siendo una columna de una tabla relacional. Este tema da un salto real: una base de datos completamente distinta, sin tablas de ningún tipo.</a:t>
             </a:r>
-            <a:endParaRPr lang="en-US" sz="2100" dirty="0"/>
+            <a:endParaRPr lang="en-US" sz="2400" dirty="0"/>
           </a:p>
         </p:txBody>
       </p:sp>
@@ -6901,6 +6764,13 @@
             <a:prstDash val="solid"/>
           </a:ln>
         </p:spPr>
+        <p:txBody>
+          <a:bodyPr/>
+          <a:lstStyle/>
+          <a:p>
+            <a:endParaRPr lang="es-ES"/>
+          </a:p>
+        </p:txBody>
       </p:sp>
       <p:sp>
         <p:nvSpPr>
@@ -6923,7 +6793,7 @@
           <a:bodyPr wrap="square" rtlCol="0" anchor="ctr"/>
           <a:lstStyle/>
           <a:p>
-            <a:pPr indent="0" marL="0">
+            <a:pPr marL="0" indent="0">
               <a:buNone/>
             </a:pPr>
             <a:r>
@@ -6962,7 +6832,7 @@
           <a:bodyPr wrap="square" rtlCol="0" anchor="ctr"/>
           <a:lstStyle/>
           <a:p>
-            <a:pPr algn="r" indent="0" marL="0">
+            <a:pPr marL="0" indent="0" algn="r">
               <a:buNone/>
             </a:pPr>
             <a:r>
@@ -6980,41 +6850,40 @@
           </a:p>
         </p:txBody>
       </p:sp>
-      <p:sp>
-        <p:nvSpPr>
-          <p:cNvPr id="5" name="Shape 3"/>
-          <p:cNvSpPr/>
-          <p:nvPr/>
-        </p:nvSpPr>
-        <p:spPr>
-          <a:xfrm>
-            <a:off x="548640" y="1417320"/>
-            <a:ext cx="5340096" cy="960120"/>
-          </a:xfrm>
-          <a:prstGeom prst="roundRect">
-            <a:avLst/>
-          </a:prstGeom>
-          <a:solidFill>
-            <a:srgbClr val="FBEAEA"/>
-          </a:solidFill>
-          <a:ln w="15875">
-            <a:solidFill>
-              <a:srgbClr val="C62828"/>
-            </a:solidFill>
-            <a:prstDash val="solid"/>
-          </a:ln>
-        </p:spPr>
-      </p:sp>
-      <p:sp>
-        <p:nvSpPr>
-          <p:cNvPr id="6" name="Text 4"/>
-          <p:cNvSpPr/>
-          <p:nvPr/>
-        </p:nvSpPr>
-        <p:spPr>
-          <a:xfrm>
-            <a:off x="594360" y="1463040"/>
-            <a:ext cx="5248656" cy="868680"/>
+      <p:pic>
+        <p:nvPicPr>
+          <p:cNvPr id="5" name="Image 0" descr="C:/Users/Aitor/docxgen/img/findByLibroId.png"/>
+          <p:cNvPicPr>
+            <a:picLocks noChangeAspect="1"/>
+          </p:cNvPicPr>
+          <p:nvPr/>
+        </p:nvPicPr>
+        <p:blipFill>
+          <a:blip r:embed="rId3"/>
+          <a:stretch>
+            <a:fillRect/>
+          </a:stretch>
+        </p:blipFill>
+        <p:spPr>
+          <a:xfrm>
+            <a:off x="4150908" y="1122530"/>
+            <a:ext cx="7672283" cy="5213014"/>
+          </a:xfrm>
+          <a:prstGeom prst="rect">
+            <a:avLst/>
+          </a:prstGeom>
+        </p:spPr>
+      </p:pic>
+      <p:sp>
+        <p:nvSpPr>
+          <p:cNvPr id="6" name="Text 3"/>
+          <p:cNvSpPr/>
+          <p:nvPr/>
+        </p:nvSpPr>
+        <p:spPr>
+          <a:xfrm>
+            <a:off x="632616" y="3340675"/>
+            <a:ext cx="3696789" cy="548640"/>
           </a:xfrm>
           <a:prstGeom prst="rect">
             <a:avLst/>
@@ -7023,501 +6892,24 @@
           <a:ln/>
         </p:spPr>
         <p:txBody>
-          <a:bodyPr wrap="square" rtlCol="0" anchor="ctr"/>
-          <a:lstStyle/>
-          <a:p>
-            <a:pPr algn="ctr" indent="0" marL="0">
-              <a:buNone/>
-            </a:pPr>
-            <a:r>
-              <a:rPr lang="en-US" sz="1550" dirty="0">
-                <a:solidFill>
-                  <a:srgbClr val="212121"/>
+          <a:bodyPr wrap="square" rtlCol="0" anchor="t"/>
+          <a:lstStyle/>
+          <a:p>
+            <a:pPr marL="0" indent="0">
+              <a:buNone/>
+            </a:pPr>
+            <a:r>
+              <a:rPr lang="en-US" sz="1500" dirty="0">
+                <a:solidFill>
+                  <a:srgbClr val="757575"/>
                 </a:solidFill>
                 <a:latin typeface="Arial" pitchFamily="34" charset="0"/>
                 <a:ea typeface="Arial" pitchFamily="34" charset="-122"/>
                 <a:cs typeface="Arial" pitchFamily="34" charset="-120"/>
               </a:rPr>
-              <a:t>Cliente pide</a:t>
-            </a:r>
-            <a:endParaRPr lang="en-US" sz="1550" dirty="0"/>
-          </a:p>
-          <a:p>
-            <a:pPr algn="ctr" indent="0" marL="0">
-              <a:buNone/>
-            </a:pPr>
-            <a:r>
-              <a:rPr lang="en-US" sz="1550" dirty="0">
-                <a:solidFill>
-                  <a:srgbClr val="212121"/>
-                </a:solidFill>
-                <a:latin typeface="Arial" pitchFamily="34" charset="0"/>
-                <a:ea typeface="Arial" pitchFamily="34" charset="-122"/>
-                <a:cs typeface="Arial" pitchFamily="34" charset="-120"/>
-              </a:rPr>
-              <a:t>findByLibroId(libroId)</a:t>
-            </a:r>
-            <a:endParaRPr lang="en-US" sz="1550" dirty="0"/>
-          </a:p>
-        </p:txBody>
-      </p:sp>
-      <p:sp>
-        <p:nvSpPr>
-          <p:cNvPr id="7" name="Text 5"/>
-          <p:cNvSpPr/>
-          <p:nvPr/>
-        </p:nvSpPr>
-        <p:spPr>
-          <a:xfrm>
-            <a:off x="5843016" y="1417320"/>
-            <a:ext cx="502920" cy="960120"/>
-          </a:xfrm>
-          <a:prstGeom prst="rect">
-            <a:avLst/>
-          </a:prstGeom>
-          <a:noFill/>
-          <a:ln/>
-        </p:spPr>
-        <p:txBody>
-          <a:bodyPr wrap="square" rtlCol="0" anchor="ctr"/>
-          <a:lstStyle/>
-          <a:p>
-            <a:pPr algn="ctr" indent="0" marL="0">
-              <a:buNone/>
-            </a:pPr>
-            <a:r>
-              <a:rPr lang="en-US" sz="2200" b="1" dirty="0">
-                <a:solidFill>
-                  <a:srgbClr val="C62828"/>
-                </a:solidFill>
-                <a:latin typeface="Arial" pitchFamily="34" charset="0"/>
-                <a:ea typeface="Arial" pitchFamily="34" charset="-122"/>
-                <a:cs typeface="Arial" pitchFamily="34" charset="-120"/>
-              </a:rPr>
-              <a:t>→</a:t>
-            </a:r>
-            <a:endParaRPr lang="en-US" sz="2200" dirty="0"/>
-          </a:p>
-        </p:txBody>
-      </p:sp>
-      <p:sp>
-        <p:nvSpPr>
-          <p:cNvPr id="8" name="Shape 6"/>
-          <p:cNvSpPr/>
-          <p:nvPr/>
-        </p:nvSpPr>
-        <p:spPr>
-          <a:xfrm>
-            <a:off x="6300216" y="1417320"/>
-            <a:ext cx="5340096" cy="960120"/>
-          </a:xfrm>
-          <a:prstGeom prst="roundRect">
-            <a:avLst/>
-          </a:prstGeom>
-          <a:solidFill>
-            <a:srgbClr val="FBEAEA"/>
-          </a:solidFill>
-          <a:ln w="15875">
-            <a:solidFill>
-              <a:srgbClr val="C62828"/>
-            </a:solidFill>
-            <a:prstDash val="solid"/>
-          </a:ln>
-        </p:spPr>
-      </p:sp>
-      <p:sp>
-        <p:nvSpPr>
-          <p:cNvPr id="9" name="Text 7"/>
-          <p:cNvSpPr/>
-          <p:nvPr/>
-        </p:nvSpPr>
-        <p:spPr>
-          <a:xfrm>
-            <a:off x="6345936" y="1463040"/>
-            <a:ext cx="5248656" cy="868680"/>
-          </a:xfrm>
-          <a:prstGeom prst="rect">
-            <a:avLst/>
-          </a:prstGeom>
-          <a:noFill/>
-          <a:ln/>
-        </p:spPr>
-        <p:txBody>
-          <a:bodyPr wrap="square" rtlCol="0" anchor="ctr"/>
-          <a:lstStyle/>
-          <a:p>
-            <a:pPr algn="ctr" indent="0" marL="0">
-              <a:buNone/>
-            </a:pPr>
-            <a:r>
-              <a:rPr lang="en-US" sz="1550" dirty="0">
-                <a:solidFill>
-                  <a:srgbClr val="212121"/>
-                </a:solidFill>
-                <a:latin typeface="Arial" pitchFamily="34" charset="0"/>
-                <a:ea typeface="Arial" pitchFamily="34" charset="-122"/>
-                <a:cs typeface="Arial" pitchFamily="34" charset="-120"/>
-              </a:rPr>
-              <a:t>Service: existsById(libroId)</a:t>
-            </a:r>
-            <a:endParaRPr lang="en-US" sz="1550" dirty="0"/>
-          </a:p>
-          <a:p>
-            <a:pPr algn="ctr" indent="0" marL="0">
-              <a:buNone/>
-            </a:pPr>
-            <a:r>
-              <a:rPr lang="en-US" sz="1550" dirty="0">
-                <a:solidFill>
-                  <a:srgbClr val="212121"/>
-                </a:solidFill>
-                <a:latin typeface="Arial" pitchFamily="34" charset="0"/>
-                <a:ea typeface="Arial" pitchFamily="34" charset="-122"/>
-                <a:cs typeface="Arial" pitchFamily="34" charset="-120"/>
-              </a:rPr>
-              <a:t>en PostgreSQL</a:t>
-            </a:r>
-            <a:endParaRPr lang="en-US" sz="1550" dirty="0"/>
-          </a:p>
-        </p:txBody>
-      </p:sp>
-      <p:sp>
-        <p:nvSpPr>
-          <p:cNvPr id="10" name="Shape 8"/>
-          <p:cNvSpPr/>
-          <p:nvPr/>
-        </p:nvSpPr>
-        <p:spPr>
-          <a:xfrm>
-            <a:off x="2340407" y="2880360"/>
-            <a:ext cx="7508138" cy="685800"/>
-          </a:xfrm>
-          <a:prstGeom prst="roundRect">
-            <a:avLst/>
-          </a:prstGeom>
-          <a:solidFill>
-            <a:srgbClr val="FBEAEA"/>
-          </a:solidFill>
-          <a:ln w="19050">
-            <a:solidFill>
-              <a:srgbClr val="C62828"/>
-            </a:solidFill>
-            <a:prstDash val="solid"/>
-          </a:ln>
-        </p:spPr>
-      </p:sp>
-      <p:sp>
-        <p:nvSpPr>
-          <p:cNvPr id="11" name="Text 9"/>
-          <p:cNvSpPr/>
-          <p:nvPr/>
-        </p:nvSpPr>
-        <p:spPr>
-          <a:xfrm>
-            <a:off x="2340407" y="2880360"/>
-            <a:ext cx="7508138" cy="685800"/>
-          </a:xfrm>
-          <a:prstGeom prst="rect">
-            <a:avLst/>
-          </a:prstGeom>
-          <a:noFill/>
-          <a:ln/>
-        </p:spPr>
-        <p:txBody>
-          <a:bodyPr wrap="square" rtlCol="0" anchor="ctr"/>
-          <a:lstStyle/>
-          <a:p>
-            <a:pPr algn="ctr" indent="0" marL="0">
-              <a:buNone/>
-            </a:pPr>
-            <a:r>
-              <a:rPr lang="en-US" sz="1600" b="1" dirty="0">
-                <a:solidFill>
-                  <a:srgbClr val="212121"/>
-                </a:solidFill>
-                <a:latin typeface="Arial" pitchFamily="34" charset="0"/>
-                <a:ea typeface="Arial" pitchFamily="34" charset="-122"/>
-                <a:cs typeface="Arial" pitchFamily="34" charset="-120"/>
-              </a:rPr>
-              <a:t>¿El libro existe en PostgreSQL?</a:t>
-            </a:r>
-            <a:endParaRPr lang="en-US" sz="1600" dirty="0"/>
-          </a:p>
-        </p:txBody>
-      </p:sp>
-      <p:sp>
-        <p:nvSpPr>
-          <p:cNvPr id="12" name="Shape 10"/>
-          <p:cNvSpPr/>
-          <p:nvPr/>
-        </p:nvSpPr>
-        <p:spPr>
-          <a:xfrm>
-            <a:off x="6094476" y="3566160"/>
-            <a:ext cx="914" cy="182880"/>
-          </a:xfrm>
-          <a:prstGeom prst="line">
-            <a:avLst/>
-          </a:prstGeom>
-          <a:noFill/>
-          <a:ln w="15875">
-            <a:solidFill>
-              <a:srgbClr val="C62828"/>
-            </a:solidFill>
-            <a:prstDash val="solid"/>
-          </a:ln>
-        </p:spPr>
-      </p:sp>
-      <p:sp>
-        <p:nvSpPr>
-          <p:cNvPr id="13" name="Shape 11"/>
-          <p:cNvSpPr/>
-          <p:nvPr/>
-        </p:nvSpPr>
-        <p:spPr>
-          <a:xfrm>
-            <a:off x="548640" y="3931920"/>
-            <a:ext cx="5362956" cy="868680"/>
-          </a:xfrm>
-          <a:prstGeom prst="roundRect">
-            <a:avLst/>
-          </a:prstGeom>
-          <a:solidFill>
-            <a:srgbClr val="FBEAEA"/>
-          </a:solidFill>
-          <a:ln w="15875">
-            <a:solidFill>
-              <a:srgbClr val="C62828"/>
-            </a:solidFill>
-            <a:prstDash val="solid"/>
-          </a:ln>
-        </p:spPr>
-      </p:sp>
-      <p:sp>
-        <p:nvSpPr>
-          <p:cNvPr id="14" name="Text 12"/>
-          <p:cNvSpPr/>
-          <p:nvPr/>
-        </p:nvSpPr>
-        <p:spPr>
-          <a:xfrm>
-            <a:off x="594360" y="3931920"/>
-            <a:ext cx="5271516" cy="868680"/>
-          </a:xfrm>
-          <a:prstGeom prst="rect">
-            <a:avLst/>
-          </a:prstGeom>
-          <a:noFill/>
-          <a:ln/>
-        </p:spPr>
-        <p:txBody>
-          <a:bodyPr wrap="square" rtlCol="0" anchor="ctr"/>
-          <a:lstStyle/>
-          <a:p>
-            <a:pPr algn="ctr" indent="0" marL="0">
-              <a:buNone/>
-            </a:pPr>
-            <a:r>
-              <a:rPr lang="en-US" sz="1500" dirty="0">
-                <a:solidFill>
-                  <a:srgbClr val="212121"/>
-                </a:solidFill>
-                <a:latin typeface="Arial" pitchFamily="34" charset="0"/>
-                <a:ea typeface="Arial" pitchFamily="34" charset="-122"/>
-                <a:cs typeface="Arial" pitchFamily="34" charset="-120"/>
-              </a:rPr>
-              <a:t>No → 404 Not Found</a:t>
+              <a:t>Primero PostgreSQL, y solo si responde que sí, se llega a tocar Mongo — al revés estarías haciendo una consulta de más cuando el libro no existe.</a:t>
             </a:r>
             <a:endParaRPr lang="en-US" sz="1500" dirty="0"/>
-          </a:p>
-        </p:txBody>
-      </p:sp>
-      <p:sp>
-        <p:nvSpPr>
-          <p:cNvPr id="15" name="Shape 13"/>
-          <p:cNvSpPr/>
-          <p:nvPr/>
-        </p:nvSpPr>
-        <p:spPr>
-          <a:xfrm>
-            <a:off x="3230118" y="3749040"/>
-            <a:ext cx="914" cy="182880"/>
-          </a:xfrm>
-          <a:prstGeom prst="line">
-            <a:avLst/>
-          </a:prstGeom>
-          <a:noFill/>
-          <a:ln w="15875">
-            <a:solidFill>
-              <a:srgbClr val="C62828"/>
-            </a:solidFill>
-            <a:prstDash val="solid"/>
-          </a:ln>
-        </p:spPr>
-      </p:sp>
-      <p:sp>
-        <p:nvSpPr>
-          <p:cNvPr id="16" name="Shape 14"/>
-          <p:cNvSpPr/>
-          <p:nvPr/>
-        </p:nvSpPr>
-        <p:spPr>
-          <a:xfrm>
-            <a:off x="6277356" y="3931920"/>
-            <a:ext cx="5362956" cy="868680"/>
-          </a:xfrm>
-          <a:prstGeom prst="roundRect">
-            <a:avLst/>
-          </a:prstGeom>
-          <a:solidFill>
-            <a:srgbClr val="FBEAEA"/>
-          </a:solidFill>
-          <a:ln w="15875">
-            <a:solidFill>
-              <a:srgbClr val="C62828"/>
-            </a:solidFill>
-            <a:prstDash val="solid"/>
-          </a:ln>
-        </p:spPr>
-      </p:sp>
-      <p:sp>
-        <p:nvSpPr>
-          <p:cNvPr id="17" name="Text 15"/>
-          <p:cNvSpPr/>
-          <p:nvPr/>
-        </p:nvSpPr>
-        <p:spPr>
-          <a:xfrm>
-            <a:off x="6323076" y="3931920"/>
-            <a:ext cx="5271516" cy="868680"/>
-          </a:xfrm>
-          <a:prstGeom prst="rect">
-            <a:avLst/>
-          </a:prstGeom>
-          <a:noFill/>
-          <a:ln/>
-        </p:spPr>
-        <p:txBody>
-          <a:bodyPr wrap="square" rtlCol="0" anchor="ctr"/>
-          <a:lstStyle/>
-          <a:p>
-            <a:pPr algn="ctr" indent="0" marL="0">
-              <a:buNone/>
-            </a:pPr>
-            <a:r>
-              <a:rPr lang="en-US" sz="1500" dirty="0">
-                <a:solidFill>
-                  <a:srgbClr val="212121"/>
-                </a:solidFill>
-                <a:latin typeface="Arial" pitchFamily="34" charset="0"/>
-                <a:ea typeface="Arial" pitchFamily="34" charset="-122"/>
-                <a:cs typeface="Arial" pitchFamily="34" charset="-120"/>
-              </a:rPr>
-              <a:t>Sí → consulta MongoDB</a:t>
-            </a:r>
-            <a:endParaRPr lang="en-US" sz="1500" dirty="0"/>
-          </a:p>
-          <a:p>
-            <a:pPr algn="ctr" indent="0" marL="0">
-              <a:buNone/>
-            </a:pPr>
-            <a:r>
-              <a:rPr lang="en-US" sz="1500" dirty="0">
-                <a:solidFill>
-                  <a:srgbClr val="212121"/>
-                </a:solidFill>
-                <a:latin typeface="Arial" pitchFamily="34" charset="0"/>
-                <a:ea typeface="Arial" pitchFamily="34" charset="-122"/>
-                <a:cs typeface="Arial" pitchFamily="34" charset="-120"/>
-              </a:rPr>
-              <a:t>y devuelve la lista de notas</a:t>
-            </a:r>
-            <a:endParaRPr lang="en-US" sz="1500" dirty="0"/>
-          </a:p>
-        </p:txBody>
-      </p:sp>
-      <p:sp>
-        <p:nvSpPr>
-          <p:cNvPr id="18" name="Shape 16"/>
-          <p:cNvSpPr/>
-          <p:nvPr/>
-        </p:nvSpPr>
-        <p:spPr>
-          <a:xfrm>
-            <a:off x="8958834" y="3749040"/>
-            <a:ext cx="914" cy="182880"/>
-          </a:xfrm>
-          <a:prstGeom prst="line">
-            <a:avLst/>
-          </a:prstGeom>
-          <a:noFill/>
-          <a:ln w="15875">
-            <a:solidFill>
-              <a:srgbClr val="C62828"/>
-            </a:solidFill>
-            <a:prstDash val="solid"/>
-          </a:ln>
-        </p:spPr>
-      </p:sp>
-      <p:sp>
-        <p:nvSpPr>
-          <p:cNvPr id="19" name="Shape 17"/>
-          <p:cNvSpPr/>
-          <p:nvPr/>
-        </p:nvSpPr>
-        <p:spPr>
-          <a:xfrm>
-            <a:off x="3230118" y="3749040"/>
-            <a:ext cx="5728716" cy="914"/>
-          </a:xfrm>
-          <a:prstGeom prst="line">
-            <a:avLst/>
-          </a:prstGeom>
-          <a:noFill/>
-          <a:ln w="15875">
-            <a:solidFill>
-              <a:srgbClr val="C62828"/>
-            </a:solidFill>
-            <a:prstDash val="solid"/>
-          </a:ln>
-        </p:spPr>
-      </p:sp>
-      <p:sp>
-        <p:nvSpPr>
-          <p:cNvPr id="20" name="Text 18"/>
-          <p:cNvSpPr/>
-          <p:nvPr/>
-        </p:nvSpPr>
-        <p:spPr>
-          <a:xfrm>
-            <a:off x="548640" y="5074920"/>
-            <a:ext cx="11091672" cy="548640"/>
-          </a:xfrm>
-          <a:prstGeom prst="rect">
-            <a:avLst/>
-          </a:prstGeom>
-          <a:noFill/>
-          <a:ln/>
-        </p:spPr>
-        <p:txBody>
-          <a:bodyPr wrap="square" rtlCol="0" anchor="t"/>
-          <a:lstStyle/>
-          <a:p>
-            <a:pPr indent="0" marL="0">
-              <a:buNone/>
-            </a:pPr>
-            <a:r>
-              <a:rPr lang="en-US" sz="1400" dirty="0">
-                <a:solidFill>
-                  <a:srgbClr val="757575"/>
-                </a:solidFill>
-                <a:latin typeface="Arial" pitchFamily="34" charset="0"/>
-                <a:ea typeface="Arial" pitchFamily="34" charset="-122"/>
-                <a:cs typeface="Arial" pitchFamily="34" charset="-120"/>
-              </a:rPr>
-              <a:t>Primero PostgreSQL, y solo si responde que sí, se llega a tocar Mongo — al revés estarías haciendo una consulta de más cuando el libro no existe.</a:t>
-            </a:r>
-            <a:endParaRPr lang="en-US" sz="1400" dirty="0"/>
           </a:p>
         </p:txBody>
       </p:sp>
@@ -7570,6 +6962,13 @@
             <a:prstDash val="solid"/>
           </a:ln>
         </p:spPr>
+        <p:txBody>
+          <a:bodyPr/>
+          <a:lstStyle/>
+          <a:p>
+            <a:endParaRPr lang="es-ES"/>
+          </a:p>
+        </p:txBody>
       </p:sp>
       <p:sp>
         <p:nvSpPr>
@@ -7592,7 +6991,7 @@
           <a:bodyPr wrap="square" rtlCol="0" anchor="ctr"/>
           <a:lstStyle/>
           <a:p>
-            <a:pPr indent="0" marL="0">
+            <a:pPr marL="0" indent="0">
               <a:buNone/>
             </a:pPr>
             <a:r>
@@ -7631,7 +7030,7 @@
           <a:bodyPr wrap="square" rtlCol="0" anchor="ctr"/>
           <a:lstStyle/>
           <a:p>
-            <a:pPr algn="r" indent="0" marL="0">
+            <a:pPr marL="0" indent="0" algn="r">
               <a:buNone/>
             </a:pPr>
             <a:r>
@@ -7657,8 +7056,8 @@
         </p:nvSpPr>
         <p:spPr>
           <a:xfrm>
-            <a:off x="548640" y="1554480"/>
-            <a:ext cx="11091672" cy="1737360"/>
+            <a:off x="548640" y="2560320"/>
+            <a:ext cx="11091672" cy="2194560"/>
           </a:xfrm>
           <a:prstGeom prst="roundRect">
             <a:avLst/>
@@ -7673,6 +7072,13 @@
             <a:prstDash val="solid"/>
           </a:ln>
         </p:spPr>
+        <p:txBody>
+          <a:bodyPr/>
+          <a:lstStyle/>
+          <a:p>
+            <a:endParaRPr lang="es-ES"/>
+          </a:p>
+        </p:txBody>
       </p:sp>
       <p:sp>
         <p:nvSpPr>
@@ -7682,8 +7088,8 @@
         </p:nvSpPr>
         <p:spPr>
           <a:xfrm>
-            <a:off x="822960" y="1645920"/>
-            <a:ext cx="10543032" cy="1554480"/>
+            <a:off x="822960" y="2651760"/>
+            <a:ext cx="10543032" cy="2011680"/>
           </a:xfrm>
           <a:prstGeom prst="rect">
             <a:avLst/>
@@ -7695,11 +7101,11 @@
           <a:bodyPr wrap="square" rtlCol="0" anchor="ctr"/>
           <a:lstStyle/>
           <a:p>
-            <a:pPr indent="0" marL="0">
-              <a:buNone/>
-            </a:pPr>
-            <a:r>
-              <a:rPr lang="en-US" sz="1950" dirty="0">
+            <a:pPr marL="0" indent="0">
+              <a:buNone/>
+            </a:pPr>
+            <a:r>
+              <a:rPr lang="en-US" sz="2300" dirty="0">
                 <a:solidFill>
                   <a:srgbClr val="212121"/>
                 </a:solidFill>
@@ -7709,7 +7115,7 @@
               </a:rPr>
               <a:t>El campo autor no puede venir del cliente en el cuerpo de la petición — si lo dejaras, cualquiera podría escribir el nombre de otra persona y hacerse pasar por ella. Por eso el DTO que valida lo que manda el cliente y el objeto que de verdad se usa para crear el documento no son el mismo.</a:t>
             </a:r>
-            <a:endParaRPr lang="en-US" sz="1950" dirty="0"/>
+            <a:endParaRPr lang="en-US" sz="2300" dirty="0"/>
           </a:p>
         </p:txBody>
       </p:sp>
@@ -7762,6 +7168,13 @@
             <a:prstDash val="solid"/>
           </a:ln>
         </p:spPr>
+        <p:txBody>
+          <a:bodyPr/>
+          <a:lstStyle/>
+          <a:p>
+            <a:endParaRPr lang="es-ES"/>
+          </a:p>
+        </p:txBody>
       </p:sp>
       <p:sp>
         <p:nvSpPr>
@@ -7784,7 +7197,7 @@
           <a:bodyPr wrap="square" rtlCol="0" anchor="ctr"/>
           <a:lstStyle/>
           <a:p>
-            <a:pPr indent="0" marL="0">
+            <a:pPr marL="0" indent="0">
               <a:buNone/>
             </a:pPr>
             <a:r>
@@ -7823,7 +7236,7 @@
           <a:bodyPr wrap="square" rtlCol="0" anchor="ctr"/>
           <a:lstStyle/>
           <a:p>
-            <a:pPr algn="r" indent="0" marL="0">
+            <a:pPr marL="0" indent="0" algn="r">
               <a:buNone/>
             </a:pPr>
             <a:r>
@@ -7849,8 +7262,8 @@
         </p:nvSpPr>
         <p:spPr>
           <a:xfrm>
-            <a:off x="548640" y="1234440"/>
-            <a:ext cx="11091672" cy="2286000"/>
+            <a:off x="548640" y="1463040"/>
+            <a:ext cx="11091672" cy="2651760"/>
           </a:xfrm>
           <a:prstGeom prst="rect">
             <a:avLst/>
@@ -7865,6 +7278,13 @@
             <a:prstDash val="solid"/>
           </a:ln>
         </p:spPr>
+        <p:txBody>
+          <a:bodyPr/>
+          <a:lstStyle/>
+          <a:p>
+            <a:endParaRPr lang="es-ES"/>
+          </a:p>
+        </p:txBody>
       </p:sp>
       <p:sp>
         <p:nvSpPr>
@@ -7874,8 +7294,8 @@
         </p:nvSpPr>
         <p:spPr>
           <a:xfrm>
-            <a:off x="548640" y="1234440"/>
-            <a:ext cx="73152" cy="2286000"/>
+            <a:off x="548640" y="1463040"/>
+            <a:ext cx="73152" cy="2651760"/>
           </a:xfrm>
           <a:prstGeom prst="rect">
             <a:avLst/>
@@ -7890,6 +7310,13 @@
             <a:prstDash val="solid"/>
           </a:ln>
         </p:spPr>
+        <p:txBody>
+          <a:bodyPr/>
+          <a:lstStyle/>
+          <a:p>
+            <a:endParaRPr lang="es-ES"/>
+          </a:p>
+        </p:txBody>
       </p:sp>
       <p:sp>
         <p:nvSpPr>
@@ -7899,8 +7326,8 @@
         </p:nvSpPr>
         <p:spPr>
           <a:xfrm>
-            <a:off x="822960" y="1344168"/>
-            <a:ext cx="10588752" cy="2066544"/>
+            <a:off x="822960" y="1572768"/>
+            <a:ext cx="10588752" cy="2432304"/>
           </a:xfrm>
           <a:prstGeom prst="rect">
             <a:avLst/>
@@ -7912,11 +7339,11 @@
           <a:bodyPr wrap="square" rtlCol="0" anchor="t"/>
           <a:lstStyle/>
           <a:p>
-            <a:pPr indent="0" marL="0">
-              <a:buNone/>
-            </a:pPr>
-            <a:r>
-              <a:rPr lang="en-US" sz="1450" dirty="0">
+            <a:pPr marL="0" indent="0">
+              <a:buNone/>
+            </a:pPr>
+            <a:r>
+              <a:rPr lang="en-US" sz="1700" dirty="0">
                 <a:solidFill>
                   <a:srgbClr val="263238"/>
                 </a:solidFill>
@@ -7926,14 +7353,14 @@
               </a:rPr>
               <a:t>public record NotaLecturaRequestDTO(</a:t>
             </a:r>
-            <a:endParaRPr lang="en-US" sz="1450" dirty="0"/>
-          </a:p>
-          <a:p>
-            <a:pPr indent="0" marL="0">
-              <a:buNone/>
-            </a:pPr>
-            <a:r>
-              <a:rPr lang="en-US" sz="1450" dirty="0">
+            <a:endParaRPr lang="en-US" sz="1700" dirty="0"/>
+          </a:p>
+          <a:p>
+            <a:pPr marL="0" indent="0">
+              <a:buNone/>
+            </a:pPr>
+            <a:r>
+              <a:rPr lang="en-US" sz="1700" dirty="0">
                 <a:solidFill>
                   <a:srgbClr val="263238"/>
                 </a:solidFill>
@@ -7943,14 +7370,14 @@
               </a:rPr>
               <a:t>        @NotNull @Min(1) @Max(10) Integer puntuacion,</a:t>
             </a:r>
-            <a:endParaRPr lang="en-US" sz="1450" dirty="0"/>
-          </a:p>
-          <a:p>
-            <a:pPr indent="0" marL="0">
-              <a:buNone/>
-            </a:pPr>
-            <a:r>
-              <a:rPr lang="en-US" sz="1450" dirty="0">
+            <a:endParaRPr lang="en-US" sz="1700" dirty="0"/>
+          </a:p>
+          <a:p>
+            <a:pPr marL="0" indent="0">
+              <a:buNone/>
+            </a:pPr>
+            <a:r>
+              <a:rPr lang="en-US" sz="1700" dirty="0">
                 <a:solidFill>
                   <a:srgbClr val="263238"/>
                 </a:solidFill>
@@ -7960,14 +7387,14 @@
               </a:rPr>
               <a:t>        @NotBlank String comentario</a:t>
             </a:r>
-            <a:endParaRPr lang="en-US" sz="1450" dirty="0"/>
-          </a:p>
-          <a:p>
-            <a:pPr indent="0" marL="0">
-              <a:buNone/>
-            </a:pPr>
-            <a:r>
-              <a:rPr lang="en-US" sz="1450" dirty="0">
+            <a:endParaRPr lang="en-US" sz="1700" dirty="0"/>
+          </a:p>
+          <a:p>
+            <a:pPr marL="0" indent="0">
+              <a:buNone/>
+            </a:pPr>
+            <a:r>
+              <a:rPr lang="en-US" sz="1700" dirty="0">
                 <a:solidFill>
                   <a:srgbClr val="263238"/>
                 </a:solidFill>
@@ -7977,20 +7404,20 @@
               </a:rPr>
               <a:t>) {}</a:t>
             </a:r>
-            <a:endParaRPr lang="en-US" sz="1450" dirty="0"/>
-          </a:p>
-          <a:p>
-            <a:pPr indent="0" marL="0">
-              <a:buNone/>
-            </a:pPr>
-            <a:endParaRPr lang="en-US" sz="1450" dirty="0"/>
-          </a:p>
-          <a:p>
-            <a:pPr indent="0" marL="0">
-              <a:buNone/>
-            </a:pPr>
-            <a:r>
-              <a:rPr lang="en-US" sz="1450" dirty="0">
+            <a:endParaRPr lang="en-US" sz="1700" dirty="0"/>
+          </a:p>
+          <a:p>
+            <a:pPr marL="0" indent="0">
+              <a:buNone/>
+            </a:pPr>
+            <a:endParaRPr lang="en-US" sz="1700" dirty="0"/>
+          </a:p>
+          <a:p>
+            <a:pPr marL="0" indent="0">
+              <a:buNone/>
+            </a:pPr>
+            <a:r>
+              <a:rPr lang="en-US" sz="1700" dirty="0">
                 <a:solidFill>
                   <a:srgbClr val="263238"/>
                 </a:solidFill>
@@ -8000,14 +7427,14 @@
               </a:rPr>
               <a:t>public record NotaLecturaCreateDTO(</a:t>
             </a:r>
-            <a:endParaRPr lang="en-US" sz="1450" dirty="0"/>
-          </a:p>
-          <a:p>
-            <a:pPr indent="0" marL="0">
-              <a:buNone/>
-            </a:pPr>
-            <a:r>
-              <a:rPr lang="en-US" sz="1450" dirty="0">
+            <a:endParaRPr lang="en-US" sz="1700" dirty="0"/>
+          </a:p>
+          <a:p>
+            <a:pPr marL="0" indent="0">
+              <a:buNone/>
+            </a:pPr>
+            <a:r>
+              <a:rPr lang="en-US" sz="1700" dirty="0">
                 <a:solidFill>
                   <a:srgbClr val="263238"/>
                 </a:solidFill>
@@ -8017,7 +7444,7 @@
               </a:rPr>
               <a:t>        Long libroId, String autor, Integer puntuacion, String comentario) {}</a:t>
             </a:r>
-            <a:endParaRPr lang="en-US" sz="1450" dirty="0"/>
+            <a:endParaRPr lang="en-US" sz="1700" dirty="0"/>
           </a:p>
         </p:txBody>
       </p:sp>
@@ -8029,8 +7456,8 @@
         </p:nvSpPr>
         <p:spPr>
           <a:xfrm>
-            <a:off x="548640" y="3794760"/>
-            <a:ext cx="11091672" cy="1234440"/>
+            <a:off x="548640" y="4434840"/>
+            <a:ext cx="11091672" cy="1463040"/>
           </a:xfrm>
           <a:prstGeom prst="roundRect">
             <a:avLst/>
@@ -8045,6 +7472,13 @@
             <a:prstDash val="solid"/>
           </a:ln>
         </p:spPr>
+        <p:txBody>
+          <a:bodyPr/>
+          <a:lstStyle/>
+          <a:p>
+            <a:endParaRPr lang="es-ES"/>
+          </a:p>
+        </p:txBody>
       </p:sp>
       <p:sp>
         <p:nvSpPr>
@@ -8054,8 +7488,8 @@
         </p:nvSpPr>
         <p:spPr>
           <a:xfrm>
-            <a:off x="822960" y="3886200"/>
-            <a:ext cx="10543032" cy="1051560"/>
+            <a:off x="822960" y="4526280"/>
+            <a:ext cx="10543032" cy="1280160"/>
           </a:xfrm>
           <a:prstGeom prst="rect">
             <a:avLst/>
@@ -8067,11 +7501,11 @@
           <a:bodyPr wrap="square" rtlCol="0" anchor="ctr"/>
           <a:lstStyle/>
           <a:p>
-            <a:pPr indent="0" marL="0">
-              <a:buNone/>
-            </a:pPr>
-            <a:r>
-              <a:rPr lang="en-US" sz="1450" dirty="0">
+            <a:pPr marL="0" indent="0">
+              <a:buNone/>
+            </a:pPr>
+            <a:r>
+              <a:rPr lang="en-US" sz="1700" dirty="0">
                 <a:solidFill>
                   <a:srgbClr val="212121"/>
                 </a:solidFill>
@@ -8081,7 +7515,7 @@
               </a:rPr>
               <a:t>MongoDB flexible no significa API sin reglas: MongoDB admite por defecto que dos documentos tengan campos distintos, pero eso no impide que tu aplicación imponga reglas más estrictas — son dos capas diferentes: lo que admite el motor y lo que permite tu API.</a:t>
             </a:r>
-            <a:endParaRPr lang="en-US" sz="1450" dirty="0"/>
+            <a:endParaRPr lang="en-US" sz="1700" dirty="0"/>
           </a:p>
         </p:txBody>
       </p:sp>
@@ -8134,6 +7568,13 @@
             <a:prstDash val="solid"/>
           </a:ln>
         </p:spPr>
+        <p:txBody>
+          <a:bodyPr/>
+          <a:lstStyle/>
+          <a:p>
+            <a:endParaRPr lang="es-ES"/>
+          </a:p>
+        </p:txBody>
       </p:sp>
       <p:sp>
         <p:nvSpPr>
@@ -8156,7 +7597,7 @@
           <a:bodyPr wrap="square" rtlCol="0" anchor="ctr"/>
           <a:lstStyle/>
           <a:p>
-            <a:pPr indent="0" marL="0">
+            <a:pPr marL="0" indent="0">
               <a:buNone/>
             </a:pPr>
             <a:r>
@@ -8195,7 +7636,7 @@
           <a:bodyPr wrap="square" rtlCol="0" anchor="ctr"/>
           <a:lstStyle/>
           <a:p>
-            <a:pPr algn="r" indent="0" marL="0">
+            <a:pPr marL="0" indent="0" algn="r">
               <a:buNone/>
             </a:pPr>
             <a:r>
@@ -8221,8 +7662,8 @@
         </p:nvSpPr>
         <p:spPr>
           <a:xfrm>
-            <a:off x="548640" y="1234440"/>
-            <a:ext cx="11091672" cy="2834640"/>
+            <a:off x="548640" y="1325880"/>
+            <a:ext cx="11091672" cy="3200400"/>
           </a:xfrm>
           <a:prstGeom prst="rect">
             <a:avLst/>
@@ -8237,6 +7678,13 @@
             <a:prstDash val="solid"/>
           </a:ln>
         </p:spPr>
+        <p:txBody>
+          <a:bodyPr/>
+          <a:lstStyle/>
+          <a:p>
+            <a:endParaRPr lang="es-ES"/>
+          </a:p>
+        </p:txBody>
       </p:sp>
       <p:sp>
         <p:nvSpPr>
@@ -8246,8 +7694,8 @@
         </p:nvSpPr>
         <p:spPr>
           <a:xfrm>
-            <a:off x="548640" y="1234440"/>
-            <a:ext cx="73152" cy="2834640"/>
+            <a:off x="548640" y="1325880"/>
+            <a:ext cx="73152" cy="3200400"/>
           </a:xfrm>
           <a:prstGeom prst="rect">
             <a:avLst/>
@@ -8262,6 +7710,13 @@
             <a:prstDash val="solid"/>
           </a:ln>
         </p:spPr>
+        <p:txBody>
+          <a:bodyPr/>
+          <a:lstStyle/>
+          <a:p>
+            <a:endParaRPr lang="es-ES"/>
+          </a:p>
+        </p:txBody>
       </p:sp>
       <p:sp>
         <p:nvSpPr>
@@ -8271,8 +7726,8 @@
         </p:nvSpPr>
         <p:spPr>
           <a:xfrm>
-            <a:off x="822960" y="1344168"/>
-            <a:ext cx="10588752" cy="2615184"/>
+            <a:off x="822960" y="1435608"/>
+            <a:ext cx="10588752" cy="2980944"/>
           </a:xfrm>
           <a:prstGeom prst="rect">
             <a:avLst/>
@@ -8284,11 +7739,11 @@
           <a:bodyPr wrap="square" rtlCol="0" anchor="t"/>
           <a:lstStyle/>
           <a:p>
-            <a:pPr indent="0" marL="0">
-              <a:buNone/>
-            </a:pPr>
-            <a:r>
-              <a:rPr lang="en-US" sz="1350" dirty="0">
+            <a:pPr marL="0" indent="0">
+              <a:buNone/>
+            </a:pPr>
+            <a:r>
+              <a:rPr lang="en-US" sz="1500" dirty="0">
                 <a:solidFill>
                   <a:srgbClr val="263238"/>
                 </a:solidFill>
@@ -8298,14 +7753,14 @@
               </a:rPr>
               <a:t>@PostMapping</a:t>
             </a:r>
-            <a:endParaRPr lang="en-US" sz="1350" dirty="0"/>
-          </a:p>
-          <a:p>
-            <a:pPr indent="0" marL="0">
-              <a:buNone/>
-            </a:pPr>
-            <a:r>
-              <a:rPr lang="en-US" sz="1350" dirty="0">
+            <a:endParaRPr lang="en-US" sz="1500" dirty="0"/>
+          </a:p>
+          <a:p>
+            <a:pPr marL="0" indent="0">
+              <a:buNone/>
+            </a:pPr>
+            <a:r>
+              <a:rPr lang="en-US" sz="1500" dirty="0">
                 <a:solidFill>
                   <a:srgbClr val="263238"/>
                 </a:solidFill>
@@ -8315,14 +7770,14 @@
               </a:rPr>
               <a:t>public ResponseEntity&lt;NotaLecturaResponseDTO&gt; create(</a:t>
             </a:r>
-            <a:endParaRPr lang="en-US" sz="1350" dirty="0"/>
-          </a:p>
-          <a:p>
-            <a:pPr indent="0" marL="0">
-              <a:buNone/>
-            </a:pPr>
-            <a:r>
-              <a:rPr lang="en-US" sz="1350" dirty="0">
+            <a:endParaRPr lang="en-US" sz="1500" dirty="0"/>
+          </a:p>
+          <a:p>
+            <a:pPr marL="0" indent="0">
+              <a:buNone/>
+            </a:pPr>
+            <a:r>
+              <a:rPr lang="en-US" sz="1500" dirty="0">
                 <a:solidFill>
                   <a:srgbClr val="263238"/>
                 </a:solidFill>
@@ -8332,14 +7787,14 @@
               </a:rPr>
               <a:t>        @PathVariable Long libroId,</a:t>
             </a:r>
-            <a:endParaRPr lang="en-US" sz="1350" dirty="0"/>
-          </a:p>
-          <a:p>
-            <a:pPr indent="0" marL="0">
-              <a:buNone/>
-            </a:pPr>
-            <a:r>
-              <a:rPr lang="en-US" sz="1350" dirty="0">
+            <a:endParaRPr lang="en-US" sz="1500" dirty="0"/>
+          </a:p>
+          <a:p>
+            <a:pPr marL="0" indent="0">
+              <a:buNone/>
+            </a:pPr>
+            <a:r>
+              <a:rPr lang="en-US" sz="1500" dirty="0">
                 <a:solidFill>
                   <a:srgbClr val="263238"/>
                 </a:solidFill>
@@ -8349,14 +7804,14 @@
               </a:rPr>
               <a:t>        @Valid @RequestBody NotaLecturaRequestDTO dto,</a:t>
             </a:r>
-            <a:endParaRPr lang="en-US" sz="1350" dirty="0"/>
-          </a:p>
-          <a:p>
-            <a:pPr indent="0" marL="0">
-              <a:buNone/>
-            </a:pPr>
-            <a:r>
-              <a:rPr lang="en-US" sz="1350" dirty="0">
+            <a:endParaRPr lang="en-US" sz="1500" dirty="0"/>
+          </a:p>
+          <a:p>
+            <a:pPr marL="0" indent="0">
+              <a:buNone/>
+            </a:pPr>
+            <a:r>
+              <a:rPr lang="en-US" sz="1500" dirty="0">
                 <a:solidFill>
                   <a:srgbClr val="263238"/>
                 </a:solidFill>
@@ -8366,14 +7821,14 @@
               </a:rPr>
               <a:t>        Principal principal</a:t>
             </a:r>
-            <a:endParaRPr lang="en-US" sz="1350" dirty="0"/>
-          </a:p>
-          <a:p>
-            <a:pPr indent="0" marL="0">
-              <a:buNone/>
-            </a:pPr>
-            <a:r>
-              <a:rPr lang="en-US" sz="1350" dirty="0">
+            <a:endParaRPr lang="en-US" sz="1500" dirty="0"/>
+          </a:p>
+          <a:p>
+            <a:pPr marL="0" indent="0">
+              <a:buNone/>
+            </a:pPr>
+            <a:r>
+              <a:rPr lang="en-US" sz="1500" dirty="0">
                 <a:solidFill>
                   <a:srgbClr val="263238"/>
                 </a:solidFill>
@@ -8383,14 +7838,14 @@
               </a:rPr>
               <a:t>) {</a:t>
             </a:r>
-            <a:endParaRPr lang="en-US" sz="1350" dirty="0"/>
-          </a:p>
-          <a:p>
-            <a:pPr indent="0" marL="0">
-              <a:buNone/>
-            </a:pPr>
-            <a:r>
-              <a:rPr lang="en-US" sz="1350" dirty="0">
+            <a:endParaRPr lang="en-US" sz="1500" dirty="0"/>
+          </a:p>
+          <a:p>
+            <a:pPr marL="0" indent="0">
+              <a:buNone/>
+            </a:pPr>
+            <a:r>
+              <a:rPr lang="en-US" sz="1500" dirty="0">
                 <a:solidFill>
                   <a:srgbClr val="263238"/>
                 </a:solidFill>
@@ -8400,14 +7855,14 @@
               </a:rPr>
               <a:t>    NotaLecturaCreateDTO createDTO = new NotaLecturaCreateDTO(</a:t>
             </a:r>
-            <a:endParaRPr lang="en-US" sz="1350" dirty="0"/>
-          </a:p>
-          <a:p>
-            <a:pPr indent="0" marL="0">
-              <a:buNone/>
-            </a:pPr>
-            <a:r>
-              <a:rPr lang="en-US" sz="1350" dirty="0">
+            <a:endParaRPr lang="en-US" sz="1500" dirty="0"/>
+          </a:p>
+          <a:p>
+            <a:pPr marL="0" indent="0">
+              <a:buNone/>
+            </a:pPr>
+            <a:r>
+              <a:rPr lang="en-US" sz="1500" dirty="0">
                 <a:solidFill>
                   <a:srgbClr val="263238"/>
                 </a:solidFill>
@@ -8417,14 +7872,14 @@
               </a:rPr>
               <a:t>            libroId, principal.getName(), dto.puntuacion(), dto.comentario());</a:t>
             </a:r>
-            <a:endParaRPr lang="en-US" sz="1350" dirty="0"/>
-          </a:p>
-          <a:p>
-            <a:pPr indent="0" marL="0">
-              <a:buNone/>
-            </a:pPr>
-            <a:r>
-              <a:rPr lang="en-US" sz="1350" dirty="0">
+            <a:endParaRPr lang="en-US" sz="1500" dirty="0"/>
+          </a:p>
+          <a:p>
+            <a:pPr marL="0" indent="0">
+              <a:buNone/>
+            </a:pPr>
+            <a:r>
+              <a:rPr lang="en-US" sz="1500" dirty="0">
                 <a:solidFill>
                   <a:srgbClr val="263238"/>
                 </a:solidFill>
@@ -8434,14 +7889,14 @@
               </a:rPr>
               <a:t>    return ResponseEntity.status(HttpStatus.CREATED)</a:t>
             </a:r>
-            <a:endParaRPr lang="en-US" sz="1350" dirty="0"/>
-          </a:p>
-          <a:p>
-            <a:pPr indent="0" marL="0">
-              <a:buNone/>
-            </a:pPr>
-            <a:r>
-              <a:rPr lang="en-US" sz="1350" dirty="0">
+            <a:endParaRPr lang="en-US" sz="1500" dirty="0"/>
+          </a:p>
+          <a:p>
+            <a:pPr marL="0" indent="0">
+              <a:buNone/>
+            </a:pPr>
+            <a:r>
+              <a:rPr lang="en-US" sz="1500" dirty="0">
                 <a:solidFill>
                   <a:srgbClr val="263238"/>
                 </a:solidFill>
@@ -8451,14 +7906,14 @@
               </a:rPr>
               <a:t>            .body(notaLecturaService.create(createDTO));</a:t>
             </a:r>
-            <a:endParaRPr lang="en-US" sz="1350" dirty="0"/>
-          </a:p>
-          <a:p>
-            <a:pPr indent="0" marL="0">
-              <a:buNone/>
-            </a:pPr>
-            <a:r>
-              <a:rPr lang="en-US" sz="1350" dirty="0">
+            <a:endParaRPr lang="en-US" sz="1500" dirty="0"/>
+          </a:p>
+          <a:p>
+            <a:pPr marL="0" indent="0">
+              <a:buNone/>
+            </a:pPr>
+            <a:r>
+              <a:rPr lang="en-US" sz="1500" dirty="0">
                 <a:solidFill>
                   <a:srgbClr val="263238"/>
                 </a:solidFill>
@@ -8468,7 +7923,7 @@
               </a:rPr>
               <a:t>}</a:t>
             </a:r>
-            <a:endParaRPr lang="en-US" sz="1350" dirty="0"/>
+            <a:endParaRPr lang="en-US" sz="1500" dirty="0"/>
           </a:p>
         </p:txBody>
       </p:sp>
@@ -8480,8 +7935,8 @@
         </p:nvSpPr>
         <p:spPr>
           <a:xfrm>
-            <a:off x="548640" y="4343400"/>
-            <a:ext cx="11091672" cy="731520"/>
+            <a:off x="548640" y="4846320"/>
+            <a:ext cx="11091672" cy="777240"/>
           </a:xfrm>
           <a:prstGeom prst="rect">
             <a:avLst/>
@@ -8493,11 +7948,11 @@
           <a:bodyPr wrap="square" rtlCol="0" anchor="t"/>
           <a:lstStyle/>
           <a:p>
-            <a:pPr indent="0" marL="0">
-              <a:buNone/>
-            </a:pPr>
-            <a:r>
-              <a:rPr lang="en-US" sz="1450" dirty="0">
+            <a:pPr marL="0" indent="0">
+              <a:buNone/>
+            </a:pPr>
+            <a:r>
+              <a:rPr lang="en-US" sz="1650" dirty="0">
                 <a:solidFill>
                   <a:srgbClr val="757575"/>
                 </a:solidFill>
@@ -8507,7 +7962,7 @@
               </a:rPr>
               <a:t>Principal es una interfaz estándar de Java — Spring te la entrega ya rellena como parámetro del controller, sin que tengas que pedirla ni construirla tú mismo.</a:t>
             </a:r>
-            <a:endParaRPr lang="en-US" sz="1450" dirty="0"/>
+            <a:endParaRPr lang="en-US" sz="1650" dirty="0"/>
           </a:p>
         </p:txBody>
       </p:sp>
@@ -8560,6 +8015,13 @@
             <a:prstDash val="solid"/>
           </a:ln>
         </p:spPr>
+        <p:txBody>
+          <a:bodyPr/>
+          <a:lstStyle/>
+          <a:p>
+            <a:endParaRPr lang="es-ES"/>
+          </a:p>
+        </p:txBody>
       </p:sp>
       <p:sp>
         <p:nvSpPr>
@@ -8582,7 +8044,7 @@
           <a:bodyPr wrap="square" rtlCol="0" anchor="ctr"/>
           <a:lstStyle/>
           <a:p>
-            <a:pPr indent="0" marL="0">
+            <a:pPr marL="0" indent="0">
               <a:buNone/>
             </a:pPr>
             <a:r>
@@ -8621,7 +8083,7 @@
           <a:bodyPr wrap="square" rtlCol="0" anchor="ctr"/>
           <a:lstStyle/>
           <a:p>
-            <a:pPr algn="r" indent="0" marL="0">
+            <a:pPr marL="0" indent="0" algn="r">
               <a:buNone/>
             </a:pPr>
             <a:r>
@@ -8639,41 +8101,40 @@
           </a:p>
         </p:txBody>
       </p:sp>
-      <p:sp>
-        <p:nvSpPr>
-          <p:cNvPr id="5" name="Shape 3"/>
-          <p:cNvSpPr/>
-          <p:nvPr/>
-        </p:nvSpPr>
-        <p:spPr>
-          <a:xfrm>
-            <a:off x="548640" y="1554480"/>
-            <a:ext cx="2464308" cy="1188720"/>
-          </a:xfrm>
-          <a:prstGeom prst="roundRect">
-            <a:avLst/>
-          </a:prstGeom>
-          <a:solidFill>
-            <a:srgbClr val="FBEAEA"/>
-          </a:solidFill>
-          <a:ln w="15875">
-            <a:solidFill>
-              <a:srgbClr val="C62828"/>
-            </a:solidFill>
-            <a:prstDash val="solid"/>
-          </a:ln>
-        </p:spPr>
-      </p:sp>
-      <p:sp>
-        <p:nvSpPr>
-          <p:cNvPr id="6" name="Text 4"/>
-          <p:cNvSpPr/>
-          <p:nvPr/>
-        </p:nvSpPr>
-        <p:spPr>
-          <a:xfrm>
-            <a:off x="594360" y="1600200"/>
-            <a:ext cx="2372868" cy="1097280"/>
+      <p:pic>
+        <p:nvPicPr>
+          <p:cNvPr id="5" name="Image 0" descr="C:/Users/Aitor/docxgen/img/principalJwt.png"/>
+          <p:cNvPicPr>
+            <a:picLocks noChangeAspect="1"/>
+          </p:cNvPicPr>
+          <p:nvPr/>
+        </p:nvPicPr>
+        <p:blipFill>
+          <a:blip r:embed="rId3"/>
+          <a:stretch>
+            <a:fillRect/>
+          </a:stretch>
+        </p:blipFill>
+        <p:spPr>
+          <a:xfrm>
+            <a:off x="1751910" y="960120"/>
+            <a:ext cx="7730511" cy="4471416"/>
+          </a:xfrm>
+          <a:prstGeom prst="rect">
+            <a:avLst/>
+          </a:prstGeom>
+        </p:spPr>
+      </p:pic>
+      <p:sp>
+        <p:nvSpPr>
+          <p:cNvPr id="6" name="Text 3"/>
+          <p:cNvSpPr/>
+          <p:nvPr/>
+        </p:nvSpPr>
+        <p:spPr>
+          <a:xfrm>
+            <a:off x="548640" y="5614416"/>
+            <a:ext cx="11091672" cy="1005840"/>
           </a:xfrm>
           <a:prstGeom prst="rect">
             <a:avLst/>
@@ -8682,440 +8143,24 @@
           <a:ln/>
         </p:spPr>
         <p:txBody>
-          <a:bodyPr wrap="square" rtlCol="0" anchor="ctr"/>
-          <a:lstStyle/>
-          <a:p>
-            <a:pPr algn="ctr" indent="0" marL="0">
+          <a:bodyPr wrap="square" rtlCol="0" anchor="t"/>
+          <a:lstStyle/>
+          <a:p>
+            <a:pPr marL="0" indent="0">
               <a:buNone/>
             </a:pPr>
             <a:r>
               <a:rPr lang="en-US" sz="1450" dirty="0">
                 <a:solidFill>
-                  <a:srgbClr val="212121"/>
+                  <a:srgbClr val="757575"/>
                 </a:solidFill>
                 <a:latin typeface="Arial" pitchFamily="34" charset="0"/>
                 <a:ea typeface="Arial" pitchFamily="34" charset="-122"/>
                 <a:cs typeface="Arial" pitchFamily="34" charset="-120"/>
               </a:rPr>
-              <a:t>Petición</a:t>
+              <a:t>Por debajo es el mismo Authentication que el filtro JWT que ya construiste en PSP (Actividad 2.4) guarda al validar el token — Principal es, simplemente, esa misma identidad. principal.getName() da directamente el username, el mismo que ya usas en tu /me de PSP.</a:t>
             </a:r>
             <a:endParaRPr lang="en-US" sz="1450" dirty="0"/>
-          </a:p>
-          <a:p>
-            <a:pPr algn="ctr" indent="0" marL="0">
-              <a:buNone/>
-            </a:pPr>
-            <a:r>
-              <a:rPr lang="en-US" sz="1450" dirty="0">
-                <a:solidFill>
-                  <a:srgbClr val="212121"/>
-                </a:solidFill>
-                <a:latin typeface="Arial" pitchFamily="34" charset="0"/>
-                <a:ea typeface="Arial" pitchFamily="34" charset="-122"/>
-                <a:cs typeface="Arial" pitchFamily="34" charset="-120"/>
-              </a:rPr>
-              <a:t>con el token</a:t>
-            </a:r>
-            <a:endParaRPr lang="en-US" sz="1450" dirty="0"/>
-          </a:p>
-        </p:txBody>
-      </p:sp>
-      <p:sp>
-        <p:nvSpPr>
-          <p:cNvPr id="7" name="Text 5"/>
-          <p:cNvSpPr/>
-          <p:nvPr/>
-        </p:nvSpPr>
-        <p:spPr>
-          <a:xfrm>
-            <a:off x="2967228" y="1554480"/>
-            <a:ext cx="502920" cy="1188720"/>
-          </a:xfrm>
-          <a:prstGeom prst="rect">
-            <a:avLst/>
-          </a:prstGeom>
-          <a:noFill/>
-          <a:ln/>
-        </p:spPr>
-        <p:txBody>
-          <a:bodyPr wrap="square" rtlCol="0" anchor="ctr"/>
-          <a:lstStyle/>
-          <a:p>
-            <a:pPr algn="ctr" indent="0" marL="0">
-              <a:buNone/>
-            </a:pPr>
-            <a:r>
-              <a:rPr lang="en-US" sz="2200" b="1" dirty="0">
-                <a:solidFill>
-                  <a:srgbClr val="C62828"/>
-                </a:solidFill>
-                <a:latin typeface="Arial" pitchFamily="34" charset="0"/>
-                <a:ea typeface="Arial" pitchFamily="34" charset="-122"/>
-                <a:cs typeface="Arial" pitchFamily="34" charset="-120"/>
-              </a:rPr>
-              <a:t>→</a:t>
-            </a:r>
-            <a:endParaRPr lang="en-US" sz="2200" dirty="0"/>
-          </a:p>
-        </p:txBody>
-      </p:sp>
-      <p:sp>
-        <p:nvSpPr>
-          <p:cNvPr id="8" name="Shape 6"/>
-          <p:cNvSpPr/>
-          <p:nvPr/>
-        </p:nvSpPr>
-        <p:spPr>
-          <a:xfrm>
-            <a:off x="3424428" y="1554480"/>
-            <a:ext cx="2464308" cy="1188720"/>
-          </a:xfrm>
-          <a:prstGeom prst="roundRect">
-            <a:avLst/>
-          </a:prstGeom>
-          <a:solidFill>
-            <a:srgbClr val="FBEAEA"/>
-          </a:solidFill>
-          <a:ln w="15875">
-            <a:solidFill>
-              <a:srgbClr val="C62828"/>
-            </a:solidFill>
-            <a:prstDash val="solid"/>
-          </a:ln>
-        </p:spPr>
-      </p:sp>
-      <p:sp>
-        <p:nvSpPr>
-          <p:cNvPr id="9" name="Text 7"/>
-          <p:cNvSpPr/>
-          <p:nvPr/>
-        </p:nvSpPr>
-        <p:spPr>
-          <a:xfrm>
-            <a:off x="3470148" y="1600200"/>
-            <a:ext cx="2372868" cy="1097280"/>
-          </a:xfrm>
-          <a:prstGeom prst="rect">
-            <a:avLst/>
-          </a:prstGeom>
-          <a:noFill/>
-          <a:ln/>
-        </p:spPr>
-        <p:txBody>
-          <a:bodyPr wrap="square" rtlCol="0" anchor="ctr"/>
-          <a:lstStyle/>
-          <a:p>
-            <a:pPr algn="ctr" indent="0" marL="0">
-              <a:buNone/>
-            </a:pPr>
-            <a:r>
-              <a:rPr lang="en-US" sz="1450" dirty="0">
-                <a:solidFill>
-                  <a:srgbClr val="212121"/>
-                </a:solidFill>
-                <a:latin typeface="Arial" pitchFamily="34" charset="0"/>
-                <a:ea typeface="Arial" pitchFamily="34" charset="-122"/>
-                <a:cs typeface="Arial" pitchFamily="34" charset="-120"/>
-              </a:rPr>
-              <a:t>Filtro JWT</a:t>
-            </a:r>
-            <a:endParaRPr lang="en-US" sz="1450" dirty="0"/>
-          </a:p>
-          <a:p>
-            <a:pPr algn="ctr" indent="0" marL="0">
-              <a:buNone/>
-            </a:pPr>
-            <a:r>
-              <a:rPr lang="en-US" sz="1450" dirty="0">
-                <a:solidFill>
-                  <a:srgbClr val="212121"/>
-                </a:solidFill>
-                <a:latin typeface="Arial" pitchFamily="34" charset="0"/>
-                <a:ea typeface="Arial" pitchFamily="34" charset="-122"/>
-                <a:cs typeface="Arial" pitchFamily="34" charset="-120"/>
-              </a:rPr>
-              <a:t>valida el token</a:t>
-            </a:r>
-            <a:endParaRPr lang="en-US" sz="1450" dirty="0"/>
-          </a:p>
-        </p:txBody>
-      </p:sp>
-      <p:sp>
-        <p:nvSpPr>
-          <p:cNvPr id="10" name="Text 8"/>
-          <p:cNvSpPr/>
-          <p:nvPr/>
-        </p:nvSpPr>
-        <p:spPr>
-          <a:xfrm>
-            <a:off x="5843016" y="1554480"/>
-            <a:ext cx="502920" cy="1188720"/>
-          </a:xfrm>
-          <a:prstGeom prst="rect">
-            <a:avLst/>
-          </a:prstGeom>
-          <a:noFill/>
-          <a:ln/>
-        </p:spPr>
-        <p:txBody>
-          <a:bodyPr wrap="square" rtlCol="0" anchor="ctr"/>
-          <a:lstStyle/>
-          <a:p>
-            <a:pPr algn="ctr" indent="0" marL="0">
-              <a:buNone/>
-            </a:pPr>
-            <a:r>
-              <a:rPr lang="en-US" sz="2200" b="1" dirty="0">
-                <a:solidFill>
-                  <a:srgbClr val="C62828"/>
-                </a:solidFill>
-                <a:latin typeface="Arial" pitchFamily="34" charset="0"/>
-                <a:ea typeface="Arial" pitchFamily="34" charset="-122"/>
-                <a:cs typeface="Arial" pitchFamily="34" charset="-120"/>
-              </a:rPr>
-              <a:t>→</a:t>
-            </a:r>
-            <a:endParaRPr lang="en-US" sz="2200" dirty="0"/>
-          </a:p>
-        </p:txBody>
-      </p:sp>
-      <p:sp>
-        <p:nvSpPr>
-          <p:cNvPr id="11" name="Shape 9"/>
-          <p:cNvSpPr/>
-          <p:nvPr/>
-        </p:nvSpPr>
-        <p:spPr>
-          <a:xfrm>
-            <a:off x="6300216" y="1554480"/>
-            <a:ext cx="2464308" cy="1188720"/>
-          </a:xfrm>
-          <a:prstGeom prst="roundRect">
-            <a:avLst/>
-          </a:prstGeom>
-          <a:solidFill>
-            <a:srgbClr val="FBEAEA"/>
-          </a:solidFill>
-          <a:ln w="15875">
-            <a:solidFill>
-              <a:srgbClr val="C62828"/>
-            </a:solidFill>
-            <a:prstDash val="solid"/>
-          </a:ln>
-        </p:spPr>
-      </p:sp>
-      <p:sp>
-        <p:nvSpPr>
-          <p:cNvPr id="12" name="Text 10"/>
-          <p:cNvSpPr/>
-          <p:nvPr/>
-        </p:nvSpPr>
-        <p:spPr>
-          <a:xfrm>
-            <a:off x="6345936" y="1600200"/>
-            <a:ext cx="2372868" cy="1097280"/>
-          </a:xfrm>
-          <a:prstGeom prst="rect">
-            <a:avLst/>
-          </a:prstGeom>
-          <a:noFill/>
-          <a:ln/>
-        </p:spPr>
-        <p:txBody>
-          <a:bodyPr wrap="square" rtlCol="0" anchor="ctr"/>
-          <a:lstStyle/>
-          <a:p>
-            <a:pPr algn="ctr" indent="0" marL="0">
-              <a:buNone/>
-            </a:pPr>
-            <a:r>
-              <a:rPr lang="en-US" sz="1450" dirty="0">
-                <a:solidFill>
-                  <a:srgbClr val="212121"/>
-                </a:solidFill>
-                <a:latin typeface="Arial" pitchFamily="34" charset="0"/>
-                <a:ea typeface="Arial" pitchFamily="34" charset="-122"/>
-                <a:cs typeface="Arial" pitchFamily="34" charset="-120"/>
-              </a:rPr>
-              <a:t>SecurityContextHolder</a:t>
-            </a:r>
-            <a:endParaRPr lang="en-US" sz="1450" dirty="0"/>
-          </a:p>
-          <a:p>
-            <a:pPr algn="ctr" indent="0" marL="0">
-              <a:buNone/>
-            </a:pPr>
-            <a:r>
-              <a:rPr lang="en-US" sz="1450" dirty="0">
-                <a:solidFill>
-                  <a:srgbClr val="212121"/>
-                </a:solidFill>
-                <a:latin typeface="Arial" pitchFamily="34" charset="0"/>
-                <a:ea typeface="Arial" pitchFamily="34" charset="-122"/>
-                <a:cs typeface="Arial" pitchFamily="34" charset="-120"/>
-              </a:rPr>
-              <a:t>guarda la identidad</a:t>
-            </a:r>
-            <a:endParaRPr lang="en-US" sz="1450" dirty="0"/>
-          </a:p>
-        </p:txBody>
-      </p:sp>
-      <p:sp>
-        <p:nvSpPr>
-          <p:cNvPr id="13" name="Text 11"/>
-          <p:cNvSpPr/>
-          <p:nvPr/>
-        </p:nvSpPr>
-        <p:spPr>
-          <a:xfrm>
-            <a:off x="8718804" y="1554480"/>
-            <a:ext cx="502920" cy="1188720"/>
-          </a:xfrm>
-          <a:prstGeom prst="rect">
-            <a:avLst/>
-          </a:prstGeom>
-          <a:noFill/>
-          <a:ln/>
-        </p:spPr>
-        <p:txBody>
-          <a:bodyPr wrap="square" rtlCol="0" anchor="ctr"/>
-          <a:lstStyle/>
-          <a:p>
-            <a:pPr algn="ctr" indent="0" marL="0">
-              <a:buNone/>
-            </a:pPr>
-            <a:r>
-              <a:rPr lang="en-US" sz="2200" b="1" dirty="0">
-                <a:solidFill>
-                  <a:srgbClr val="C62828"/>
-                </a:solidFill>
-                <a:latin typeface="Arial" pitchFamily="34" charset="0"/>
-                <a:ea typeface="Arial" pitchFamily="34" charset="-122"/>
-                <a:cs typeface="Arial" pitchFamily="34" charset="-120"/>
-              </a:rPr>
-              <a:t>→</a:t>
-            </a:r>
-            <a:endParaRPr lang="en-US" sz="2200" dirty="0"/>
-          </a:p>
-        </p:txBody>
-      </p:sp>
-      <p:sp>
-        <p:nvSpPr>
-          <p:cNvPr id="14" name="Shape 12"/>
-          <p:cNvSpPr/>
-          <p:nvPr/>
-        </p:nvSpPr>
-        <p:spPr>
-          <a:xfrm>
-            <a:off x="9176004" y="1554480"/>
-            <a:ext cx="2464308" cy="1188720"/>
-          </a:xfrm>
-          <a:prstGeom prst="roundRect">
-            <a:avLst/>
-          </a:prstGeom>
-          <a:solidFill>
-            <a:srgbClr val="FBEAEA"/>
-          </a:solidFill>
-          <a:ln w="15875">
-            <a:solidFill>
-              <a:srgbClr val="C62828"/>
-            </a:solidFill>
-            <a:prstDash val="solid"/>
-          </a:ln>
-        </p:spPr>
-      </p:sp>
-      <p:sp>
-        <p:nvSpPr>
-          <p:cNvPr id="15" name="Text 13"/>
-          <p:cNvSpPr/>
-          <p:nvPr/>
-        </p:nvSpPr>
-        <p:spPr>
-          <a:xfrm>
-            <a:off x="9221724" y="1600200"/>
-            <a:ext cx="2372868" cy="1097280"/>
-          </a:xfrm>
-          <a:prstGeom prst="rect">
-            <a:avLst/>
-          </a:prstGeom>
-          <a:noFill/>
-          <a:ln/>
-        </p:spPr>
-        <p:txBody>
-          <a:bodyPr wrap="square" rtlCol="0" anchor="ctr"/>
-          <a:lstStyle/>
-          <a:p>
-            <a:pPr algn="ctr" indent="0" marL="0">
-              <a:buNone/>
-            </a:pPr>
-            <a:r>
-              <a:rPr lang="en-US" sz="1450" dirty="0">
-                <a:solidFill>
-                  <a:srgbClr val="212121"/>
-                </a:solidFill>
-                <a:latin typeface="Arial" pitchFamily="34" charset="0"/>
-                <a:ea typeface="Arial" pitchFamily="34" charset="-122"/>
-                <a:cs typeface="Arial" pitchFamily="34" charset="-120"/>
-              </a:rPr>
-              <a:t>Controller pide</a:t>
-            </a:r>
-            <a:endParaRPr lang="en-US" sz="1450" dirty="0"/>
-          </a:p>
-          <a:p>
-            <a:pPr algn="ctr" indent="0" marL="0">
-              <a:buNone/>
-            </a:pPr>
-            <a:r>
-              <a:rPr lang="en-US" sz="1450" dirty="0">
-                <a:solidFill>
-                  <a:srgbClr val="212121"/>
-                </a:solidFill>
-                <a:latin typeface="Arial" pitchFamily="34" charset="0"/>
-                <a:ea typeface="Arial" pitchFamily="34" charset="-122"/>
-                <a:cs typeface="Arial" pitchFamily="34" charset="-120"/>
-              </a:rPr>
-              <a:t>un Principal</a:t>
-            </a:r>
-            <a:endParaRPr lang="en-US" sz="1450" dirty="0"/>
-          </a:p>
-        </p:txBody>
-      </p:sp>
-      <p:sp>
-        <p:nvSpPr>
-          <p:cNvPr id="16" name="Text 14"/>
-          <p:cNvSpPr/>
-          <p:nvPr/>
-        </p:nvSpPr>
-        <p:spPr>
-          <a:xfrm>
-            <a:off x="548640" y="3154680"/>
-            <a:ext cx="11091672" cy="1280160"/>
-          </a:xfrm>
-          <a:prstGeom prst="rect">
-            <a:avLst/>
-          </a:prstGeom>
-          <a:noFill/>
-          <a:ln/>
-        </p:spPr>
-        <p:txBody>
-          <a:bodyPr wrap="square" rtlCol="0" anchor="t"/>
-          <a:lstStyle/>
-          <a:p>
-            <a:pPr indent="0" marL="0">
-              <a:buNone/>
-            </a:pPr>
-            <a:r>
-              <a:rPr lang="en-US" sz="1650" dirty="0">
-                <a:solidFill>
-                  <a:srgbClr val="757575"/>
-                </a:solidFill>
-                <a:latin typeface="Arial" pitchFamily="34" charset="0"/>
-                <a:ea typeface="Arial" pitchFamily="34" charset="-122"/>
-                <a:cs typeface="Arial" pitchFamily="34" charset="-120"/>
-              </a:rPr>
-              <a:t>Por debajo es el mismo Authentication que el filtro JWT que ya construiste en PSP (Actividad 2.4) guarda al validar el token — Principal es, simplemente, esa misma identidad. principal.getName() te da directamente el username, el mismo que ya usas en tu /me de PSP.</a:t>
-            </a:r>
-            <a:endParaRPr lang="en-US" sz="1650" dirty="0"/>
           </a:p>
         </p:txBody>
       </p:sp>
@@ -9168,6 +8213,13 @@
             <a:prstDash val="solid"/>
           </a:ln>
         </p:spPr>
+        <p:txBody>
+          <a:bodyPr/>
+          <a:lstStyle/>
+          <a:p>
+            <a:endParaRPr lang="es-ES"/>
+          </a:p>
+        </p:txBody>
       </p:sp>
       <p:sp>
         <p:nvSpPr>
@@ -9190,7 +8242,7 @@
           <a:bodyPr wrap="square" rtlCol="0" anchor="ctr"/>
           <a:lstStyle/>
           <a:p>
-            <a:pPr indent="0" marL="0">
+            <a:pPr marL="0" indent="0">
               <a:buNone/>
             </a:pPr>
             <a:r>
@@ -9229,7 +8281,7 @@
           <a:bodyPr wrap="square" rtlCol="0" anchor="ctr"/>
           <a:lstStyle/>
           <a:p>
-            <a:pPr algn="r" indent="0" marL="0">
+            <a:pPr marL="0" indent="0" algn="r">
               <a:buNone/>
             </a:pPr>
             <a:r>
@@ -9255,8 +8307,8 @@
         </p:nvSpPr>
         <p:spPr>
           <a:xfrm>
-            <a:off x="548640" y="1234440"/>
-            <a:ext cx="11091672" cy="2286000"/>
+            <a:off x="548640" y="1783080"/>
+            <a:ext cx="11091672" cy="2651760"/>
           </a:xfrm>
           <a:prstGeom prst="rect">
             <a:avLst/>
@@ -9271,6 +8323,13 @@
             <a:prstDash val="solid"/>
           </a:ln>
         </p:spPr>
+        <p:txBody>
+          <a:bodyPr/>
+          <a:lstStyle/>
+          <a:p>
+            <a:endParaRPr lang="es-ES"/>
+          </a:p>
+        </p:txBody>
       </p:sp>
       <p:sp>
         <p:nvSpPr>
@@ -9280,8 +8339,8 @@
         </p:nvSpPr>
         <p:spPr>
           <a:xfrm>
-            <a:off x="548640" y="1234440"/>
-            <a:ext cx="73152" cy="2286000"/>
+            <a:off x="548640" y="1783080"/>
+            <a:ext cx="73152" cy="2651760"/>
           </a:xfrm>
           <a:prstGeom prst="rect">
             <a:avLst/>
@@ -9296,6 +8355,13 @@
             <a:prstDash val="solid"/>
           </a:ln>
         </p:spPr>
+        <p:txBody>
+          <a:bodyPr/>
+          <a:lstStyle/>
+          <a:p>
+            <a:endParaRPr lang="es-ES"/>
+          </a:p>
+        </p:txBody>
       </p:sp>
       <p:sp>
         <p:nvSpPr>
@@ -9305,8 +8371,8 @@
         </p:nvSpPr>
         <p:spPr>
           <a:xfrm>
-            <a:off x="822960" y="1344168"/>
-            <a:ext cx="10588752" cy="2066544"/>
+            <a:off x="822960" y="1892808"/>
+            <a:ext cx="10588752" cy="2432304"/>
           </a:xfrm>
           <a:prstGeom prst="rect">
             <a:avLst/>
@@ -9318,11 +8384,11 @@
           <a:bodyPr wrap="square" rtlCol="0" anchor="t"/>
           <a:lstStyle/>
           <a:p>
-            <a:pPr indent="0" marL="0">
-              <a:buNone/>
-            </a:pPr>
-            <a:r>
-              <a:rPr lang="en-US" sz="1450" dirty="0">
+            <a:pPr marL="0" indent="0">
+              <a:buNone/>
+            </a:pPr>
+            <a:r>
+              <a:rPr lang="en-US" sz="1700" dirty="0">
                 <a:solidFill>
                   <a:srgbClr val="263238"/>
                 </a:solidFill>
@@ -9332,14 +8398,14 @@
               </a:rPr>
               <a:t>public NotaLecturaResumenDTO getResumenByLibroId(Long libroId) {</a:t>
             </a:r>
-            <a:endParaRPr lang="en-US" sz="1450" dirty="0"/>
-          </a:p>
-          <a:p>
-            <a:pPr indent="0" marL="0">
-              <a:buNone/>
-            </a:pPr>
-            <a:r>
-              <a:rPr lang="en-US" sz="1450" dirty="0">
+            <a:endParaRPr lang="en-US" sz="1700" dirty="0"/>
+          </a:p>
+          <a:p>
+            <a:pPr marL="0" indent="0">
+              <a:buNone/>
+            </a:pPr>
+            <a:r>
+              <a:rPr lang="en-US" sz="1700" dirty="0">
                 <a:solidFill>
                   <a:srgbClr val="263238"/>
                 </a:solidFill>
@@ -9347,16 +8413,16 @@
                 <a:ea typeface="Courier New" pitchFamily="34" charset="-122"/>
                 <a:cs typeface="Courier New" pitchFamily="34" charset="-120"/>
               </a:rPr>
-              <a:t>    List&lt;NotaLectura&gt; notasLectura = notaLecturaRepository.findByLibroId(libroId);</a:t>
-            </a:r>
-            <a:endParaRPr lang="en-US" sz="1450" dirty="0"/>
-          </a:p>
-          <a:p>
-            <a:pPr indent="0" marL="0">
-              <a:buNone/>
-            </a:pPr>
-            <a:r>
-              <a:rPr lang="en-US" sz="1450" dirty="0">
+              <a:t>    List&lt;NotaLectura&gt; notasLectura =</a:t>
+            </a:r>
+            <a:endParaRPr lang="en-US" sz="1700" dirty="0"/>
+          </a:p>
+          <a:p>
+            <a:pPr marL="0" indent="0">
+              <a:buNone/>
+            </a:pPr>
+            <a:r>
+              <a:rPr lang="en-US" sz="1700" dirty="0">
                 <a:solidFill>
                   <a:srgbClr val="263238"/>
                 </a:solidFill>
@@ -9364,16 +8430,16 @@
                 <a:ea typeface="Courier New" pitchFamily="34" charset="-122"/>
                 <a:cs typeface="Courier New" pitchFamily="34" charset="-120"/>
               </a:rPr>
-              <a:t>    long totalNotas = notasLectura.size();</a:t>
-            </a:r>
-            <a:endParaRPr lang="en-US" sz="1450" dirty="0"/>
-          </a:p>
-          <a:p>
-            <a:pPr indent="0" marL="0">
-              <a:buNone/>
-            </a:pPr>
-            <a:r>
-              <a:rPr lang="en-US" sz="1450" dirty="0">
+              <a:t>            notaLecturaRepository.findByLibroId(libroId);</a:t>
+            </a:r>
+            <a:endParaRPr lang="en-US" sz="1700" dirty="0"/>
+          </a:p>
+          <a:p>
+            <a:pPr marL="0" indent="0">
+              <a:buNone/>
+            </a:pPr>
+            <a:r>
+              <a:rPr lang="en-US" sz="1700" dirty="0">
                 <a:solidFill>
                   <a:srgbClr val="263238"/>
                 </a:solidFill>
@@ -9381,16 +8447,16 @@
                 <a:ea typeface="Courier New" pitchFamily="34" charset="-122"/>
                 <a:cs typeface="Courier New" pitchFamily="34" charset="-120"/>
               </a:rPr>
-              <a:t>    double puntuacionMedia = notasLectura.stream()</a:t>
-            </a:r>
-            <a:endParaRPr lang="en-US" sz="1450" dirty="0"/>
-          </a:p>
-          <a:p>
-            <a:pPr indent="0" marL="0">
-              <a:buNone/>
-            </a:pPr>
-            <a:r>
-              <a:rPr lang="en-US" sz="1450" dirty="0">
+              <a:t>    long totalNotas = notasLectura.size();</a:t>
+            </a:r>
+            <a:endParaRPr lang="en-US" sz="1700" dirty="0"/>
+          </a:p>
+          <a:p>
+            <a:pPr marL="0" indent="0">
+              <a:buNone/>
+            </a:pPr>
+            <a:r>
+              <a:rPr lang="en-US" sz="1700" dirty="0">
                 <a:solidFill>
                   <a:srgbClr val="263238"/>
                 </a:solidFill>
@@ -9398,16 +8464,16 @@
                 <a:ea typeface="Courier New" pitchFamily="34" charset="-122"/>
                 <a:cs typeface="Courier New" pitchFamily="34" charset="-120"/>
               </a:rPr>
-              <a:t>            .mapToInt(NotaLectura::getPuntuacion).average().orElse(0.0);</a:t>
-            </a:r>
-            <a:endParaRPr lang="en-US" sz="1450" dirty="0"/>
-          </a:p>
-          <a:p>
-            <a:pPr indent="0" marL="0">
-              <a:buNone/>
-            </a:pPr>
-            <a:r>
-              <a:rPr lang="en-US" sz="1450" dirty="0">
+              <a:t>    double puntuacionMedia = notasLectura.stream()</a:t>
+            </a:r>
+            <a:endParaRPr lang="en-US" sz="1700" dirty="0"/>
+          </a:p>
+          <a:p>
+            <a:pPr marL="0" indent="0">
+              <a:buNone/>
+            </a:pPr>
+            <a:r>
+              <a:rPr lang="en-US" sz="1700" dirty="0">
                 <a:solidFill>
                   <a:srgbClr val="263238"/>
                 </a:solidFill>
@@ -9415,16 +8481,16 @@
                 <a:ea typeface="Courier New" pitchFamily="34" charset="-122"/>
                 <a:cs typeface="Courier New" pitchFamily="34" charset="-120"/>
               </a:rPr>
-              <a:t>    return new NotaLecturaResumenDTO(libroId, totalNotas, puntuacionMedia);</a:t>
-            </a:r>
-            <a:endParaRPr lang="en-US" sz="1450" dirty="0"/>
-          </a:p>
-          <a:p>
-            <a:pPr indent="0" marL="0">
-              <a:buNone/>
-            </a:pPr>
-            <a:r>
-              <a:rPr lang="en-US" sz="1450" dirty="0">
+              <a:t>            .mapToInt(NotaLectura::getPuntuacion).average().orElse(0.0);</a:t>
+            </a:r>
+            <a:endParaRPr lang="en-US" sz="1700" dirty="0"/>
+          </a:p>
+          <a:p>
+            <a:pPr marL="0" indent="0">
+              <a:buNone/>
+            </a:pPr>
+            <a:r>
+              <a:rPr lang="en-US" sz="1700" dirty="0">
                 <a:solidFill>
                   <a:srgbClr val="263238"/>
                 </a:solidFill>
@@ -9432,9 +8498,26 @@
                 <a:ea typeface="Courier New" pitchFamily="34" charset="-122"/>
                 <a:cs typeface="Courier New" pitchFamily="34" charset="-120"/>
               </a:rPr>
+              <a:t>    return new NotaLecturaResumenDTO(libroId, totalNotas, puntuacionMedia);</a:t>
+            </a:r>
+            <a:endParaRPr lang="en-US" sz="1700" dirty="0"/>
+          </a:p>
+          <a:p>
+            <a:pPr marL="0" indent="0">
+              <a:buNone/>
+            </a:pPr>
+            <a:r>
+              <a:rPr lang="en-US" sz="1700" dirty="0">
+                <a:solidFill>
+                  <a:srgbClr val="263238"/>
+                </a:solidFill>
+                <a:latin typeface="Courier New" pitchFamily="34" charset="0"/>
+                <a:ea typeface="Courier New" pitchFamily="34" charset="-122"/>
+                <a:cs typeface="Courier New" pitchFamily="34" charset="-120"/>
+              </a:rPr>
               <a:t>}</a:t>
             </a:r>
-            <a:endParaRPr lang="en-US" sz="1450" dirty="0"/>
+            <a:endParaRPr lang="en-US" sz="1700" dirty="0"/>
           </a:p>
         </p:txBody>
       </p:sp>
@@ -9446,8 +8529,8 @@
         </p:nvSpPr>
         <p:spPr>
           <a:xfrm>
-            <a:off x="548640" y="3794760"/>
-            <a:ext cx="11091672" cy="822960"/>
+            <a:off x="548640" y="4754880"/>
+            <a:ext cx="11091672" cy="914400"/>
           </a:xfrm>
           <a:prstGeom prst="rect">
             <a:avLst/>
@@ -9459,11 +8542,11 @@
           <a:bodyPr wrap="square" rtlCol="0" anchor="t"/>
           <a:lstStyle/>
           <a:p>
-            <a:pPr indent="0" marL="0">
-              <a:buNone/>
-            </a:pPr>
-            <a:r>
-              <a:rPr lang="en-US" sz="1450" dirty="0">
+            <a:pPr marL="0" indent="0">
+              <a:buNone/>
+            </a:pPr>
+            <a:r>
+              <a:rPr lang="en-US" sz="1700" dirty="0">
                 <a:solidFill>
                   <a:srgbClr val="757575"/>
                 </a:solidFill>
@@ -9473,7 +8556,7 @@
               </a:rPr>
               <a:t>Calcula el total y la media en memoria, con streams de Java, tras traer todos los documentos de Mongo — no usa el framework de agregación nativo de Mongo ($group, $avg). Es una simplificación deliberada.</a:t>
             </a:r>
-            <a:endParaRPr lang="en-US" sz="1450" dirty="0"/>
+            <a:endParaRPr lang="en-US" sz="1700" dirty="0"/>
           </a:p>
         </p:txBody>
       </p:sp>
@@ -9526,6 +8609,13 @@
             <a:prstDash val="solid"/>
           </a:ln>
         </p:spPr>
+        <p:txBody>
+          <a:bodyPr/>
+          <a:lstStyle/>
+          <a:p>
+            <a:endParaRPr lang="es-ES"/>
+          </a:p>
+        </p:txBody>
       </p:sp>
       <p:sp>
         <p:nvSpPr>
@@ -9548,7 +8638,7 @@
           <a:bodyPr wrap="square" rtlCol="0" anchor="ctr"/>
           <a:lstStyle/>
           <a:p>
-            <a:pPr indent="0" marL="0">
+            <a:pPr marL="0" indent="0">
               <a:buNone/>
             </a:pPr>
             <a:r>
@@ -9587,7 +8677,7 @@
           <a:bodyPr wrap="square" rtlCol="0" anchor="ctr"/>
           <a:lstStyle/>
           <a:p>
-            <a:pPr algn="r" indent="0" marL="0">
+            <a:pPr marL="0" indent="0" algn="r">
               <a:buNone/>
             </a:pPr>
             <a:r>
@@ -9620,29 +8710,47 @@
           </p:nvPr>
         </p:nvGraphicFramePr>
         <p:xfrm>
-          <a:off x="548640" y="1188720"/>
-          <a:ext cx="11091672" cy="914400"/>
+          <a:off x="548640" y="1325880"/>
+          <a:ext cx="11091672" cy="3429000"/>
         </p:xfrm>
         <a:graphic>
           <a:graphicData uri="http://schemas.openxmlformats.org/drawingml/2006/table">
             <a:tbl>
               <a:tblPr/>
               <a:tblGrid>
-                <a:gridCol w="3105668"/>
-                <a:gridCol w="4214835"/>
-                <a:gridCol w="3771168"/>
+                <a:gridCol w="2883835">
+                  <a:extLst>
+                    <a:ext uri="{9D8B030D-6E8A-4147-A177-3AD203B41FA5}">
+                      <a16:colId xmlns:a16="http://schemas.microsoft.com/office/drawing/2014/main" val="20000"/>
+                    </a:ext>
+                  </a:extLst>
+                </a:gridCol>
+                <a:gridCol w="4436669">
+                  <a:extLst>
+                    <a:ext uri="{9D8B030D-6E8A-4147-A177-3AD203B41FA5}">
+                      <a16:colId xmlns:a16="http://schemas.microsoft.com/office/drawing/2014/main" val="20001"/>
+                    </a:ext>
+                  </a:extLst>
+                </a:gridCol>
+                <a:gridCol w="3771168">
+                  <a:extLst>
+                    <a:ext uri="{9D8B030D-6E8A-4147-A177-3AD203B41FA5}">
+                      <a16:colId xmlns:a16="http://schemas.microsoft.com/office/drawing/2014/main" val="20002"/>
+                    </a:ext>
+                  </a:extLst>
+                </a:gridCol>
               </a:tblGrid>
-              <a:tr h="1005840">
+              <a:tr h="1143000">
                 <a:tc>
                   <a:txBody>
                     <a:bodyPr/>
                     <a:lstStyle/>
                     <a:p>
-                      <a:pPr algn="ctr" indent="0" marL="0">
+                      <a:pPr marL="0" indent="0" algn="ctr">
                         <a:buNone/>
                       </a:pPr>
                       <a:r>
-                        <a:rPr lang="en-US" sz="1700" b="1" dirty="0">
+                        <a:rPr lang="en-US" sz="1850" b="1" dirty="0">
                           <a:solidFill>
                             <a:srgbClr val="FFFFFF"/>
                           </a:solidFill>
@@ -9652,14 +8760,14 @@
                         </a:rPr>
                         <a:t>Enfoque</a:t>
                       </a:r>
-                      <a:endParaRPr lang="en-US" sz="1700" dirty="0">
+                      <a:endParaRPr lang="en-US" sz="1850" dirty="0">
                         <a:latin typeface="Arial" charset="0"/>
                         <a:ea typeface="Arial" charset="0"/>
                         <a:cs typeface="Arial" charset="0"/>
                       </a:endParaRPr>
                     </a:p>
                   </a:txBody>
-                  <a:tcPr marL="91440" marR="91440" marT="45720" marB="45720" anchor="ctr">
+                  <a:tcPr anchor="ctr">
                     <a:lnL w="12700" cap="flat" cmpd="sng" algn="ctr">
                       <a:solidFill>
                         <a:srgbClr val="EEEEEE"/>
@@ -9706,11 +8814,11 @@
                     <a:bodyPr/>
                     <a:lstStyle/>
                     <a:p>
-                      <a:pPr algn="ctr" indent="0" marL="0">
+                      <a:pPr marL="0" indent="0" algn="ctr">
                         <a:buNone/>
                       </a:pPr>
                       <a:r>
-                        <a:rPr lang="en-US" sz="1700" b="1" dirty="0">
+                        <a:rPr lang="en-US" sz="1850" b="1" dirty="0">
                           <a:solidFill>
                             <a:srgbClr val="FFFFFF"/>
                           </a:solidFill>
@@ -9720,14 +8828,14 @@
                         </a:rPr>
                         <a:t>Cómo funciona</a:t>
                       </a:r>
-                      <a:endParaRPr lang="en-US" sz="1700" dirty="0">
+                      <a:endParaRPr lang="en-US" sz="1850" dirty="0">
                         <a:latin typeface="Arial" charset="0"/>
                         <a:ea typeface="Arial" charset="0"/>
                         <a:cs typeface="Arial" charset="0"/>
                       </a:endParaRPr>
                     </a:p>
                   </a:txBody>
-                  <a:tcPr marL="91440" marR="91440" marT="45720" marB="45720" anchor="ctr">
+                  <a:tcPr anchor="ctr">
                     <a:lnL w="12700" cap="flat" cmpd="sng" algn="ctr">
                       <a:solidFill>
                         <a:srgbClr val="EEEEEE"/>
@@ -9774,11 +8882,11 @@
                     <a:bodyPr/>
                     <a:lstStyle/>
                     <a:p>
-                      <a:pPr algn="ctr" indent="0" marL="0">
+                      <a:pPr marL="0" indent="0" algn="ctr">
                         <a:buNone/>
                       </a:pPr>
                       <a:r>
-                        <a:rPr lang="en-US" sz="1700" b="1" dirty="0">
+                        <a:rPr lang="en-US" sz="1850" b="1" dirty="0">
                           <a:solidFill>
                             <a:srgbClr val="FFFFFF"/>
                           </a:solidFill>
@@ -9788,14 +8896,14 @@
                         </a:rPr>
                         <a:t>Cuándo conviene</a:t>
                       </a:r>
-                      <a:endParaRPr lang="en-US" sz="1700" dirty="0">
+                      <a:endParaRPr lang="en-US" sz="1850" dirty="0">
                         <a:latin typeface="Arial" charset="0"/>
                         <a:ea typeface="Arial" charset="0"/>
                         <a:cs typeface="Arial" charset="0"/>
                       </a:endParaRPr>
                     </a:p>
                   </a:txBody>
-                  <a:tcPr marL="91440" marR="91440" marT="45720" marB="45720" anchor="ctr">
+                  <a:tcPr anchor="ctr">
                     <a:lnL w="12700" cap="flat" cmpd="sng" algn="ctr">
                       <a:solidFill>
                         <a:srgbClr val="EEEEEE"/>
@@ -9837,18 +8945,23 @@
                     </a:solidFill>
                   </a:tcPr>
                 </a:tc>
+                <a:extLst>
+                  <a:ext uri="{0D108BD9-81ED-4DB2-BD59-A6C34878D82A}">
+                    <a16:rowId xmlns:a16="http://schemas.microsoft.com/office/drawing/2014/main" val="10000"/>
+                  </a:ext>
+                </a:extLst>
               </a:tr>
-              <a:tr h="1005840">
+              <a:tr h="1143000">
                 <a:tc>
                   <a:txBody>
                     <a:bodyPr/>
                     <a:lstStyle/>
                     <a:p>
-                      <a:pPr indent="0" marL="0">
+                      <a:pPr marL="0" indent="0">
                         <a:buNone/>
                       </a:pPr>
                       <a:r>
-                        <a:rPr lang="en-US" sz="1450" b="1" dirty="0">
+                        <a:rPr lang="en-US" sz="1600" b="1" dirty="0">
                           <a:solidFill>
                             <a:srgbClr val="212121"/>
                           </a:solidFill>
@@ -9858,14 +8971,14 @@
                         </a:rPr>
                         <a:t>En memoria (streams de Java)</a:t>
                       </a:r>
-                      <a:endParaRPr lang="en-US" sz="1450" dirty="0">
+                      <a:endParaRPr lang="en-US" sz="1600" dirty="0">
                         <a:latin typeface="Arial" charset="0"/>
                         <a:ea typeface="Arial" charset="0"/>
                         <a:cs typeface="Arial" charset="0"/>
                       </a:endParaRPr>
                     </a:p>
                   </a:txBody>
-                  <a:tcPr marL="91440" marR="91440" marT="45720" marB="45720" anchor="ctr">
+                  <a:tcPr anchor="ctr">
                     <a:lnL w="12700" cap="flat" cmpd="sng" algn="ctr">
                       <a:solidFill>
                         <a:srgbClr val="EEEEEE"/>
@@ -9912,11 +9025,11 @@
                     <a:bodyPr/>
                     <a:lstStyle/>
                     <a:p>
-                      <a:pPr indent="0" marL="0">
+                      <a:pPr marL="0" indent="0">
                         <a:buNone/>
                       </a:pPr>
                       <a:r>
-                        <a:rPr lang="en-US" sz="1450" dirty="0">
+                        <a:rPr lang="en-US" sz="1600" dirty="0">
                           <a:solidFill>
                             <a:srgbClr val="212121"/>
                           </a:solidFill>
@@ -9926,14 +9039,14 @@
                         </a:rPr>
                         <a:t>Trae todos los documentos a la aplicación y calcula con .stream()</a:t>
                       </a:r>
-                      <a:endParaRPr lang="en-US" sz="1450" dirty="0">
+                      <a:endParaRPr lang="en-US" sz="1600" dirty="0">
                         <a:latin typeface="Arial" charset="0"/>
                         <a:ea typeface="Arial" charset="0"/>
                         <a:cs typeface="Arial" charset="0"/>
                       </a:endParaRPr>
                     </a:p>
                   </a:txBody>
-                  <a:tcPr marL="91440" marR="91440" marT="45720" marB="45720" anchor="ctr">
+                  <a:tcPr anchor="ctr">
                     <a:lnL w="12700" cap="flat" cmpd="sng" algn="ctr">
                       <a:solidFill>
                         <a:srgbClr val="EEEEEE"/>
@@ -9980,11 +9093,11 @@
                     <a:bodyPr/>
                     <a:lstStyle/>
                     <a:p>
-                      <a:pPr indent="0" marL="0">
+                      <a:pPr marL="0" indent="0">
                         <a:buNone/>
                       </a:pPr>
                       <a:r>
-                        <a:rPr lang="en-US" sz="1450" dirty="0">
+                        <a:rPr lang="en-US" sz="1600" dirty="0">
                           <a:solidFill>
                             <a:srgbClr val="212121"/>
                           </a:solidFill>
@@ -9994,14 +9107,14 @@
                         </a:rPr>
                         <a:t>Pocos documentos por libro — simple de escribir y entender</a:t>
                       </a:r>
-                      <a:endParaRPr lang="en-US" sz="1450" dirty="0">
+                      <a:endParaRPr lang="en-US" sz="1600" dirty="0">
                         <a:latin typeface="Arial" charset="0"/>
                         <a:ea typeface="Arial" charset="0"/>
                         <a:cs typeface="Arial" charset="0"/>
                       </a:endParaRPr>
                     </a:p>
                   </a:txBody>
-                  <a:tcPr marL="91440" marR="91440" marT="45720" marB="45720" anchor="ctr">
+                  <a:tcPr anchor="ctr">
                     <a:lnL w="12700" cap="flat" cmpd="sng" algn="ctr">
                       <a:solidFill>
                         <a:srgbClr val="EEEEEE"/>
@@ -10043,18 +9156,23 @@
                     </a:solidFill>
                   </a:tcPr>
                 </a:tc>
+                <a:extLst>
+                  <a:ext uri="{0D108BD9-81ED-4DB2-BD59-A6C34878D82A}">
+                    <a16:rowId xmlns:a16="http://schemas.microsoft.com/office/drawing/2014/main" val="10001"/>
+                  </a:ext>
+                </a:extLst>
               </a:tr>
-              <a:tr h="1005840">
+              <a:tr h="1143000">
                 <a:tc>
                   <a:txBody>
                     <a:bodyPr/>
                     <a:lstStyle/>
                     <a:p>
-                      <a:pPr indent="0" marL="0">
+                      <a:pPr marL="0" indent="0">
                         <a:buNone/>
                       </a:pPr>
                       <a:r>
-                        <a:rPr lang="en-US" sz="1450" b="1" dirty="0">
+                        <a:rPr lang="en-US" sz="1600" b="1" dirty="0">
                           <a:solidFill>
                             <a:srgbClr val="212121"/>
                           </a:solidFill>
@@ -10064,14 +9182,14 @@
                         </a:rPr>
                         <a:t>Agregación de Mongo ($group, $avg)</a:t>
                       </a:r>
-                      <a:endParaRPr lang="en-US" sz="1450" dirty="0">
+                      <a:endParaRPr lang="en-US" sz="1600" dirty="0">
                         <a:latin typeface="Arial" charset="0"/>
                         <a:ea typeface="Arial" charset="0"/>
                         <a:cs typeface="Arial" charset="0"/>
                       </a:endParaRPr>
                     </a:p>
                   </a:txBody>
-                  <a:tcPr marL="91440" marR="91440" marT="45720" marB="45720" anchor="ctr">
+                  <a:tcPr anchor="ctr">
                     <a:lnL w="12700" cap="flat" cmpd="sng" algn="ctr">
                       <a:solidFill>
                         <a:srgbClr val="EEEEEE"/>
@@ -10118,11 +9236,11 @@
                     <a:bodyPr/>
                     <a:lstStyle/>
                     <a:p>
-                      <a:pPr indent="0" marL="0">
+                      <a:pPr marL="0" indent="0">
                         <a:buNone/>
                       </a:pPr>
                       <a:r>
-                        <a:rPr lang="en-US" sz="1450" dirty="0">
+                        <a:rPr lang="en-US" sz="1600" dirty="0">
                           <a:solidFill>
                             <a:srgbClr val="212121"/>
                           </a:solidFill>
@@ -10132,14 +9250,14 @@
                         </a:rPr>
                         <a:t>El cálculo lo hace el propio motor, sin traer todos los documentos</a:t>
                       </a:r>
-                      <a:endParaRPr lang="en-US" sz="1450" dirty="0">
+                      <a:endParaRPr lang="en-US" sz="1600" dirty="0">
                         <a:latin typeface="Arial" charset="0"/>
                         <a:ea typeface="Arial" charset="0"/>
                         <a:cs typeface="Arial" charset="0"/>
                       </a:endParaRPr>
                     </a:p>
                   </a:txBody>
-                  <a:tcPr marL="91440" marR="91440" marT="45720" marB="45720" anchor="ctr">
+                  <a:tcPr anchor="ctr">
                     <a:lnL w="12700" cap="flat" cmpd="sng" algn="ctr">
                       <a:solidFill>
                         <a:srgbClr val="EEEEEE"/>
@@ -10186,11 +9304,11 @@
                     <a:bodyPr/>
                     <a:lstStyle/>
                     <a:p>
-                      <a:pPr indent="0" marL="0">
+                      <a:pPr marL="0" indent="0">
                         <a:buNone/>
                       </a:pPr>
                       <a:r>
-                        <a:rPr lang="en-US" sz="1450" dirty="0">
+                        <a:rPr lang="en-US" sz="1600" dirty="0">
                           <a:solidFill>
                             <a:srgbClr val="212121"/>
                           </a:solidFill>
@@ -10200,14 +9318,14 @@
                         </a:rPr>
                         <a:t>Muchos documentos — más eficiente, consulta más compleja</a:t>
                       </a:r>
-                      <a:endParaRPr lang="en-US" sz="1450" dirty="0">
+                      <a:endParaRPr lang="en-US" sz="1600" dirty="0">
                         <a:latin typeface="Arial" charset="0"/>
                         <a:ea typeface="Arial" charset="0"/>
                         <a:cs typeface="Arial" charset="0"/>
                       </a:endParaRPr>
                     </a:p>
                   </a:txBody>
-                  <a:tcPr marL="91440" marR="91440" marT="45720" marB="45720" anchor="ctr">
+                  <a:tcPr anchor="ctr">
                     <a:lnL w="12700" cap="flat" cmpd="sng" algn="ctr">
                       <a:solidFill>
                         <a:srgbClr val="EEEEEE"/>
@@ -10249,6 +9367,11 @@
                     </a:solidFill>
                   </a:tcPr>
                 </a:tc>
+                <a:extLst>
+                  <a:ext uri="{0D108BD9-81ED-4DB2-BD59-A6C34878D82A}">
+                    <a16:rowId xmlns:a16="http://schemas.microsoft.com/office/drawing/2014/main" val="10002"/>
+                  </a:ext>
+                </a:extLst>
               </a:tr>
             </a:tbl>
           </a:graphicData>
@@ -10262,7 +9385,7 @@
         </p:nvSpPr>
         <p:spPr>
           <a:xfrm>
-            <a:off x="548640" y="4526280"/>
+            <a:off x="548640" y="5074920"/>
             <a:ext cx="11091672" cy="548640"/>
           </a:xfrm>
           <a:prstGeom prst="rect">
@@ -10275,11 +9398,11 @@
           <a:bodyPr wrap="square" rtlCol="0" anchor="t"/>
           <a:lstStyle/>
           <a:p>
-            <a:pPr indent="0" marL="0">
-              <a:buNone/>
-            </a:pPr>
-            <a:r>
-              <a:rPr lang="en-US" sz="1550" dirty="0">
+            <a:pPr marL="0" indent="0">
+              <a:buNone/>
+            </a:pPr>
+            <a:r>
+              <a:rPr lang="en-US" sz="1700" dirty="0">
                 <a:solidFill>
                   <a:srgbClr val="757575"/>
                 </a:solidFill>
@@ -10289,7 +9412,7 @@
               </a:rPr>
               <a:t>Para este curso, con pocas notas de lectura por libro, la primera opción es más que suficiente.</a:t>
             </a:r>
-            <a:endParaRPr lang="en-US" sz="1550" dirty="0"/>
+            <a:endParaRPr lang="en-US" sz="1700" dirty="0"/>
           </a:p>
         </p:txBody>
       </p:sp>
@@ -10342,6 +9465,13 @@
             <a:prstDash val="solid"/>
           </a:ln>
         </p:spPr>
+        <p:txBody>
+          <a:bodyPr/>
+          <a:lstStyle/>
+          <a:p>
+            <a:endParaRPr lang="es-ES"/>
+          </a:p>
+        </p:txBody>
       </p:sp>
       <p:sp>
         <p:nvSpPr>
@@ -10364,7 +9494,7 @@
           <a:bodyPr wrap="square" rtlCol="0" anchor="ctr"/>
           <a:lstStyle/>
           <a:p>
-            <a:pPr indent="0" marL="0">
+            <a:pPr marL="0" indent="0">
               <a:buNone/>
             </a:pPr>
             <a:r>
@@ -10403,7 +9533,7 @@
           <a:bodyPr wrap="square" rtlCol="0" anchor="ctr"/>
           <a:lstStyle/>
           <a:p>
-            <a:pPr algn="r" indent="0" marL="0">
+            <a:pPr marL="0" indent="0" algn="r">
               <a:buNone/>
             </a:pPr>
             <a:r>
@@ -10429,8 +9559,8 @@
         </p:nvSpPr>
         <p:spPr>
           <a:xfrm>
-            <a:off x="548640" y="1371600"/>
-            <a:ext cx="11091672" cy="3291840"/>
+            <a:off x="548640" y="1920240"/>
+            <a:ext cx="11091672" cy="3840480"/>
           </a:xfrm>
           <a:prstGeom prst="rect">
             <a:avLst/>
@@ -10444,13 +9574,13 @@
           <a:p>
             <a:pPr marL="190500" indent="-190500">
               <a:spcAft>
-                <a:spcPts val="1600"/>
+                <a:spcPts val="3400"/>
               </a:spcAft>
               <a:buSzPct val="100000"/>
               <a:buChar char="•"/>
             </a:pPr>
             <a:r>
-              <a:rPr lang="en-US" sz="1800" dirty="0">
+              <a:rPr lang="en-US" sz="2200" dirty="0">
                 <a:solidFill>
                   <a:srgbClr val="212121"/>
                 </a:solidFill>
@@ -10460,18 +9590,18 @@
               </a:rPr>
               <a:t>NoSQL agrupa distintos modelos no relacionales; las documentales (MongoDB) son una de varias familias, junto a clave-valor, columnares y de grafos.</a:t>
             </a:r>
-            <a:endParaRPr lang="en-US" sz="1800" dirty="0"/>
+            <a:endParaRPr lang="en-US" sz="2200" dirty="0"/>
           </a:p>
           <a:p>
             <a:pPr marL="190500" indent="-190500">
               <a:spcAft>
-                <a:spcPts val="1600"/>
+                <a:spcPts val="3400"/>
               </a:spcAft>
               <a:buSzPct val="100000"/>
               <a:buChar char="•"/>
             </a:pPr>
             <a:r>
-              <a:rPr lang="en-US" sz="1800" dirty="0">
+              <a:rPr lang="en-US" sz="2200" dirty="0">
                 <a:solidFill>
                   <a:srgbClr val="212121"/>
                 </a:solidFill>
@@ -10481,7 +9611,7 @@
               </a:rPr>
               <a:t>Un documento es un objeto autocontenido; una colección los agrupa con esquema flexible por defecto. Sin JOIN SQL, aunque existe $lookup.</a:t>
             </a:r>
-            <a:endParaRPr lang="en-US" sz="1800" dirty="0"/>
+            <a:endParaRPr lang="en-US" sz="2200" dirty="0"/>
           </a:p>
           <a:p>
             <a:pPr marL="190500" indent="-190500">
@@ -10489,7 +9619,7 @@
               <a:buChar char="•"/>
             </a:pPr>
             <a:r>
-              <a:rPr lang="en-US" sz="1800" dirty="0">
+              <a:rPr lang="en-US" sz="2200" dirty="0">
                 <a:solidFill>
                   <a:srgbClr val="212121"/>
                 </a:solidFill>
@@ -10499,7 +9629,7 @@
               </a:rPr>
               <a:t>MongoDB almacena en BSON; todo documento tiene un _id, normalmente un ObjectId que Spring Data puede mapear a String.</a:t>
             </a:r>
-            <a:endParaRPr lang="en-US" sz="1800" dirty="0"/>
+            <a:endParaRPr lang="en-US" sz="2200" dirty="0"/>
           </a:p>
         </p:txBody>
       </p:sp>
@@ -10552,6 +9682,13 @@
             <a:prstDash val="solid"/>
           </a:ln>
         </p:spPr>
+        <p:txBody>
+          <a:bodyPr/>
+          <a:lstStyle/>
+          <a:p>
+            <a:endParaRPr lang="es-ES"/>
+          </a:p>
+        </p:txBody>
       </p:sp>
       <p:sp>
         <p:nvSpPr>
@@ -10574,7 +9711,7 @@
           <a:bodyPr wrap="square" rtlCol="0" anchor="ctr"/>
           <a:lstStyle/>
           <a:p>
-            <a:pPr indent="0" marL="0">
+            <a:pPr marL="0" indent="0">
               <a:buNone/>
             </a:pPr>
             <a:r>
@@ -10613,7 +9750,7 @@
           <a:bodyPr wrap="square" rtlCol="0" anchor="ctr"/>
           <a:lstStyle/>
           <a:p>
-            <a:pPr algn="r" indent="0" marL="0">
+            <a:pPr marL="0" indent="0" algn="r">
               <a:buNone/>
             </a:pPr>
             <a:r>
@@ -10639,8 +9776,8 @@
         </p:nvSpPr>
         <p:spPr>
           <a:xfrm>
-            <a:off x="548640" y="1371600"/>
-            <a:ext cx="11091672" cy="3291840"/>
+            <a:off x="548640" y="1920240"/>
+            <a:ext cx="11091672" cy="3840480"/>
           </a:xfrm>
           <a:prstGeom prst="rect">
             <a:avLst/>
@@ -10654,13 +9791,13 @@
           <a:p>
             <a:pPr marL="190500" indent="-190500">
               <a:spcAft>
-                <a:spcPts val="1600"/>
+                <a:spcPts val="3400"/>
               </a:spcAft>
               <a:buSzPct val="100000"/>
               <a:buChar char="•"/>
             </a:pPr>
             <a:r>
-              <a:rPr lang="en-US" sz="1800" dirty="0">
+              <a:rPr lang="en-US" sz="2200" dirty="0">
                 <a:solidFill>
                   <a:srgbClr val="212121"/>
                 </a:solidFill>
@@ -10670,18 +9807,18 @@
               </a:rPr>
               <a:t>libroId en NotaLectura es una relación lógica, no una clave foránea real — no hay integridad referencial automática entre dos motores distintos.</a:t>
             </a:r>
-            <a:endParaRPr lang="en-US" sz="1800" dirty="0"/>
+            <a:endParaRPr lang="en-US" sz="2200" dirty="0"/>
           </a:p>
           <a:p>
             <a:pPr marL="190500" indent="-190500">
               <a:spcAft>
-                <a:spcPts val="1600"/>
+                <a:spcPts val="3400"/>
               </a:spcAft>
               <a:buSzPct val="100000"/>
               <a:buChar char="•"/>
             </a:pPr>
             <a:r>
-              <a:rPr lang="en-US" sz="1800" dirty="0">
+              <a:rPr lang="en-US" sz="2200" dirty="0">
                 <a:solidFill>
                   <a:srgbClr val="212121"/>
                 </a:solidFill>
@@ -10691,7 +9828,7 @@
               </a:rPr>
               <a:t>El patrón de integridad referencial manual: el código comprueba en PostgreSQL antes de tocar Mongo, porque el motor no puede hacerlo por sí solo.</a:t>
             </a:r>
-            <a:endParaRPr lang="en-US" sz="1800" dirty="0"/>
+            <a:endParaRPr lang="en-US" sz="2200" dirty="0"/>
           </a:p>
           <a:p>
             <a:pPr marL="190500" indent="-190500">
@@ -10699,7 +9836,7 @@
               <a:buChar char="•"/>
             </a:pPr>
             <a:r>
-              <a:rPr lang="en-US" sz="1800" dirty="0">
+              <a:rPr lang="en-US" sz="2200" dirty="0">
                 <a:solidFill>
                   <a:srgbClr val="212121"/>
                 </a:solidFill>
@@ -10709,7 +9846,7 @@
               </a:rPr>
               <a:t>La propiedad real de conexión es spring.mongodb.uri (no spring.data.mongodb.uri).</a:t>
             </a:r>
-            <a:endParaRPr lang="en-US" sz="1800" dirty="0"/>
+            <a:endParaRPr lang="en-US" sz="2200" dirty="0"/>
           </a:p>
         </p:txBody>
       </p:sp>
@@ -10762,6 +9899,13 @@
             <a:prstDash val="solid"/>
           </a:ln>
         </p:spPr>
+        <p:txBody>
+          <a:bodyPr/>
+          <a:lstStyle/>
+          <a:p>
+            <a:endParaRPr lang="es-ES"/>
+          </a:p>
+        </p:txBody>
       </p:sp>
       <p:sp>
         <p:nvSpPr>
@@ -10784,7 +9928,7 @@
           <a:bodyPr wrap="square" rtlCol="0" anchor="ctr"/>
           <a:lstStyle/>
           <a:p>
-            <a:pPr indent="0" marL="0">
+            <a:pPr marL="0" indent="0">
               <a:buNone/>
             </a:pPr>
             <a:r>
@@ -10823,7 +9967,7 @@
           <a:bodyPr wrap="square" rtlCol="0" anchor="ctr"/>
           <a:lstStyle/>
           <a:p>
-            <a:pPr algn="r" indent="0" marL="0">
+            <a:pPr marL="0" indent="0" algn="r">
               <a:buNone/>
             </a:pPr>
             <a:r>
@@ -10849,8 +9993,8 @@
         </p:nvSpPr>
         <p:spPr>
           <a:xfrm>
-            <a:off x="548640" y="1097280"/>
-            <a:ext cx="11091672" cy="914400"/>
+            <a:off x="548640" y="1737360"/>
+            <a:ext cx="11091672" cy="1005840"/>
           </a:xfrm>
           <a:prstGeom prst="rect">
             <a:avLst/>
@@ -10862,11 +10006,11 @@
           <a:bodyPr wrap="square" rtlCol="0" anchor="t"/>
           <a:lstStyle/>
           <a:p>
-            <a:pPr indent="0" marL="0">
-              <a:buNone/>
-            </a:pPr>
-            <a:r>
-              <a:rPr lang="en-US" sz="1750" dirty="0">
+            <a:pPr marL="0" indent="0">
+              <a:buNone/>
+            </a:pPr>
+            <a:r>
+              <a:rPr lang="en-US" sz="1900" dirty="0">
                 <a:solidFill>
                   <a:srgbClr val="212121"/>
                 </a:solidFill>
@@ -10876,7 +10020,7 @@
               </a:rPr>
               <a:t>NoSQL agrupa distintas familias de bases de datos que no siguen como modelo principal el relacional tradicional de tablas relacionadas mediante claves y JOIN. No es un único tipo de motor, sino varias categorías, pensada cada una para problemas distintos:</a:t>
             </a:r>
-            <a:endParaRPr lang="en-US" sz="1750" dirty="0"/>
+            <a:endParaRPr lang="en-US" sz="1900" dirty="0"/>
           </a:p>
         </p:txBody>
       </p:sp>
@@ -10888,8 +10032,8 @@
         </p:nvSpPr>
         <p:spPr>
           <a:xfrm>
-            <a:off x="4345457" y="2286000"/>
-            <a:ext cx="3498037" cy="640080"/>
+            <a:off x="4345457" y="3108960"/>
+            <a:ext cx="3498037" cy="1005840"/>
           </a:xfrm>
           <a:prstGeom prst="roundRect">
             <a:avLst/>
@@ -10904,6 +10048,13 @@
             <a:prstDash val="solid"/>
           </a:ln>
         </p:spPr>
+        <p:txBody>
+          <a:bodyPr/>
+          <a:lstStyle/>
+          <a:p>
+            <a:endParaRPr lang="es-ES"/>
+          </a:p>
+        </p:txBody>
       </p:sp>
       <p:sp>
         <p:nvSpPr>
@@ -10913,8 +10064,8 @@
         </p:nvSpPr>
         <p:spPr>
           <a:xfrm>
-            <a:off x="4345457" y="2286000"/>
-            <a:ext cx="3498037" cy="640080"/>
+            <a:off x="4345457" y="3108960"/>
+            <a:ext cx="3498037" cy="1005840"/>
           </a:xfrm>
           <a:prstGeom prst="rect">
             <a:avLst/>
@@ -10926,11 +10077,11 @@
           <a:bodyPr wrap="square" rtlCol="0" anchor="ctr"/>
           <a:lstStyle/>
           <a:p>
-            <a:pPr algn="ctr" indent="0" marL="0">
-              <a:buNone/>
-            </a:pPr>
-            <a:r>
-              <a:rPr lang="en-US" sz="1600" b="1" dirty="0">
+            <a:pPr marL="0" indent="0" algn="ctr">
+              <a:buNone/>
+            </a:pPr>
+            <a:r>
+              <a:rPr lang="en-US" sz="1900" b="1" dirty="0">
                 <a:solidFill>
                   <a:srgbClr val="212121"/>
                 </a:solidFill>
@@ -10940,7 +10091,7 @@
               </a:rPr>
               <a:t>NoSQL</a:t>
             </a:r>
-            <a:endParaRPr lang="en-US" sz="1600" dirty="0"/>
+            <a:endParaRPr lang="en-US" sz="1900" dirty="0"/>
           </a:p>
         </p:txBody>
       </p:sp>
@@ -10952,7 +10103,7 @@
         </p:nvSpPr>
         <p:spPr>
           <a:xfrm>
-            <a:off x="6094476" y="2926080"/>
+            <a:off x="6094476" y="4114800"/>
             <a:ext cx="914" cy="182880"/>
           </a:xfrm>
           <a:prstGeom prst="line">
@@ -10966,6 +10117,13 @@
             <a:prstDash val="solid"/>
           </a:ln>
         </p:spPr>
+        <p:txBody>
+          <a:bodyPr/>
+          <a:lstStyle/>
+          <a:p>
+            <a:endParaRPr lang="es-ES"/>
+          </a:p>
+        </p:txBody>
       </p:sp>
       <p:sp>
         <p:nvSpPr>
@@ -10975,8 +10133,8 @@
         </p:nvSpPr>
         <p:spPr>
           <a:xfrm>
-            <a:off x="548640" y="3291840"/>
-            <a:ext cx="2498598" cy="868680"/>
+            <a:off x="548640" y="4480560"/>
+            <a:ext cx="2498598" cy="1280160"/>
           </a:xfrm>
           <a:prstGeom prst="roundRect">
             <a:avLst/>
@@ -10991,6 +10149,13 @@
             <a:prstDash val="solid"/>
           </a:ln>
         </p:spPr>
+        <p:txBody>
+          <a:bodyPr/>
+          <a:lstStyle/>
+          <a:p>
+            <a:endParaRPr lang="es-ES"/>
+          </a:p>
+        </p:txBody>
       </p:sp>
       <p:sp>
         <p:nvSpPr>
@@ -11000,8 +10165,8 @@
         </p:nvSpPr>
         <p:spPr>
           <a:xfrm>
-            <a:off x="594360" y="3291840"/>
-            <a:ext cx="2407158" cy="868680"/>
+            <a:off x="594360" y="4480560"/>
+            <a:ext cx="2407158" cy="1280160"/>
           </a:xfrm>
           <a:prstGeom prst="rect">
             <a:avLst/>
@@ -11013,11 +10178,11 @@
           <a:bodyPr wrap="square" rtlCol="0" anchor="ctr"/>
           <a:lstStyle/>
           <a:p>
-            <a:pPr algn="ctr" indent="0" marL="0">
-              <a:buNone/>
-            </a:pPr>
-            <a:r>
-              <a:rPr lang="en-US" sz="1500" dirty="0">
+            <a:pPr marL="0" indent="0" algn="ctr">
+              <a:buNone/>
+            </a:pPr>
+            <a:r>
+              <a:rPr lang="en-US" sz="1800" dirty="0">
                 <a:solidFill>
                   <a:srgbClr val="212121"/>
                 </a:solidFill>
@@ -11027,14 +10192,14 @@
               </a:rPr>
               <a:t>📄 Documentales</a:t>
             </a:r>
-            <a:endParaRPr lang="en-US" sz="1500" dirty="0"/>
-          </a:p>
-          <a:p>
-            <a:pPr algn="ctr" indent="0" marL="0">
-              <a:buNone/>
-            </a:pPr>
-            <a:r>
-              <a:rPr lang="en-US" sz="1500" dirty="0">
+            <a:endParaRPr lang="en-US" sz="1800" dirty="0"/>
+          </a:p>
+          <a:p>
+            <a:pPr marL="0" indent="0" algn="ctr">
+              <a:buNone/>
+            </a:pPr>
+            <a:r>
+              <a:rPr lang="en-US" sz="1800" dirty="0">
                 <a:solidFill>
                   <a:srgbClr val="212121"/>
                 </a:solidFill>
@@ -11044,7 +10209,7 @@
               </a:rPr>
               <a:t>(MongoDB)</a:t>
             </a:r>
-            <a:endParaRPr lang="en-US" sz="1500" dirty="0"/>
+            <a:endParaRPr lang="en-US" sz="1800" dirty="0"/>
           </a:p>
         </p:txBody>
       </p:sp>
@@ -11056,7 +10221,7 @@
         </p:nvSpPr>
         <p:spPr>
           <a:xfrm>
-            <a:off x="1797939" y="3108960"/>
+            <a:off x="1797939" y="4297680"/>
             <a:ext cx="914" cy="182880"/>
           </a:xfrm>
           <a:prstGeom prst="line">
@@ -11070,6 +10235,13 @@
             <a:prstDash val="solid"/>
           </a:ln>
         </p:spPr>
+        <p:txBody>
+          <a:bodyPr/>
+          <a:lstStyle/>
+          <a:p>
+            <a:endParaRPr lang="es-ES"/>
+          </a:p>
+        </p:txBody>
       </p:sp>
       <p:sp>
         <p:nvSpPr>
@@ -11079,8 +10251,8 @@
         </p:nvSpPr>
         <p:spPr>
           <a:xfrm>
-            <a:off x="3412998" y="3291840"/>
-            <a:ext cx="2498598" cy="868680"/>
+            <a:off x="3412998" y="4480560"/>
+            <a:ext cx="2498598" cy="1280160"/>
           </a:xfrm>
           <a:prstGeom prst="roundRect">
             <a:avLst/>
@@ -11095,6 +10267,13 @@
             <a:prstDash val="solid"/>
           </a:ln>
         </p:spPr>
+        <p:txBody>
+          <a:bodyPr/>
+          <a:lstStyle/>
+          <a:p>
+            <a:endParaRPr lang="es-ES"/>
+          </a:p>
+        </p:txBody>
       </p:sp>
       <p:sp>
         <p:nvSpPr>
@@ -11104,8 +10283,8 @@
         </p:nvSpPr>
         <p:spPr>
           <a:xfrm>
-            <a:off x="3458718" y="3291840"/>
-            <a:ext cx="2407158" cy="868680"/>
+            <a:off x="3458718" y="4480560"/>
+            <a:ext cx="2407158" cy="1280160"/>
           </a:xfrm>
           <a:prstGeom prst="rect">
             <a:avLst/>
@@ -11117,11 +10296,11 @@
           <a:bodyPr wrap="square" rtlCol="0" anchor="ctr"/>
           <a:lstStyle/>
           <a:p>
-            <a:pPr algn="ctr" indent="0" marL="0">
-              <a:buNone/>
-            </a:pPr>
-            <a:r>
-              <a:rPr lang="en-US" sz="1500" dirty="0">
+            <a:pPr marL="0" indent="0" algn="ctr">
+              <a:buNone/>
+            </a:pPr>
+            <a:r>
+              <a:rPr lang="en-US" sz="1800" dirty="0">
                 <a:solidFill>
                   <a:srgbClr val="212121"/>
                 </a:solidFill>
@@ -11131,14 +10310,14 @@
               </a:rPr>
               <a:t>🔑 Clave-valor</a:t>
             </a:r>
-            <a:endParaRPr lang="en-US" sz="1500" dirty="0"/>
-          </a:p>
-          <a:p>
-            <a:pPr algn="ctr" indent="0" marL="0">
-              <a:buNone/>
-            </a:pPr>
-            <a:r>
-              <a:rPr lang="en-US" sz="1500" dirty="0">
+            <a:endParaRPr lang="en-US" sz="1800" dirty="0"/>
+          </a:p>
+          <a:p>
+            <a:pPr marL="0" indent="0" algn="ctr">
+              <a:buNone/>
+            </a:pPr>
+            <a:r>
+              <a:rPr lang="en-US" sz="1800" dirty="0">
                 <a:solidFill>
                   <a:srgbClr val="212121"/>
                 </a:solidFill>
@@ -11148,7 +10327,7 @@
               </a:rPr>
               <a:t>(Redis)</a:t>
             </a:r>
-            <a:endParaRPr lang="en-US" sz="1500" dirty="0"/>
+            <a:endParaRPr lang="en-US" sz="1800" dirty="0"/>
           </a:p>
         </p:txBody>
       </p:sp>
@@ -11160,7 +10339,7 @@
         </p:nvSpPr>
         <p:spPr>
           <a:xfrm>
-            <a:off x="4662297" y="3108960"/>
+            <a:off x="4662297" y="4297680"/>
             <a:ext cx="914" cy="182880"/>
           </a:xfrm>
           <a:prstGeom prst="line">
@@ -11174,6 +10353,13 @@
             <a:prstDash val="solid"/>
           </a:ln>
         </p:spPr>
+        <p:txBody>
+          <a:bodyPr/>
+          <a:lstStyle/>
+          <a:p>
+            <a:endParaRPr lang="es-ES"/>
+          </a:p>
+        </p:txBody>
       </p:sp>
       <p:sp>
         <p:nvSpPr>
@@ -11183,8 +10369,8 @@
         </p:nvSpPr>
         <p:spPr>
           <a:xfrm>
-            <a:off x="6277356" y="3291840"/>
-            <a:ext cx="2498598" cy="868680"/>
+            <a:off x="6277356" y="4480560"/>
+            <a:ext cx="2498598" cy="1280160"/>
           </a:xfrm>
           <a:prstGeom prst="roundRect">
             <a:avLst/>
@@ -11199,6 +10385,13 @@
             <a:prstDash val="solid"/>
           </a:ln>
         </p:spPr>
+        <p:txBody>
+          <a:bodyPr/>
+          <a:lstStyle/>
+          <a:p>
+            <a:endParaRPr lang="es-ES"/>
+          </a:p>
+        </p:txBody>
       </p:sp>
       <p:sp>
         <p:nvSpPr>
@@ -11208,8 +10401,8 @@
         </p:nvSpPr>
         <p:spPr>
           <a:xfrm>
-            <a:off x="6323076" y="3291840"/>
-            <a:ext cx="2407158" cy="868680"/>
+            <a:off x="6323076" y="4480560"/>
+            <a:ext cx="2407158" cy="1280160"/>
           </a:xfrm>
           <a:prstGeom prst="rect">
             <a:avLst/>
@@ -11221,11 +10414,11 @@
           <a:bodyPr wrap="square" rtlCol="0" anchor="ctr"/>
           <a:lstStyle/>
           <a:p>
-            <a:pPr algn="ctr" indent="0" marL="0">
-              <a:buNone/>
-            </a:pPr>
-            <a:r>
-              <a:rPr lang="en-US" sz="1500" dirty="0">
+            <a:pPr marL="0" indent="0" algn="ctr">
+              <a:buNone/>
+            </a:pPr>
+            <a:r>
+              <a:rPr lang="en-US" sz="1800" dirty="0">
                 <a:solidFill>
                   <a:srgbClr val="212121"/>
                 </a:solidFill>
@@ -11235,14 +10428,14 @@
               </a:rPr>
               <a:t>📊 Columnares</a:t>
             </a:r>
-            <a:endParaRPr lang="en-US" sz="1500" dirty="0"/>
-          </a:p>
-          <a:p>
-            <a:pPr algn="ctr" indent="0" marL="0">
-              <a:buNone/>
-            </a:pPr>
-            <a:r>
-              <a:rPr lang="en-US" sz="1500" dirty="0">
+            <a:endParaRPr lang="en-US" sz="1800" dirty="0"/>
+          </a:p>
+          <a:p>
+            <a:pPr marL="0" indent="0" algn="ctr">
+              <a:buNone/>
+            </a:pPr>
+            <a:r>
+              <a:rPr lang="en-US" sz="1800" dirty="0">
                 <a:solidFill>
                   <a:srgbClr val="212121"/>
                 </a:solidFill>
@@ -11252,7 +10445,7 @@
               </a:rPr>
               <a:t>(Cassandra)</a:t>
             </a:r>
-            <a:endParaRPr lang="en-US" sz="1500" dirty="0"/>
+            <a:endParaRPr lang="en-US" sz="1800" dirty="0"/>
           </a:p>
         </p:txBody>
       </p:sp>
@@ -11264,7 +10457,7 @@
         </p:nvSpPr>
         <p:spPr>
           <a:xfrm>
-            <a:off x="7526655" y="3108960"/>
+            <a:off x="7526655" y="4297680"/>
             <a:ext cx="914" cy="182880"/>
           </a:xfrm>
           <a:prstGeom prst="line">
@@ -11278,6 +10471,13 @@
             <a:prstDash val="solid"/>
           </a:ln>
         </p:spPr>
+        <p:txBody>
+          <a:bodyPr/>
+          <a:lstStyle/>
+          <a:p>
+            <a:endParaRPr lang="es-ES"/>
+          </a:p>
+        </p:txBody>
       </p:sp>
       <p:sp>
         <p:nvSpPr>
@@ -11287,8 +10487,8 @@
         </p:nvSpPr>
         <p:spPr>
           <a:xfrm>
-            <a:off x="9141714" y="3291840"/>
-            <a:ext cx="2498598" cy="868680"/>
+            <a:off x="9141714" y="4480560"/>
+            <a:ext cx="2498598" cy="1280160"/>
           </a:xfrm>
           <a:prstGeom prst="roundRect">
             <a:avLst/>
@@ -11303,6 +10503,13 @@
             <a:prstDash val="solid"/>
           </a:ln>
         </p:spPr>
+        <p:txBody>
+          <a:bodyPr/>
+          <a:lstStyle/>
+          <a:p>
+            <a:endParaRPr lang="es-ES"/>
+          </a:p>
+        </p:txBody>
       </p:sp>
       <p:sp>
         <p:nvSpPr>
@@ -11312,8 +10519,8 @@
         </p:nvSpPr>
         <p:spPr>
           <a:xfrm>
-            <a:off x="9187434" y="3291840"/>
-            <a:ext cx="2407158" cy="868680"/>
+            <a:off x="9187434" y="4480560"/>
+            <a:ext cx="2407158" cy="1280160"/>
           </a:xfrm>
           <a:prstGeom prst="rect">
             <a:avLst/>
@@ -11325,11 +10532,11 @@
           <a:bodyPr wrap="square" rtlCol="0" anchor="ctr"/>
           <a:lstStyle/>
           <a:p>
-            <a:pPr algn="ctr" indent="0" marL="0">
-              <a:buNone/>
-            </a:pPr>
-            <a:r>
-              <a:rPr lang="en-US" sz="1500" dirty="0">
+            <a:pPr marL="0" indent="0" algn="ctr">
+              <a:buNone/>
+            </a:pPr>
+            <a:r>
+              <a:rPr lang="en-US" sz="1800" dirty="0">
                 <a:solidFill>
                   <a:srgbClr val="212121"/>
                 </a:solidFill>
@@ -11339,14 +10546,14 @@
               </a:rPr>
               <a:t>🕸️ De grafos</a:t>
             </a:r>
-            <a:endParaRPr lang="en-US" sz="1500" dirty="0"/>
-          </a:p>
-          <a:p>
-            <a:pPr algn="ctr" indent="0" marL="0">
-              <a:buNone/>
-            </a:pPr>
-            <a:r>
-              <a:rPr lang="en-US" sz="1500" dirty="0">
+            <a:endParaRPr lang="en-US" sz="1800" dirty="0"/>
+          </a:p>
+          <a:p>
+            <a:pPr marL="0" indent="0" algn="ctr">
+              <a:buNone/>
+            </a:pPr>
+            <a:r>
+              <a:rPr lang="en-US" sz="1800" dirty="0">
                 <a:solidFill>
                   <a:srgbClr val="212121"/>
                 </a:solidFill>
@@ -11356,7 +10563,7 @@
               </a:rPr>
               <a:t>(Neo4j)</a:t>
             </a:r>
-            <a:endParaRPr lang="en-US" sz="1500" dirty="0"/>
+            <a:endParaRPr lang="en-US" sz="1800" dirty="0"/>
           </a:p>
         </p:txBody>
       </p:sp>
@@ -11368,7 +10575,7 @@
         </p:nvSpPr>
         <p:spPr>
           <a:xfrm>
-            <a:off x="10391013" y="3108960"/>
+            <a:off x="10391013" y="4297680"/>
             <a:ext cx="914" cy="182880"/>
           </a:xfrm>
           <a:prstGeom prst="line">
@@ -11382,6 +10589,13 @@
             <a:prstDash val="solid"/>
           </a:ln>
         </p:spPr>
+        <p:txBody>
+          <a:bodyPr/>
+          <a:lstStyle/>
+          <a:p>
+            <a:endParaRPr lang="es-ES"/>
+          </a:p>
+        </p:txBody>
       </p:sp>
       <p:sp>
         <p:nvSpPr>
@@ -11391,7 +10605,7 @@
         </p:nvSpPr>
         <p:spPr>
           <a:xfrm>
-            <a:off x="1797939" y="3108960"/>
+            <a:off x="1797939" y="4297680"/>
             <a:ext cx="8593074" cy="914"/>
           </a:xfrm>
           <a:prstGeom prst="line">
@@ -11405,6 +10619,13 @@
             <a:prstDash val="solid"/>
           </a:ln>
         </p:spPr>
+        <p:txBody>
+          <a:bodyPr/>
+          <a:lstStyle/>
+          <a:p>
+            <a:endParaRPr lang="es-ES"/>
+          </a:p>
+        </p:txBody>
       </p:sp>
     </p:spTree>
   </p:cSld>
@@ -11455,6 +10676,13 @@
             <a:prstDash val="solid"/>
           </a:ln>
         </p:spPr>
+        <p:txBody>
+          <a:bodyPr/>
+          <a:lstStyle/>
+          <a:p>
+            <a:endParaRPr lang="es-ES"/>
+          </a:p>
+        </p:txBody>
       </p:sp>
       <p:sp>
         <p:nvSpPr>
@@ -11477,7 +10705,7 @@
           <a:bodyPr wrap="square" rtlCol="0" anchor="ctr"/>
           <a:lstStyle/>
           <a:p>
-            <a:pPr indent="0" marL="0">
+            <a:pPr marL="0" indent="0">
               <a:buNone/>
             </a:pPr>
             <a:r>
@@ -11516,7 +10744,7 @@
           <a:bodyPr wrap="square" rtlCol="0" anchor="ctr"/>
           <a:lstStyle/>
           <a:p>
-            <a:pPr algn="r" indent="0" marL="0">
+            <a:pPr marL="0" indent="0" algn="r">
               <a:buNone/>
             </a:pPr>
             <a:r>
@@ -11550,16 +10778,34 @@
         </p:nvGraphicFramePr>
         <p:xfrm>
           <a:off x="548640" y="1188720"/>
-          <a:ext cx="11091672" cy="914400"/>
+          <a:ext cx="11091672" cy="4800600"/>
         </p:xfrm>
         <a:graphic>
           <a:graphicData uri="http://schemas.openxmlformats.org/drawingml/2006/table">
             <a:tbl>
               <a:tblPr/>
               <a:tblGrid>
-                <a:gridCol w="1996501"/>
-                <a:gridCol w="4658502"/>
-                <a:gridCol w="4436669"/>
+                <a:gridCol w="1996501">
+                  <a:extLst>
+                    <a:ext uri="{9D8B030D-6E8A-4147-A177-3AD203B41FA5}">
+                      <a16:colId xmlns:a16="http://schemas.microsoft.com/office/drawing/2014/main" val="20000"/>
+                    </a:ext>
+                  </a:extLst>
+                </a:gridCol>
+                <a:gridCol w="4658502">
+                  <a:extLst>
+                    <a:ext uri="{9D8B030D-6E8A-4147-A177-3AD203B41FA5}">
+                      <a16:colId xmlns:a16="http://schemas.microsoft.com/office/drawing/2014/main" val="20001"/>
+                    </a:ext>
+                  </a:extLst>
+                </a:gridCol>
+                <a:gridCol w="4436669">
+                  <a:extLst>
+                    <a:ext uri="{9D8B030D-6E8A-4147-A177-3AD203B41FA5}">
+                      <a16:colId xmlns:a16="http://schemas.microsoft.com/office/drawing/2014/main" val="20002"/>
+                    </a:ext>
+                  </a:extLst>
+                </a:gridCol>
               </a:tblGrid>
               <a:tr h="960120">
                 <a:tc>
@@ -11567,7 +10813,7 @@
                     <a:bodyPr/>
                     <a:lstStyle/>
                     <a:p>
-                      <a:pPr algn="ctr" indent="0" marL="0">
+                      <a:pPr marL="0" indent="0" algn="ctr">
                         <a:buNone/>
                       </a:pPr>
                       <a:r>
@@ -11588,7 +10834,7 @@
                       </a:endParaRPr>
                     </a:p>
                   </a:txBody>
-                  <a:tcPr marL="91440" marR="91440" marT="45720" marB="45720" anchor="ctr">
+                  <a:tcPr anchor="ctr">
                     <a:lnL w="12700" cap="flat" cmpd="sng" algn="ctr">
                       <a:solidFill>
                         <a:srgbClr val="EEEEEE"/>
@@ -11635,7 +10881,7 @@
                     <a:bodyPr/>
                     <a:lstStyle/>
                     <a:p>
-                      <a:pPr algn="ctr" indent="0" marL="0">
+                      <a:pPr marL="0" indent="0" algn="ctr">
                         <a:buNone/>
                       </a:pPr>
                       <a:r>
@@ -11656,7 +10902,7 @@
                       </a:endParaRPr>
                     </a:p>
                   </a:txBody>
-                  <a:tcPr marL="91440" marR="91440" marT="45720" marB="45720" anchor="ctr">
+                  <a:tcPr anchor="ctr">
                     <a:lnL w="12700" cap="flat" cmpd="sng" algn="ctr">
                       <a:solidFill>
                         <a:srgbClr val="EEEEEE"/>
@@ -11703,7 +10949,7 @@
                     <a:bodyPr/>
                     <a:lstStyle/>
                     <a:p>
-                      <a:pPr algn="ctr" indent="0" marL="0">
+                      <a:pPr marL="0" indent="0" algn="ctr">
                         <a:buNone/>
                       </a:pPr>
                       <a:r>
@@ -11724,7 +10970,7 @@
                       </a:endParaRPr>
                     </a:p>
                   </a:txBody>
-                  <a:tcPr marL="91440" marR="91440" marT="45720" marB="45720" anchor="ctr">
+                  <a:tcPr anchor="ctr">
                     <a:lnL w="12700" cap="flat" cmpd="sng" algn="ctr">
                       <a:solidFill>
                         <a:srgbClr val="EEEEEE"/>
@@ -11766,6 +11012,11 @@
                     </a:solidFill>
                   </a:tcPr>
                 </a:tc>
+                <a:extLst>
+                  <a:ext uri="{0D108BD9-81ED-4DB2-BD59-A6C34878D82A}">
+                    <a16:rowId xmlns:a16="http://schemas.microsoft.com/office/drawing/2014/main" val="10000"/>
+                  </a:ext>
+                </a:extLst>
               </a:tr>
               <a:tr h="960120">
                 <a:tc>
@@ -11773,7 +11024,7 @@
                     <a:bodyPr/>
                     <a:lstStyle/>
                     <a:p>
-                      <a:pPr indent="0" marL="0">
+                      <a:pPr marL="0" indent="0">
                         <a:buNone/>
                       </a:pPr>
                       <a:r>
@@ -11794,7 +11045,7 @@
                       </a:endParaRPr>
                     </a:p>
                   </a:txBody>
-                  <a:tcPr marL="91440" marR="91440" marT="45720" marB="45720" anchor="ctr">
+                  <a:tcPr anchor="ctr">
                     <a:lnL w="12700" cap="flat" cmpd="sng" algn="ctr">
                       <a:solidFill>
                         <a:srgbClr val="EEEEEE"/>
@@ -11841,7 +11092,7 @@
                     <a:bodyPr/>
                     <a:lstStyle/>
                     <a:p>
-                      <a:pPr indent="0" marL="0">
+                      <a:pPr marL="0" indent="0">
                         <a:buNone/>
                       </a:pPr>
                       <a:r>
@@ -11862,7 +11113,7 @@
                       </a:endParaRPr>
                     </a:p>
                   </a:txBody>
-                  <a:tcPr marL="91440" marR="91440" marT="45720" marB="45720" anchor="ctr">
+                  <a:tcPr anchor="ctr">
                     <a:lnL w="12700" cap="flat" cmpd="sng" algn="ctr">
                       <a:solidFill>
                         <a:srgbClr val="EEEEEE"/>
@@ -11909,7 +11160,7 @@
                     <a:bodyPr/>
                     <a:lstStyle/>
                     <a:p>
-                      <a:pPr indent="0" marL="0">
+                      <a:pPr marL="0" indent="0">
                         <a:buNone/>
                       </a:pPr>
                       <a:r>
@@ -11930,7 +11181,7 @@
                       </a:endParaRPr>
                     </a:p>
                   </a:txBody>
-                  <a:tcPr marL="91440" marR="91440" marT="45720" marB="45720" anchor="ctr">
+                  <a:tcPr anchor="ctr">
                     <a:lnL w="12700" cap="flat" cmpd="sng" algn="ctr">
                       <a:solidFill>
                         <a:srgbClr val="EEEEEE"/>
@@ -11972,6 +11223,11 @@
                     </a:solidFill>
                   </a:tcPr>
                 </a:tc>
+                <a:extLst>
+                  <a:ext uri="{0D108BD9-81ED-4DB2-BD59-A6C34878D82A}">
+                    <a16:rowId xmlns:a16="http://schemas.microsoft.com/office/drawing/2014/main" val="10001"/>
+                  </a:ext>
+                </a:extLst>
               </a:tr>
               <a:tr h="960120">
                 <a:tc>
@@ -11979,7 +11235,7 @@
                     <a:bodyPr/>
                     <a:lstStyle/>
                     <a:p>
-                      <a:pPr indent="0" marL="0">
+                      <a:pPr marL="0" indent="0">
                         <a:buNone/>
                       </a:pPr>
                       <a:r>
@@ -12000,7 +11256,7 @@
                       </a:endParaRPr>
                     </a:p>
                   </a:txBody>
-                  <a:tcPr marL="91440" marR="91440" marT="45720" marB="45720" anchor="ctr">
+                  <a:tcPr anchor="ctr">
                     <a:lnL w="12700" cap="flat" cmpd="sng" algn="ctr">
                       <a:solidFill>
                         <a:srgbClr val="EEEEEE"/>
@@ -12047,7 +11303,7 @@
                     <a:bodyPr/>
                     <a:lstStyle/>
                     <a:p>
-                      <a:pPr indent="0" marL="0">
+                      <a:pPr marL="0" indent="0">
                         <a:buNone/>
                       </a:pPr>
                       <a:r>
@@ -12068,7 +11324,7 @@
                       </a:endParaRPr>
                     </a:p>
                   </a:txBody>
-                  <a:tcPr marL="91440" marR="91440" marT="45720" marB="45720" anchor="ctr">
+                  <a:tcPr anchor="ctr">
                     <a:lnL w="12700" cap="flat" cmpd="sng" algn="ctr">
                       <a:solidFill>
                         <a:srgbClr val="EEEEEE"/>
@@ -12115,7 +11371,7 @@
                     <a:bodyPr/>
                     <a:lstStyle/>
                     <a:p>
-                      <a:pPr indent="0" marL="0">
+                      <a:pPr marL="0" indent="0">
                         <a:buNone/>
                       </a:pPr>
                       <a:r>
@@ -12136,7 +11392,7 @@
                       </a:endParaRPr>
                     </a:p>
                   </a:txBody>
-                  <a:tcPr marL="91440" marR="91440" marT="45720" marB="45720" anchor="ctr">
+                  <a:tcPr anchor="ctr">
                     <a:lnL w="12700" cap="flat" cmpd="sng" algn="ctr">
                       <a:solidFill>
                         <a:srgbClr val="EEEEEE"/>
@@ -12178,6 +11434,11 @@
                     </a:solidFill>
                   </a:tcPr>
                 </a:tc>
+                <a:extLst>
+                  <a:ext uri="{0D108BD9-81ED-4DB2-BD59-A6C34878D82A}">
+                    <a16:rowId xmlns:a16="http://schemas.microsoft.com/office/drawing/2014/main" val="10002"/>
+                  </a:ext>
+                </a:extLst>
               </a:tr>
               <a:tr h="960120">
                 <a:tc>
@@ -12185,7 +11446,7 @@
                     <a:bodyPr/>
                     <a:lstStyle/>
                     <a:p>
-                      <a:pPr indent="0" marL="0">
+                      <a:pPr marL="0" indent="0">
                         <a:buNone/>
                       </a:pPr>
                       <a:r>
@@ -12206,7 +11467,7 @@
                       </a:endParaRPr>
                     </a:p>
                   </a:txBody>
-                  <a:tcPr marL="91440" marR="91440" marT="45720" marB="45720" anchor="ctr">
+                  <a:tcPr anchor="ctr">
                     <a:lnL w="12700" cap="flat" cmpd="sng" algn="ctr">
                       <a:solidFill>
                         <a:srgbClr val="EEEEEE"/>
@@ -12253,7 +11514,7 @@
                     <a:bodyPr/>
                     <a:lstStyle/>
                     <a:p>
-                      <a:pPr indent="0" marL="0">
+                      <a:pPr marL="0" indent="0">
                         <a:buNone/>
                       </a:pPr>
                       <a:r>
@@ -12274,7 +11535,7 @@
                       </a:endParaRPr>
                     </a:p>
                   </a:txBody>
-                  <a:tcPr marL="91440" marR="91440" marT="45720" marB="45720" anchor="ctr">
+                  <a:tcPr anchor="ctr">
                     <a:lnL w="12700" cap="flat" cmpd="sng" algn="ctr">
                       <a:solidFill>
                         <a:srgbClr val="EEEEEE"/>
@@ -12321,7 +11582,7 @@
                     <a:bodyPr/>
                     <a:lstStyle/>
                     <a:p>
-                      <a:pPr indent="0" marL="0">
+                      <a:pPr marL="0" indent="0">
                         <a:buNone/>
                       </a:pPr>
                       <a:r>
@@ -12342,7 +11603,7 @@
                       </a:endParaRPr>
                     </a:p>
                   </a:txBody>
-                  <a:tcPr marL="91440" marR="91440" marT="45720" marB="45720" anchor="ctr">
+                  <a:tcPr anchor="ctr">
                     <a:lnL w="12700" cap="flat" cmpd="sng" algn="ctr">
                       <a:solidFill>
                         <a:srgbClr val="EEEEEE"/>
@@ -12384,6 +11645,11 @@
                     </a:solidFill>
                   </a:tcPr>
                 </a:tc>
+                <a:extLst>
+                  <a:ext uri="{0D108BD9-81ED-4DB2-BD59-A6C34878D82A}">
+                    <a16:rowId xmlns:a16="http://schemas.microsoft.com/office/drawing/2014/main" val="10003"/>
+                  </a:ext>
+                </a:extLst>
               </a:tr>
               <a:tr h="960120">
                 <a:tc>
@@ -12391,7 +11657,7 @@
                     <a:bodyPr/>
                     <a:lstStyle/>
                     <a:p>
-                      <a:pPr indent="0" marL="0">
+                      <a:pPr marL="0" indent="0">
                         <a:buNone/>
                       </a:pPr>
                       <a:r>
@@ -12412,7 +11678,7 @@
                       </a:endParaRPr>
                     </a:p>
                   </a:txBody>
-                  <a:tcPr marL="91440" marR="91440" marT="45720" marB="45720" anchor="ctr">
+                  <a:tcPr anchor="ctr">
                     <a:lnL w="12700" cap="flat" cmpd="sng" algn="ctr">
                       <a:solidFill>
                         <a:srgbClr val="EEEEEE"/>
@@ -12459,7 +11725,7 @@
                     <a:bodyPr/>
                     <a:lstStyle/>
                     <a:p>
-                      <a:pPr indent="0" marL="0">
+                      <a:pPr marL="0" indent="0">
                         <a:buNone/>
                       </a:pPr>
                       <a:r>
@@ -12480,7 +11746,7 @@
                       </a:endParaRPr>
                     </a:p>
                   </a:txBody>
-                  <a:tcPr marL="91440" marR="91440" marT="45720" marB="45720" anchor="ctr">
+                  <a:tcPr anchor="ctr">
                     <a:lnL w="12700" cap="flat" cmpd="sng" algn="ctr">
                       <a:solidFill>
                         <a:srgbClr val="EEEEEE"/>
@@ -12527,7 +11793,7 @@
                     <a:bodyPr/>
                     <a:lstStyle/>
                     <a:p>
-                      <a:pPr indent="0" marL="0">
+                      <a:pPr marL="0" indent="0">
                         <a:buNone/>
                       </a:pPr>
                       <a:r>
@@ -12548,7 +11814,7 @@
                       </a:endParaRPr>
                     </a:p>
                   </a:txBody>
-                  <a:tcPr marL="91440" marR="91440" marT="45720" marB="45720" anchor="ctr">
+                  <a:tcPr anchor="ctr">
                     <a:lnL w="12700" cap="flat" cmpd="sng" algn="ctr">
                       <a:solidFill>
                         <a:srgbClr val="EEEEEE"/>
@@ -12590,6 +11856,11 @@
                     </a:solidFill>
                   </a:tcPr>
                 </a:tc>
+                <a:extLst>
+                  <a:ext uri="{0D108BD9-81ED-4DB2-BD59-A6C34878D82A}">
+                    <a16:rowId xmlns:a16="http://schemas.microsoft.com/office/drawing/2014/main" val="10004"/>
+                  </a:ext>
+                </a:extLst>
               </a:tr>
             </a:tbl>
           </a:graphicData>
@@ -12644,6 +11915,13 @@
             <a:prstDash val="solid"/>
           </a:ln>
         </p:spPr>
+        <p:txBody>
+          <a:bodyPr/>
+          <a:lstStyle/>
+          <a:p>
+            <a:endParaRPr lang="es-ES"/>
+          </a:p>
+        </p:txBody>
       </p:sp>
       <p:sp>
         <p:nvSpPr>
@@ -12666,7 +11944,7 @@
           <a:bodyPr wrap="square" rtlCol="0" anchor="ctr"/>
           <a:lstStyle/>
           <a:p>
-            <a:pPr indent="0" marL="0">
+            <a:pPr marL="0" indent="0">
               <a:buNone/>
             </a:pPr>
             <a:r>
@@ -12705,7 +11983,7 @@
           <a:bodyPr wrap="square" rtlCol="0" anchor="ctr"/>
           <a:lstStyle/>
           <a:p>
-            <a:pPr algn="r" indent="0" marL="0">
+            <a:pPr marL="0" indent="0" algn="r">
               <a:buNone/>
             </a:pPr>
             <a:r>
@@ -12731,8 +12009,8 @@
         </p:nvSpPr>
         <p:spPr>
           <a:xfrm>
-            <a:off x="548640" y="1554480"/>
-            <a:ext cx="11091672" cy="822960"/>
+            <a:off x="548640" y="2103120"/>
+            <a:ext cx="11091672" cy="914400"/>
           </a:xfrm>
           <a:prstGeom prst="rect">
             <a:avLst/>
@@ -12744,11 +12022,11 @@
           <a:bodyPr wrap="square" rtlCol="0" anchor="t"/>
           <a:lstStyle/>
           <a:p>
-            <a:pPr indent="0" marL="0">
-              <a:buNone/>
-            </a:pPr>
-            <a:r>
-              <a:rPr lang="en-US" sz="1800" dirty="0">
+            <a:pPr marL="0" indent="0">
+              <a:buNone/>
+            </a:pPr>
+            <a:r>
+              <a:rPr lang="en-US" sz="2000" dirty="0">
                 <a:solidFill>
                   <a:srgbClr val="212121"/>
                 </a:solidFill>
@@ -12758,7 +12036,7 @@
               </a:rPr>
               <a:t>De las cuatro familias, este tema se centra en la documental — con MongoDB como motor concreto. Antes de verla en código, dos piezas la definen, y ninguna es una tabla:</a:t>
             </a:r>
-            <a:endParaRPr lang="en-US" sz="1800" dirty="0"/>
+            <a:endParaRPr lang="en-US" sz="2000" dirty="0"/>
           </a:p>
         </p:txBody>
       </p:sp>
@@ -12770,7 +12048,7 @@
         </p:nvSpPr>
         <p:spPr>
           <a:xfrm>
-            <a:off x="548640" y="2651760"/>
+            <a:off x="548640" y="3383280"/>
             <a:ext cx="11091672" cy="2194560"/>
           </a:xfrm>
           <a:prstGeom prst="rect">
@@ -12785,13 +12063,13 @@
           <a:p>
             <a:pPr marL="190500" indent="-190500">
               <a:spcAft>
-                <a:spcPts val="2000"/>
+                <a:spcPts val="2600"/>
               </a:spcAft>
               <a:buSzPct val="100000"/>
               <a:buChar char="•"/>
             </a:pPr>
             <a:r>
-              <a:rPr lang="en-US" sz="1900" dirty="0">
+              <a:rPr lang="en-US" sz="2100" dirty="0">
                 <a:solidFill>
                   <a:srgbClr val="212121"/>
                 </a:solidFill>
@@ -12801,7 +12079,7 @@
               </a:rPr>
               <a:t>Documento: un objeto completo, tipo JSON, autocontenido — con su propia estructura, que puede variar de un documento a otro dentro de la misma colección.</a:t>
             </a:r>
-            <a:endParaRPr lang="en-US" sz="1900" dirty="0"/>
+            <a:endParaRPr lang="en-US" sz="2100" dirty="0"/>
           </a:p>
           <a:p>
             <a:pPr marL="190500" indent="-190500">
@@ -12809,7 +12087,7 @@
               <a:buChar char="•"/>
             </a:pPr>
             <a:r>
-              <a:rPr lang="en-US" sz="1900" dirty="0">
+              <a:rPr lang="en-US" sz="2100" dirty="0">
                 <a:solidFill>
                   <a:srgbClr val="212121"/>
                 </a:solidFill>
@@ -12819,7 +12097,7 @@
               </a:rPr>
               <a:t>Colección: un grupo de documentos. Por defecto admite un esquema flexible, aunque MongoDB permite añadir reglas de validación si necesitas imponer una estructura determinada.</a:t>
             </a:r>
-            <a:endParaRPr lang="en-US" sz="1900" dirty="0"/>
+            <a:endParaRPr lang="en-US" sz="2100" dirty="0"/>
           </a:p>
         </p:txBody>
       </p:sp>
@@ -12872,6 +12150,13 @@
             <a:prstDash val="solid"/>
           </a:ln>
         </p:spPr>
+        <p:txBody>
+          <a:bodyPr/>
+          <a:lstStyle/>
+          <a:p>
+            <a:endParaRPr lang="es-ES"/>
+          </a:p>
+        </p:txBody>
       </p:sp>
       <p:sp>
         <p:nvSpPr>
@@ -12894,7 +12179,7 @@
           <a:bodyPr wrap="square" rtlCol="0" anchor="ctr"/>
           <a:lstStyle/>
           <a:p>
-            <a:pPr indent="0" marL="0">
+            <a:pPr marL="0" indent="0">
               <a:buNone/>
             </a:pPr>
             <a:r>
@@ -12933,7 +12218,7 @@
           <a:bodyPr wrap="square" rtlCol="0" anchor="ctr"/>
           <a:lstStyle/>
           <a:p>
-            <a:pPr algn="r" indent="0" marL="0">
+            <a:pPr marL="0" indent="0" algn="r">
               <a:buNone/>
             </a:pPr>
             <a:r>
@@ -12959,8 +12244,8 @@
         </p:nvSpPr>
         <p:spPr>
           <a:xfrm>
-            <a:off x="548640" y="1280160"/>
-            <a:ext cx="11091672" cy="822960"/>
+            <a:off x="548640" y="2148840"/>
+            <a:ext cx="11091672" cy="914400"/>
           </a:xfrm>
           <a:prstGeom prst="rect">
             <a:avLst/>
@@ -12972,11 +12257,11 @@
           <a:bodyPr wrap="square" rtlCol="0" anchor="t"/>
           <a:lstStyle/>
           <a:p>
-            <a:pPr indent="0" marL="0">
-              <a:buNone/>
-            </a:pPr>
-            <a:r>
-              <a:rPr lang="en-US" sz="1750" dirty="0">
+            <a:pPr marL="0" indent="0">
+              <a:buNone/>
+            </a:pPr>
+            <a:r>
+              <a:rPr lang="en-US" sz="1900" dirty="0">
                 <a:solidFill>
                   <a:srgbClr val="212121"/>
                 </a:solidFill>
@@ -12986,7 +12271,7 @@
               </a:rPr>
               <a:t>Dos documentos reales dentro de la colección nota_lectura, con estructura distinta entre sí — el segundo tiene un campo (comentario) que el primero ni siquiera necesita:</a:t>
             </a:r>
-            <a:endParaRPr lang="en-US" sz="1750" dirty="0"/>
+            <a:endParaRPr lang="en-US" sz="1900" dirty="0"/>
           </a:p>
         </p:txBody>
       </p:sp>
@@ -12998,8 +12283,8 @@
         </p:nvSpPr>
         <p:spPr>
           <a:xfrm>
-            <a:off x="548640" y="2377440"/>
-            <a:ext cx="11091672" cy="1737360"/>
+            <a:off x="548640" y="3383280"/>
+            <a:ext cx="11091672" cy="2103120"/>
           </a:xfrm>
           <a:prstGeom prst="rect">
             <a:avLst/>
@@ -13014,6 +12299,13 @@
             <a:prstDash val="solid"/>
           </a:ln>
         </p:spPr>
+        <p:txBody>
+          <a:bodyPr/>
+          <a:lstStyle/>
+          <a:p>
+            <a:endParaRPr lang="es-ES"/>
+          </a:p>
+        </p:txBody>
       </p:sp>
       <p:sp>
         <p:nvSpPr>
@@ -13023,8 +12315,8 @@
         </p:nvSpPr>
         <p:spPr>
           <a:xfrm>
-            <a:off x="548640" y="2377440"/>
-            <a:ext cx="73152" cy="1737360"/>
+            <a:off x="548640" y="3383280"/>
+            <a:ext cx="73152" cy="2103120"/>
           </a:xfrm>
           <a:prstGeom prst="rect">
             <a:avLst/>
@@ -13039,6 +12331,13 @@
             <a:prstDash val="solid"/>
           </a:ln>
         </p:spPr>
+        <p:txBody>
+          <a:bodyPr/>
+          <a:lstStyle/>
+          <a:p>
+            <a:endParaRPr lang="es-ES"/>
+          </a:p>
+        </p:txBody>
       </p:sp>
       <p:sp>
         <p:nvSpPr>
@@ -13048,8 +12347,8 @@
         </p:nvSpPr>
         <p:spPr>
           <a:xfrm>
-            <a:off x="822960" y="2487168"/>
-            <a:ext cx="10588752" cy="1517904"/>
+            <a:off x="822960" y="3493008"/>
+            <a:ext cx="10588752" cy="1883664"/>
           </a:xfrm>
           <a:prstGeom prst="rect">
             <a:avLst/>
@@ -13061,11 +12360,11 @@
           <a:bodyPr wrap="square" rtlCol="0" anchor="t"/>
           <a:lstStyle/>
           <a:p>
-            <a:pPr indent="0" marL="0">
-              <a:buNone/>
-            </a:pPr>
-            <a:r>
-              <a:rPr lang="en-US" sz="1550" dirty="0">
+            <a:pPr marL="0" indent="0">
+              <a:buNone/>
+            </a:pPr>
+            <a:r>
+              <a:rPr lang="en-US" sz="1700" dirty="0">
                 <a:solidFill>
                   <a:srgbClr val="263238"/>
                 </a:solidFill>
@@ -13075,14 +12374,14 @@
               </a:rPr>
               <a:t>// Colección "nota_lectura"</a:t>
             </a:r>
-            <a:endParaRPr lang="en-US" sz="1550" dirty="0"/>
-          </a:p>
-          <a:p>
-            <a:pPr indent="0" marL="0">
-              <a:buNone/>
-            </a:pPr>
-            <a:r>
-              <a:rPr lang="en-US" sz="1550" dirty="0">
+            <a:endParaRPr lang="en-US" sz="1700" dirty="0"/>
+          </a:p>
+          <a:p>
+            <a:pPr marL="0" indent="0">
+              <a:buNone/>
+            </a:pPr>
+            <a:r>
+              <a:rPr lang="en-US" sz="1700" dirty="0">
                 <a:solidFill>
                   <a:srgbClr val="263238"/>
                 </a:solidFill>
@@ -13092,14 +12391,14 @@
               </a:rPr>
               <a:t>{ "_id": ObjectId("..."), "libroId": 1, "autor": "ana", "puntuacion": 8 }</a:t>
             </a:r>
-            <a:endParaRPr lang="en-US" sz="1550" dirty="0"/>
-          </a:p>
-          <a:p>
-            <a:pPr indent="0" marL="0">
-              <a:buNone/>
-            </a:pPr>
-            <a:r>
-              <a:rPr lang="en-US" sz="1550" dirty="0">
+            <a:endParaRPr lang="en-US" sz="1700" dirty="0"/>
+          </a:p>
+          <a:p>
+            <a:pPr marL="0" indent="0">
+              <a:buNone/>
+            </a:pPr>
+            <a:r>
+              <a:rPr lang="en-US" sz="1700" dirty="0">
                 <a:solidFill>
                   <a:srgbClr val="263238"/>
                 </a:solidFill>
@@ -13109,14 +12408,14 @@
               </a:rPr>
               <a:t>{ "_id": ObjectId("..."), "libroId": 1, "autor": "javi", "puntuacion": 9,</a:t>
             </a:r>
-            <a:endParaRPr lang="en-US" sz="1550" dirty="0"/>
-          </a:p>
-          <a:p>
-            <a:pPr indent="0" marL="0">
-              <a:buNone/>
-            </a:pPr>
-            <a:r>
-              <a:rPr lang="en-US" sz="1550" dirty="0">
+            <a:endParaRPr lang="en-US" sz="1700" dirty="0"/>
+          </a:p>
+          <a:p>
+            <a:pPr marL="0" indent="0">
+              <a:buNone/>
+            </a:pPr>
+            <a:r>
+              <a:rPr lang="en-US" sz="1700" dirty="0">
                 <a:solidFill>
                   <a:srgbClr val="263238"/>
                 </a:solidFill>
@@ -13126,7 +12425,7 @@
               </a:rPr>
               <a:t>  "comentario": "Me ha encantado el ritmo" }</a:t>
             </a:r>
-            <a:endParaRPr lang="en-US" sz="1550" dirty="0"/>
+            <a:endParaRPr lang="en-US" sz="1700" dirty="0"/>
           </a:p>
         </p:txBody>
       </p:sp>
@@ -13179,6 +12478,13 @@
             <a:prstDash val="solid"/>
           </a:ln>
         </p:spPr>
+        <p:txBody>
+          <a:bodyPr/>
+          <a:lstStyle/>
+          <a:p>
+            <a:endParaRPr lang="es-ES"/>
+          </a:p>
+        </p:txBody>
       </p:sp>
       <p:sp>
         <p:nvSpPr>
@@ -13201,7 +12507,7 @@
           <a:bodyPr wrap="square" rtlCol="0" anchor="ctr"/>
           <a:lstStyle/>
           <a:p>
-            <a:pPr indent="0" marL="0">
+            <a:pPr marL="0" indent="0">
               <a:buNone/>
             </a:pPr>
             <a:r>
@@ -13240,7 +12546,7 @@
           <a:bodyPr wrap="square" rtlCol="0" anchor="ctr"/>
           <a:lstStyle/>
           <a:p>
-            <a:pPr algn="r" indent="0" marL="0">
+            <a:pPr marL="0" indent="0" algn="r">
               <a:buNone/>
             </a:pPr>
             <a:r>
@@ -13273,30 +12579,54 @@
           </p:nvPr>
         </p:nvGraphicFramePr>
         <p:xfrm>
-          <a:off x="548640" y="1097280"/>
-          <a:ext cx="11091672" cy="914400"/>
+          <a:off x="548640" y="1188720"/>
+          <a:ext cx="11091673" cy="3977640"/>
         </p:xfrm>
         <a:graphic>
           <a:graphicData uri="http://schemas.openxmlformats.org/drawingml/2006/table">
             <a:tbl>
               <a:tblPr/>
               <a:tblGrid>
-                <a:gridCol w="2440168"/>
-                <a:gridCol w="2440168"/>
-                <a:gridCol w="2883835"/>
-                <a:gridCol w="3327502"/>
+                <a:gridCol w="2440168">
+                  <a:extLst>
+                    <a:ext uri="{9D8B030D-6E8A-4147-A177-3AD203B41FA5}">
+                      <a16:colId xmlns:a16="http://schemas.microsoft.com/office/drawing/2014/main" val="20000"/>
+                    </a:ext>
+                  </a:extLst>
+                </a:gridCol>
+                <a:gridCol w="2440168">
+                  <a:extLst>
+                    <a:ext uri="{9D8B030D-6E8A-4147-A177-3AD203B41FA5}">
+                      <a16:colId xmlns:a16="http://schemas.microsoft.com/office/drawing/2014/main" val="20001"/>
+                    </a:ext>
+                  </a:extLst>
+                </a:gridCol>
+                <a:gridCol w="2883835">
+                  <a:extLst>
+                    <a:ext uri="{9D8B030D-6E8A-4147-A177-3AD203B41FA5}">
+                      <a16:colId xmlns:a16="http://schemas.microsoft.com/office/drawing/2014/main" val="20002"/>
+                    </a:ext>
+                  </a:extLst>
+                </a:gridCol>
+                <a:gridCol w="3327502">
+                  <a:extLst>
+                    <a:ext uri="{9D8B030D-6E8A-4147-A177-3AD203B41FA5}">
+                      <a16:colId xmlns:a16="http://schemas.microsoft.com/office/drawing/2014/main" val="20003"/>
+                    </a:ext>
+                  </a:extLst>
+                </a:gridCol>
               </a:tblGrid>
-              <a:tr h="777240">
+              <a:tr h="795528">
                 <a:tc>
                   <a:txBody>
                     <a:bodyPr/>
                     <a:lstStyle/>
                     <a:p>
-                      <a:pPr algn="ctr" indent="0" marL="0">
+                      <a:pPr marL="0" indent="0" algn="ctr">
                         <a:buNone/>
                       </a:pPr>
                       <a:r>
-                        <a:rPr lang="en-US" sz="1550" b="1" dirty="0">
+                        <a:rPr lang="en-US" sz="1600" b="1" dirty="0">
                           <a:solidFill>
                             <a:srgbClr val="FFFFFF"/>
                           </a:solidFill>
@@ -13306,14 +12636,14 @@
                         </a:rPr>
                         <a:t>Aspecto</a:t>
                       </a:r>
-                      <a:endParaRPr lang="en-US" sz="1550" dirty="0">
+                      <a:endParaRPr lang="en-US" sz="1600" dirty="0">
                         <a:latin typeface="Arial" charset="0"/>
                         <a:ea typeface="Arial" charset="0"/>
                         <a:cs typeface="Arial" charset="0"/>
                       </a:endParaRPr>
                     </a:p>
                   </a:txBody>
-                  <a:tcPr marL="91440" marR="91440" marT="45720" marB="45720" anchor="ctr">
+                  <a:tcPr anchor="ctr">
                     <a:lnL w="12700" cap="flat" cmpd="sng" algn="ctr">
                       <a:solidFill>
                         <a:srgbClr val="EEEEEE"/>
@@ -13360,11 +12690,11 @@
                     <a:bodyPr/>
                     <a:lstStyle/>
                     <a:p>
-                      <a:pPr algn="ctr" indent="0" marL="0">
+                      <a:pPr marL="0" indent="0" algn="ctr">
                         <a:buNone/>
                       </a:pPr>
                       <a:r>
-                        <a:rPr lang="en-US" sz="1550" b="1" dirty="0">
+                        <a:rPr lang="en-US" sz="1600" b="1" dirty="0">
                           <a:solidFill>
                             <a:srgbClr val="FFFFFF"/>
                           </a:solidFill>
@@ -13374,14 +12704,14 @@
                         </a:rPr>
                         <a:t>Relacional</a:t>
                       </a:r>
-                      <a:endParaRPr lang="en-US" sz="1550" dirty="0">
+                      <a:endParaRPr lang="en-US" sz="1600" dirty="0">
                         <a:latin typeface="Arial" charset="0"/>
                         <a:ea typeface="Arial" charset="0"/>
                         <a:cs typeface="Arial" charset="0"/>
                       </a:endParaRPr>
                     </a:p>
                   </a:txBody>
-                  <a:tcPr marL="91440" marR="91440" marT="45720" marB="45720" anchor="ctr">
+                  <a:tcPr anchor="ctr">
                     <a:lnL w="12700" cap="flat" cmpd="sng" algn="ctr">
                       <a:solidFill>
                         <a:srgbClr val="EEEEEE"/>
@@ -13428,11 +12758,11 @@
                     <a:bodyPr/>
                     <a:lstStyle/>
                     <a:p>
-                      <a:pPr algn="ctr" indent="0" marL="0">
+                      <a:pPr marL="0" indent="0" algn="ctr">
                         <a:buNone/>
                       </a:pPr>
                       <a:r>
-                        <a:rPr lang="en-US" sz="1550" b="1" dirty="0">
+                        <a:rPr lang="en-US" sz="1600" b="1" dirty="0">
                           <a:solidFill>
                             <a:srgbClr val="FFFFFF"/>
                           </a:solidFill>
@@ -13442,14 +12772,14 @@
                         </a:rPr>
                         <a:t>JSONB (Tema 2)</a:t>
                       </a:r>
-                      <a:endParaRPr lang="en-US" sz="1550" dirty="0">
+                      <a:endParaRPr lang="en-US" sz="1600" dirty="0">
                         <a:latin typeface="Arial" charset="0"/>
                         <a:ea typeface="Arial" charset="0"/>
                         <a:cs typeface="Arial" charset="0"/>
                       </a:endParaRPr>
                     </a:p>
                   </a:txBody>
-                  <a:tcPr marL="91440" marR="91440" marT="45720" marB="45720" anchor="ctr">
+                  <a:tcPr anchor="ctr">
                     <a:lnL w="12700" cap="flat" cmpd="sng" algn="ctr">
                       <a:solidFill>
                         <a:srgbClr val="EEEEEE"/>
@@ -13496,11 +12826,11 @@
                     <a:bodyPr/>
                     <a:lstStyle/>
                     <a:p>
-                      <a:pPr algn="ctr" indent="0" marL="0">
+                      <a:pPr marL="0" indent="0" algn="ctr">
                         <a:buNone/>
                       </a:pPr>
                       <a:r>
-                        <a:rPr lang="en-US" sz="1550" b="1" dirty="0">
+                        <a:rPr lang="en-US" sz="1600" b="1" dirty="0">
                           <a:solidFill>
                             <a:srgbClr val="FFFFFF"/>
                           </a:solidFill>
@@ -13510,14 +12840,14 @@
                         </a:rPr>
                         <a:t>Documental (este tema)</a:t>
                       </a:r>
-                      <a:endParaRPr lang="en-US" sz="1550" dirty="0">
+                      <a:endParaRPr lang="en-US" sz="1600" dirty="0">
                         <a:latin typeface="Arial" charset="0"/>
                         <a:ea typeface="Arial" charset="0"/>
                         <a:cs typeface="Arial" charset="0"/>
                       </a:endParaRPr>
                     </a:p>
                   </a:txBody>
-                  <a:tcPr marL="91440" marR="91440" marT="45720" marB="45720" anchor="ctr">
+                  <a:tcPr anchor="ctr">
                     <a:lnL w="12700" cap="flat" cmpd="sng" algn="ctr">
                       <a:solidFill>
                         <a:srgbClr val="EEEEEE"/>
@@ -13559,18 +12889,23 @@
                     </a:solidFill>
                   </a:tcPr>
                 </a:tc>
+                <a:extLst>
+                  <a:ext uri="{0D108BD9-81ED-4DB2-BD59-A6C34878D82A}">
+                    <a16:rowId xmlns:a16="http://schemas.microsoft.com/office/drawing/2014/main" val="10000"/>
+                  </a:ext>
+                </a:extLst>
               </a:tr>
-              <a:tr h="777240">
+              <a:tr h="795528">
                 <a:tc>
                   <a:txBody>
                     <a:bodyPr/>
                     <a:lstStyle/>
                     <a:p>
-                      <a:pPr indent="0" marL="0">
+                      <a:pPr marL="0" indent="0">
                         <a:buNone/>
                       </a:pPr>
                       <a:r>
-                        <a:rPr lang="en-US" sz="1350" b="1" dirty="0">
+                        <a:rPr lang="en-US" sz="1400" b="1" dirty="0">
                           <a:solidFill>
                             <a:srgbClr val="212121"/>
                           </a:solidFill>
@@ -13580,14 +12915,14 @@
                         </a:rPr>
                         <a:t>Estructura de fondo</a:t>
                       </a:r>
-                      <a:endParaRPr lang="en-US" sz="1350" dirty="0">
+                      <a:endParaRPr lang="en-US" sz="1400" dirty="0">
                         <a:latin typeface="Arial" charset="0"/>
                         <a:ea typeface="Arial" charset="0"/>
                         <a:cs typeface="Arial" charset="0"/>
                       </a:endParaRPr>
                     </a:p>
                   </a:txBody>
-                  <a:tcPr marL="91440" marR="91440" marT="45720" marB="45720" anchor="ctr">
+                  <a:tcPr anchor="ctr">
                     <a:lnL w="12700" cap="flat" cmpd="sng" algn="ctr">
                       <a:solidFill>
                         <a:srgbClr val="EEEEEE"/>
@@ -13634,11 +12969,11 @@
                     <a:bodyPr/>
                     <a:lstStyle/>
                     <a:p>
-                      <a:pPr indent="0" marL="0">
+                      <a:pPr marL="0" indent="0">
                         <a:buNone/>
                       </a:pPr>
                       <a:r>
-                        <a:rPr lang="en-US" sz="1350" dirty="0">
+                        <a:rPr lang="en-US" sz="1400" dirty="0">
                           <a:solidFill>
                             <a:srgbClr val="212121"/>
                           </a:solidFill>
@@ -13648,14 +12983,14 @@
                         </a:rPr>
                         <a:t>Tablas y filas</a:t>
                       </a:r>
-                      <a:endParaRPr lang="en-US" sz="1350" dirty="0">
+                      <a:endParaRPr lang="en-US" sz="1400" dirty="0">
                         <a:latin typeface="Arial" charset="0"/>
                         <a:ea typeface="Arial" charset="0"/>
                         <a:cs typeface="Arial" charset="0"/>
                       </a:endParaRPr>
                     </a:p>
                   </a:txBody>
-                  <a:tcPr marL="91440" marR="91440" marT="45720" marB="45720" anchor="ctr">
+                  <a:tcPr anchor="ctr">
                     <a:lnL w="12700" cap="flat" cmpd="sng" algn="ctr">
                       <a:solidFill>
                         <a:srgbClr val="EEEEEE"/>
@@ -13702,11 +13037,11 @@
                     <a:bodyPr/>
                     <a:lstStyle/>
                     <a:p>
-                      <a:pPr indent="0" marL="0">
+                      <a:pPr marL="0" indent="0">
                         <a:buNone/>
                       </a:pPr>
                       <a:r>
-                        <a:rPr lang="en-US" sz="1350" dirty="0">
+                        <a:rPr lang="en-US" sz="1400" dirty="0">
                           <a:solidFill>
                             <a:srgbClr val="212121"/>
                           </a:solidFill>
@@ -13716,14 +13051,14 @@
                         </a:rPr>
                         <a:t>Tabla, columna en JSON</a:t>
                       </a:r>
-                      <a:endParaRPr lang="en-US" sz="1350" dirty="0">
+                      <a:endParaRPr lang="en-US" sz="1400" dirty="0">
                         <a:latin typeface="Arial" charset="0"/>
                         <a:ea typeface="Arial" charset="0"/>
                         <a:cs typeface="Arial" charset="0"/>
                       </a:endParaRPr>
                     </a:p>
                   </a:txBody>
-                  <a:tcPr marL="91440" marR="91440" marT="45720" marB="45720" anchor="ctr">
+                  <a:tcPr anchor="ctr">
                     <a:lnL w="12700" cap="flat" cmpd="sng" algn="ctr">
                       <a:solidFill>
                         <a:srgbClr val="EEEEEE"/>
@@ -13770,11 +13105,11 @@
                     <a:bodyPr/>
                     <a:lstStyle/>
                     <a:p>
-                      <a:pPr indent="0" marL="0">
+                      <a:pPr marL="0" indent="0">
                         <a:buNone/>
                       </a:pPr>
                       <a:r>
-                        <a:rPr lang="en-US" sz="1350" dirty="0">
+                        <a:rPr lang="en-US" sz="1400" dirty="0">
                           <a:solidFill>
                             <a:srgbClr val="212121"/>
                           </a:solidFill>
@@ -13784,14 +13119,14 @@
                         </a:rPr>
                         <a:t>Ninguna tabla — todo es documento</a:t>
                       </a:r>
-                      <a:endParaRPr lang="en-US" sz="1350" dirty="0">
+                      <a:endParaRPr lang="en-US" sz="1400" dirty="0">
                         <a:latin typeface="Arial" charset="0"/>
                         <a:ea typeface="Arial" charset="0"/>
                         <a:cs typeface="Arial" charset="0"/>
                       </a:endParaRPr>
                     </a:p>
                   </a:txBody>
-                  <a:tcPr marL="91440" marR="91440" marT="45720" marB="45720" anchor="ctr">
+                  <a:tcPr anchor="ctr">
                     <a:lnL w="12700" cap="flat" cmpd="sng" algn="ctr">
                       <a:solidFill>
                         <a:srgbClr val="EEEEEE"/>
@@ -13833,18 +13168,23 @@
                     </a:solidFill>
                   </a:tcPr>
                 </a:tc>
+                <a:extLst>
+                  <a:ext uri="{0D108BD9-81ED-4DB2-BD59-A6C34878D82A}">
+                    <a16:rowId xmlns:a16="http://schemas.microsoft.com/office/drawing/2014/main" val="10001"/>
+                  </a:ext>
+                </a:extLst>
               </a:tr>
-              <a:tr h="777240">
+              <a:tr h="795528">
                 <a:tc>
                   <a:txBody>
                     <a:bodyPr/>
                     <a:lstStyle/>
                     <a:p>
-                      <a:pPr indent="0" marL="0">
+                      <a:pPr marL="0" indent="0">
                         <a:buNone/>
                       </a:pPr>
                       <a:r>
-                        <a:rPr lang="en-US" sz="1350" b="1" dirty="0">
+                        <a:rPr lang="en-US" sz="1400" b="1" dirty="0">
                           <a:solidFill>
                             <a:srgbClr val="212121"/>
                           </a:solidFill>
@@ -13854,14 +13194,14 @@
                         </a:rPr>
                         <a:t>Estructura fija por defecto</a:t>
                       </a:r>
-                      <a:endParaRPr lang="en-US" sz="1350" dirty="0">
+                      <a:endParaRPr lang="en-US" sz="1400" dirty="0">
                         <a:latin typeface="Arial" charset="0"/>
                         <a:ea typeface="Arial" charset="0"/>
                         <a:cs typeface="Arial" charset="0"/>
                       </a:endParaRPr>
                     </a:p>
                   </a:txBody>
-                  <a:tcPr marL="91440" marR="91440" marT="45720" marB="45720" anchor="ctr">
+                  <a:tcPr anchor="ctr">
                     <a:lnL w="12700" cap="flat" cmpd="sng" algn="ctr">
                       <a:solidFill>
                         <a:srgbClr val="EEEEEE"/>
@@ -13908,11 +13248,11 @@
                     <a:bodyPr/>
                     <a:lstStyle/>
                     <a:p>
-                      <a:pPr indent="0" marL="0">
+                      <a:pPr marL="0" indent="0">
                         <a:buNone/>
                       </a:pPr>
                       <a:r>
-                        <a:rPr lang="en-US" sz="1350" dirty="0">
+                        <a:rPr lang="en-US" sz="1400" dirty="0">
                           <a:solidFill>
                             <a:srgbClr val="212121"/>
                           </a:solidFill>
@@ -13922,14 +13262,14 @@
                         </a:rPr>
                         <a:t>Sí</a:t>
                       </a:r>
-                      <a:endParaRPr lang="en-US" sz="1350" dirty="0">
+                      <a:endParaRPr lang="en-US" sz="1400" dirty="0">
                         <a:latin typeface="Arial" charset="0"/>
                         <a:ea typeface="Arial" charset="0"/>
                         <a:cs typeface="Arial" charset="0"/>
                       </a:endParaRPr>
                     </a:p>
                   </a:txBody>
-                  <a:tcPr marL="91440" marR="91440" marT="45720" marB="45720" anchor="ctr">
+                  <a:tcPr anchor="ctr">
                     <a:lnL w="12700" cap="flat" cmpd="sng" algn="ctr">
                       <a:solidFill>
                         <a:srgbClr val="EEEEEE"/>
@@ -13976,11 +13316,11 @@
                     <a:bodyPr/>
                     <a:lstStyle/>
                     <a:p>
-                      <a:pPr indent="0" marL="0">
+                      <a:pPr marL="0" indent="0">
                         <a:buNone/>
                       </a:pPr>
                       <a:r>
-                        <a:rPr lang="en-US" sz="1350" dirty="0">
+                        <a:rPr lang="en-US" sz="1400" dirty="0">
                           <a:solidFill>
                             <a:srgbClr val="212121"/>
                           </a:solidFill>
@@ -13990,14 +13330,14 @@
                         </a:rPr>
                         <a:t>Sí, salvo el JSONB</a:t>
                       </a:r>
-                      <a:endParaRPr lang="en-US" sz="1350" dirty="0">
+                      <a:endParaRPr lang="en-US" sz="1400" dirty="0">
                         <a:latin typeface="Arial" charset="0"/>
                         <a:ea typeface="Arial" charset="0"/>
                         <a:cs typeface="Arial" charset="0"/>
                       </a:endParaRPr>
                     </a:p>
                   </a:txBody>
-                  <a:tcPr marL="91440" marR="91440" marT="45720" marB="45720" anchor="ctr">
+                  <a:tcPr anchor="ctr">
                     <a:lnL w="12700" cap="flat" cmpd="sng" algn="ctr">
                       <a:solidFill>
                         <a:srgbClr val="EEEEEE"/>
@@ -14044,11 +13384,11 @@
                     <a:bodyPr/>
                     <a:lstStyle/>
                     <a:p>
-                      <a:pPr indent="0" marL="0">
+                      <a:pPr marL="0" indent="0">
                         <a:buNone/>
                       </a:pPr>
                       <a:r>
-                        <a:rPr lang="en-US" sz="1350" dirty="0">
+                        <a:rPr lang="en-US" sz="1400" dirty="0">
                           <a:solidFill>
                             <a:srgbClr val="212121"/>
                           </a:solidFill>
@@ -14058,14 +13398,14 @@
                         </a:rPr>
                         <a:t>No — aunque puede añadirse validación</a:t>
                       </a:r>
-                      <a:endParaRPr lang="en-US" sz="1350" dirty="0">
+                      <a:endParaRPr lang="en-US" sz="1400" dirty="0">
                         <a:latin typeface="Arial" charset="0"/>
                         <a:ea typeface="Arial" charset="0"/>
                         <a:cs typeface="Arial" charset="0"/>
                       </a:endParaRPr>
                     </a:p>
                   </a:txBody>
-                  <a:tcPr marL="91440" marR="91440" marT="45720" marB="45720" anchor="ctr">
+                  <a:tcPr anchor="ctr">
                     <a:lnL w="12700" cap="flat" cmpd="sng" algn="ctr">
                       <a:solidFill>
                         <a:srgbClr val="EEEEEE"/>
@@ -14107,18 +13447,23 @@
                     </a:solidFill>
                   </a:tcPr>
                 </a:tc>
+                <a:extLst>
+                  <a:ext uri="{0D108BD9-81ED-4DB2-BD59-A6C34878D82A}">
+                    <a16:rowId xmlns:a16="http://schemas.microsoft.com/office/drawing/2014/main" val="10002"/>
+                  </a:ext>
+                </a:extLst>
               </a:tr>
-              <a:tr h="777240">
+              <a:tr h="795528">
                 <a:tc>
                   <a:txBody>
                     <a:bodyPr/>
                     <a:lstStyle/>
                     <a:p>
-                      <a:pPr indent="0" marL="0">
+                      <a:pPr marL="0" indent="0">
                         <a:buNone/>
                       </a:pPr>
                       <a:r>
-                        <a:rPr lang="en-US" sz="1350" b="1" dirty="0">
+                        <a:rPr lang="en-US" sz="1400" b="1" dirty="0">
                           <a:solidFill>
                             <a:srgbClr val="212121"/>
                           </a:solidFill>
@@ -14128,14 +13473,14 @@
                         </a:rPr>
                         <a:t>Claves foráneas</a:t>
                       </a:r>
-                      <a:endParaRPr lang="en-US" sz="1350" dirty="0">
+                      <a:endParaRPr lang="en-US" sz="1400" dirty="0">
                         <a:latin typeface="Arial" charset="0"/>
                         <a:ea typeface="Arial" charset="0"/>
                         <a:cs typeface="Arial" charset="0"/>
                       </a:endParaRPr>
                     </a:p>
                   </a:txBody>
-                  <a:tcPr marL="91440" marR="91440" marT="45720" marB="45720" anchor="ctr">
+                  <a:tcPr anchor="ctr">
                     <a:lnL w="12700" cap="flat" cmpd="sng" algn="ctr">
                       <a:solidFill>
                         <a:srgbClr val="EEEEEE"/>
@@ -14182,11 +13527,11 @@
                     <a:bodyPr/>
                     <a:lstStyle/>
                     <a:p>
-                      <a:pPr indent="0" marL="0">
+                      <a:pPr marL="0" indent="0">
                         <a:buNone/>
                       </a:pPr>
                       <a:r>
-                        <a:rPr lang="en-US" sz="1350" dirty="0">
+                        <a:rPr lang="en-US" sz="1400" dirty="0">
                           <a:solidFill>
                             <a:srgbClr val="212121"/>
                           </a:solidFill>
@@ -14196,14 +13541,14 @@
                         </a:rPr>
                         <a:t>Sí</a:t>
                       </a:r>
-                      <a:endParaRPr lang="en-US" sz="1350" dirty="0">
+                      <a:endParaRPr lang="en-US" sz="1400" dirty="0">
                         <a:latin typeface="Arial" charset="0"/>
                         <a:ea typeface="Arial" charset="0"/>
                         <a:cs typeface="Arial" charset="0"/>
                       </a:endParaRPr>
                     </a:p>
                   </a:txBody>
-                  <a:tcPr marL="91440" marR="91440" marT="45720" marB="45720" anchor="ctr">
+                  <a:tcPr anchor="ctr">
                     <a:lnL w="12700" cap="flat" cmpd="sng" algn="ctr">
                       <a:solidFill>
                         <a:srgbClr val="EEEEEE"/>
@@ -14250,11 +13595,11 @@
                     <a:bodyPr/>
                     <a:lstStyle/>
                     <a:p>
-                      <a:pPr indent="0" marL="0">
+                      <a:pPr marL="0" indent="0">
                         <a:buNone/>
                       </a:pPr>
                       <a:r>
-                        <a:rPr lang="en-US" sz="1350" dirty="0">
+                        <a:rPr lang="en-US" sz="1400" dirty="0">
                           <a:solidFill>
                             <a:srgbClr val="212121"/>
                           </a:solidFill>
@@ -14264,14 +13609,14 @@
                         </a:rPr>
                         <a:t>Sí</a:t>
                       </a:r>
-                      <a:endParaRPr lang="en-US" sz="1350" dirty="0">
+                      <a:endParaRPr lang="en-US" sz="1400" dirty="0">
                         <a:latin typeface="Arial" charset="0"/>
                         <a:ea typeface="Arial" charset="0"/>
                         <a:cs typeface="Arial" charset="0"/>
                       </a:endParaRPr>
                     </a:p>
                   </a:txBody>
-                  <a:tcPr marL="91440" marR="91440" marT="45720" marB="45720" anchor="ctr">
+                  <a:tcPr anchor="ctr">
                     <a:lnL w="12700" cap="flat" cmpd="sng" algn="ctr">
                       <a:solidFill>
                         <a:srgbClr val="EEEEEE"/>
@@ -14318,11 +13663,11 @@
                     <a:bodyPr/>
                     <a:lstStyle/>
                     <a:p>
-                      <a:pPr indent="0" marL="0">
+                      <a:pPr marL="0" indent="0">
                         <a:buNone/>
                       </a:pPr>
                       <a:r>
-                        <a:rPr lang="en-US" sz="1350" dirty="0">
+                        <a:rPr lang="en-US" sz="1400" dirty="0">
                           <a:solidFill>
                             <a:srgbClr val="212121"/>
                           </a:solidFill>
@@ -14332,14 +13677,14 @@
                         </a:rPr>
                         <a:t>No (relación lógica, a mano)</a:t>
                       </a:r>
-                      <a:endParaRPr lang="en-US" sz="1350" dirty="0">
+                      <a:endParaRPr lang="en-US" sz="1400" dirty="0">
                         <a:latin typeface="Arial" charset="0"/>
                         <a:ea typeface="Arial" charset="0"/>
                         <a:cs typeface="Arial" charset="0"/>
                       </a:endParaRPr>
                     </a:p>
                   </a:txBody>
-                  <a:tcPr marL="91440" marR="91440" marT="45720" marB="45720" anchor="ctr">
+                  <a:tcPr anchor="ctr">
                     <a:lnL w="12700" cap="flat" cmpd="sng" algn="ctr">
                       <a:solidFill>
                         <a:srgbClr val="EEEEEE"/>
@@ -14381,18 +13726,23 @@
                     </a:solidFill>
                   </a:tcPr>
                 </a:tc>
+                <a:extLst>
+                  <a:ext uri="{0D108BD9-81ED-4DB2-BD59-A6C34878D82A}">
+                    <a16:rowId xmlns:a16="http://schemas.microsoft.com/office/drawing/2014/main" val="10003"/>
+                  </a:ext>
+                </a:extLst>
               </a:tr>
-              <a:tr h="777240">
+              <a:tr h="795528">
                 <a:tc>
                   <a:txBody>
                     <a:bodyPr/>
                     <a:lstStyle/>
                     <a:p>
-                      <a:pPr indent="0" marL="0">
+                      <a:pPr marL="0" indent="0">
                         <a:buNone/>
                       </a:pPr>
                       <a:r>
-                        <a:rPr lang="en-US" sz="1350" b="1" dirty="0">
+                        <a:rPr lang="en-US" sz="1400" b="1" dirty="0">
                           <a:solidFill>
                             <a:srgbClr val="212121"/>
                           </a:solidFill>
@@ -14402,14 +13752,14 @@
                         </a:rPr>
                         <a:t>JOIN</a:t>
                       </a:r>
-                      <a:endParaRPr lang="en-US" sz="1350" dirty="0">
+                      <a:endParaRPr lang="en-US" sz="1400" dirty="0">
                         <a:latin typeface="Arial" charset="0"/>
                         <a:ea typeface="Arial" charset="0"/>
                         <a:cs typeface="Arial" charset="0"/>
                       </a:endParaRPr>
                     </a:p>
                   </a:txBody>
-                  <a:tcPr marL="91440" marR="91440" marT="45720" marB="45720" anchor="ctr">
+                  <a:tcPr anchor="ctr">
                     <a:lnL w="12700" cap="flat" cmpd="sng" algn="ctr">
                       <a:solidFill>
                         <a:srgbClr val="EEEEEE"/>
@@ -14456,11 +13806,11 @@
                     <a:bodyPr/>
                     <a:lstStyle/>
                     <a:p>
-                      <a:pPr indent="0" marL="0">
+                      <a:pPr marL="0" indent="0">
                         <a:buNone/>
                       </a:pPr>
                       <a:r>
-                        <a:rPr lang="en-US" sz="1350" dirty="0">
+                        <a:rPr lang="en-US" sz="1400" dirty="0">
                           <a:solidFill>
                             <a:srgbClr val="212121"/>
                           </a:solidFill>
@@ -14470,14 +13820,14 @@
                         </a:rPr>
                         <a:t>Sí</a:t>
                       </a:r>
-                      <a:endParaRPr lang="en-US" sz="1350" dirty="0">
+                      <a:endParaRPr lang="en-US" sz="1400" dirty="0">
                         <a:latin typeface="Arial" charset="0"/>
                         <a:ea typeface="Arial" charset="0"/>
                         <a:cs typeface="Arial" charset="0"/>
                       </a:endParaRPr>
                     </a:p>
                   </a:txBody>
-                  <a:tcPr marL="91440" marR="91440" marT="45720" marB="45720" anchor="ctr">
+                  <a:tcPr anchor="ctr">
                     <a:lnL w="12700" cap="flat" cmpd="sng" algn="ctr">
                       <a:solidFill>
                         <a:srgbClr val="EEEEEE"/>
@@ -14524,11 +13874,11 @@
                     <a:bodyPr/>
                     <a:lstStyle/>
                     <a:p>
-                      <a:pPr indent="0" marL="0">
+                      <a:pPr marL="0" indent="0">
                         <a:buNone/>
                       </a:pPr>
                       <a:r>
-                        <a:rPr lang="en-US" sz="1350" dirty="0">
+                        <a:rPr lang="en-US" sz="1400" dirty="0">
                           <a:solidFill>
                             <a:srgbClr val="212121"/>
                           </a:solidFill>
@@ -14538,14 +13888,14 @@
                         </a:rPr>
                         <a:t>Sí</a:t>
                       </a:r>
-                      <a:endParaRPr lang="en-US" sz="1350" dirty="0">
+                      <a:endParaRPr lang="en-US" sz="1400" dirty="0">
                         <a:latin typeface="Arial" charset="0"/>
                         <a:ea typeface="Arial" charset="0"/>
                         <a:cs typeface="Arial" charset="0"/>
                       </a:endParaRPr>
                     </a:p>
                   </a:txBody>
-                  <a:tcPr marL="91440" marR="91440" marT="45720" marB="45720" anchor="ctr">
+                  <a:tcPr anchor="ctr">
                     <a:lnL w="12700" cap="flat" cmpd="sng" algn="ctr">
                       <a:solidFill>
                         <a:srgbClr val="EEEEEE"/>
@@ -14592,11 +13942,11 @@
                     <a:bodyPr/>
                     <a:lstStyle/>
                     <a:p>
-                      <a:pPr indent="0" marL="0">
+                      <a:pPr marL="0" indent="0">
                         <a:buNone/>
                       </a:pPr>
                       <a:r>
-                        <a:rPr lang="en-US" sz="1350" dirty="0">
+                        <a:rPr lang="en-US" sz="1400" dirty="0">
                           <a:solidFill>
                             <a:srgbClr val="212121"/>
                           </a:solidFill>
@@ -14606,14 +13956,14 @@
                         </a:rPr>
                         <a:t>No como en SQL; existe $lookup</a:t>
                       </a:r>
-                      <a:endParaRPr lang="en-US" sz="1350" dirty="0">
+                      <a:endParaRPr lang="en-US" sz="1400" dirty="0">
                         <a:latin typeface="Arial" charset="0"/>
                         <a:ea typeface="Arial" charset="0"/>
                         <a:cs typeface="Arial" charset="0"/>
                       </a:endParaRPr>
                     </a:p>
                   </a:txBody>
-                  <a:tcPr marL="91440" marR="91440" marT="45720" marB="45720" anchor="ctr">
+                  <a:tcPr anchor="ctr">
                     <a:lnL w="12700" cap="flat" cmpd="sng" algn="ctr">
                       <a:solidFill>
                         <a:srgbClr val="EEEEEE"/>
@@ -14655,6 +14005,11 @@
                     </a:solidFill>
                   </a:tcPr>
                 </a:tc>
+                <a:extLst>
+                  <a:ext uri="{0D108BD9-81ED-4DB2-BD59-A6C34878D82A}">
+                    <a16:rowId xmlns:a16="http://schemas.microsoft.com/office/drawing/2014/main" val="10004"/>
+                  </a:ext>
+                </a:extLst>
               </a:tr>
             </a:tbl>
           </a:graphicData>
@@ -14668,8 +14023,8 @@
         </p:nvSpPr>
         <p:spPr>
           <a:xfrm>
-            <a:off x="548640" y="5257800"/>
-            <a:ext cx="11091672" cy="822960"/>
+            <a:off x="548640" y="5440680"/>
+            <a:ext cx="11091672" cy="731520"/>
           </a:xfrm>
           <a:prstGeom prst="rect">
             <a:avLst/>
@@ -14681,7 +14036,7 @@
           <a:bodyPr wrap="square" rtlCol="0" anchor="t"/>
           <a:lstStyle/>
           <a:p>
-            <a:pPr indent="0" marL="0">
+            <a:pPr marL="0" indent="0">
               <a:buNone/>
             </a:pPr>
             <a:r>
@@ -14748,6 +14103,13 @@
             <a:prstDash val="solid"/>
           </a:ln>
         </p:spPr>
+        <p:txBody>
+          <a:bodyPr/>
+          <a:lstStyle/>
+          <a:p>
+            <a:endParaRPr lang="es-ES"/>
+          </a:p>
+        </p:txBody>
       </p:sp>
       <p:sp>
         <p:nvSpPr>
@@ -14770,7 +14132,7 @@
           <a:bodyPr wrap="square" rtlCol="0" anchor="ctr"/>
           <a:lstStyle/>
           <a:p>
-            <a:pPr indent="0" marL="0">
+            <a:pPr marL="0" indent="0">
               <a:buNone/>
             </a:pPr>
             <a:r>
@@ -14809,7 +14171,7 @@
           <a:bodyPr wrap="square" rtlCol="0" anchor="ctr"/>
           <a:lstStyle/>
           <a:p>
-            <a:pPr algn="r" indent="0" marL="0">
+            <a:pPr marL="0" indent="0" algn="r">
               <a:buNone/>
             </a:pPr>
             <a:r>
@@ -14835,8 +14197,8 @@
         </p:nvSpPr>
         <p:spPr>
           <a:xfrm>
-            <a:off x="548640" y="1371600"/>
-            <a:ext cx="11091672" cy="1371600"/>
+            <a:off x="548640" y="1600200"/>
+            <a:ext cx="11091672" cy="1463040"/>
           </a:xfrm>
           <a:prstGeom prst="rect">
             <a:avLst/>
@@ -14848,11 +14210,11 @@
           <a:bodyPr wrap="square" rtlCol="0" anchor="t"/>
           <a:lstStyle/>
           <a:p>
-            <a:pPr indent="0" marL="0">
-              <a:buNone/>
-            </a:pPr>
-            <a:r>
-              <a:rPr lang="en-US" sz="1850" dirty="0">
+            <a:pPr marL="0" indent="0">
+              <a:buNone/>
+            </a:pPr>
+            <a:r>
+              <a:rPr lang="en-US" sz="2000" dirty="0">
                 <a:solidFill>
                   <a:srgbClr val="212121"/>
                 </a:solidFill>
@@ -14862,7 +14224,7 @@
               </a:rPr>
               <a:t>Podríamos necesitar una base de datos documental para las notas de lectura de nuestra librería — cada nota es un documento independiente, sin relaciones fuertes entre ellas, con una forma que podría cambiar con el tiempo. El motor documental que vas a usar para eso es MongoDB.</a:t>
             </a:r>
-            <a:endParaRPr lang="en-US" sz="1850" dirty="0"/>
+            <a:endParaRPr lang="en-US" sz="2000" dirty="0"/>
           </a:p>
         </p:txBody>
       </p:sp>
@@ -14874,8 +14236,8 @@
         </p:nvSpPr>
         <p:spPr>
           <a:xfrm>
-            <a:off x="548640" y="3017520"/>
-            <a:ext cx="11091672" cy="1463040"/>
+            <a:off x="548640" y="3429000"/>
+            <a:ext cx="11091672" cy="1828800"/>
           </a:xfrm>
           <a:prstGeom prst="roundRect">
             <a:avLst/>
@@ -14890,6 +14252,13 @@
             <a:prstDash val="solid"/>
           </a:ln>
         </p:spPr>
+        <p:txBody>
+          <a:bodyPr/>
+          <a:lstStyle/>
+          <a:p>
+            <a:endParaRPr lang="es-ES"/>
+          </a:p>
+        </p:txBody>
       </p:sp>
       <p:sp>
         <p:nvSpPr>
@@ -14899,8 +14268,8 @@
         </p:nvSpPr>
         <p:spPr>
           <a:xfrm>
-            <a:off x="822960" y="3108960"/>
-            <a:ext cx="10543032" cy="1280160"/>
+            <a:off x="822960" y="3520440"/>
+            <a:ext cx="10543032" cy="1645920"/>
           </a:xfrm>
           <a:prstGeom prst="rect">
             <a:avLst/>
@@ -14912,11 +14281,11 @@
           <a:bodyPr wrap="square" rtlCol="0" anchor="ctr"/>
           <a:lstStyle/>
           <a:p>
-            <a:pPr indent="0" marL="0">
-              <a:buNone/>
-            </a:pPr>
-            <a:r>
-              <a:rPr lang="en-US" sz="1700" dirty="0">
+            <a:pPr marL="0" indent="0">
+              <a:buNone/>
+            </a:pPr>
+            <a:r>
+              <a:rPr lang="en-US" sz="1900" dirty="0">
                 <a:solidFill>
                   <a:srgbClr val="212121"/>
                 </a:solidFill>
@@ -14926,7 +14295,7 @@
               </a:rPr>
               <a:t>MongoDB almacena sus documentos en BSON (una representación binaria de JSON). Todo documento tiene un campo _id único y, si no proporcionas uno, MongoDB genera normalmente un ObjectId. En Spring Data puedes representarlo con un String, en vez del Long autoincremental de PostgreSQL.</a:t>
             </a:r>
-            <a:endParaRPr lang="en-US" sz="1700" dirty="0"/>
+            <a:endParaRPr lang="en-US" sz="1900" dirty="0"/>
           </a:p>
         </p:txBody>
       </p:sp>
@@ -14979,6 +14348,13 @@
             <a:prstDash val="solid"/>
           </a:ln>
         </p:spPr>
+        <p:txBody>
+          <a:bodyPr/>
+          <a:lstStyle/>
+          <a:p>
+            <a:endParaRPr lang="es-ES"/>
+          </a:p>
+        </p:txBody>
       </p:sp>
       <p:sp>
         <p:nvSpPr>
@@ -15001,7 +14377,7 @@
           <a:bodyPr wrap="square" rtlCol="0" anchor="ctr"/>
           <a:lstStyle/>
           <a:p>
-            <a:pPr indent="0" marL="0">
+            <a:pPr marL="0" indent="0">
               <a:buNone/>
             </a:pPr>
             <a:r>
@@ -15040,7 +14416,7 @@
           <a:bodyPr wrap="square" rtlCol="0" anchor="ctr"/>
           <a:lstStyle/>
           <a:p>
-            <a:pPr algn="r" indent="0" marL="0">
+            <a:pPr marL="0" indent="0" algn="r">
               <a:buNone/>
             </a:pPr>
             <a:r>
@@ -15066,8 +14442,8 @@
         </p:nvSpPr>
         <p:spPr>
           <a:xfrm>
-            <a:off x="3677107" y="1554480"/>
-            <a:ext cx="4834738" cy="1005840"/>
+            <a:off x="3677107" y="2286000"/>
+            <a:ext cx="4834738" cy="1188720"/>
           </a:xfrm>
           <a:prstGeom prst="roundRect">
             <a:avLst/>
@@ -15082,6 +14458,13 @@
             <a:prstDash val="solid"/>
           </a:ln>
         </p:spPr>
+        <p:txBody>
+          <a:bodyPr/>
+          <a:lstStyle/>
+          <a:p>
+            <a:endParaRPr lang="es-ES"/>
+          </a:p>
+        </p:txBody>
       </p:sp>
       <p:sp>
         <p:nvSpPr>
@@ -15091,8 +14474,8 @@
         </p:nvSpPr>
         <p:spPr>
           <a:xfrm>
-            <a:off x="3677107" y="1554480"/>
-            <a:ext cx="4834738" cy="1005840"/>
+            <a:off x="3677107" y="2286000"/>
+            <a:ext cx="4834738" cy="1188720"/>
           </a:xfrm>
           <a:prstGeom prst="rect">
             <a:avLst/>
@@ -15104,11 +14487,11 @@
           <a:bodyPr wrap="square" rtlCol="0" anchor="ctr"/>
           <a:lstStyle/>
           <a:p>
-            <a:pPr algn="ctr" indent="0" marL="0">
-              <a:buNone/>
-            </a:pPr>
-            <a:r>
-              <a:rPr lang="en-US" sz="1650" b="1" dirty="0">
+            <a:pPr marL="0" indent="0" algn="ctr">
+              <a:buNone/>
+            </a:pPr>
+            <a:r>
+              <a:rPr lang="en-US" sz="1900" b="1" dirty="0">
                 <a:solidFill>
                   <a:srgbClr val="212121"/>
                 </a:solidFill>
@@ -15118,7 +14501,7 @@
               </a:rPr>
               <a:t>🖥️ Servidor MongoDB → 🗄️ Base de datos (libreria_db) → 📁 Colección nota_lectura</a:t>
             </a:r>
-            <a:endParaRPr lang="en-US" sz="1650" dirty="0"/>
+            <a:endParaRPr lang="en-US" sz="1900" dirty="0"/>
           </a:p>
         </p:txBody>
       </p:sp>
@@ -15130,7 +14513,7 @@
         </p:nvSpPr>
         <p:spPr>
           <a:xfrm>
-            <a:off x="6094476" y="2560320"/>
+            <a:off x="6094476" y="3474720"/>
             <a:ext cx="914" cy="182880"/>
           </a:xfrm>
           <a:prstGeom prst="line">
@@ -15144,6 +14527,13 @@
             <a:prstDash val="solid"/>
           </a:ln>
         </p:spPr>
+        <p:txBody>
+          <a:bodyPr/>
+          <a:lstStyle/>
+          <a:p>
+            <a:endParaRPr lang="es-ES"/>
+          </a:p>
+        </p:txBody>
       </p:sp>
       <p:sp>
         <p:nvSpPr>
@@ -15153,8 +14543,8 @@
         </p:nvSpPr>
         <p:spPr>
           <a:xfrm>
-            <a:off x="548640" y="2926080"/>
-            <a:ext cx="3453384" cy="822960"/>
+            <a:off x="548640" y="3840480"/>
+            <a:ext cx="3453384" cy="1188720"/>
           </a:xfrm>
           <a:prstGeom prst="roundRect">
             <a:avLst/>
@@ -15169,6 +14559,13 @@
             <a:prstDash val="solid"/>
           </a:ln>
         </p:spPr>
+        <p:txBody>
+          <a:bodyPr/>
+          <a:lstStyle/>
+          <a:p>
+            <a:endParaRPr lang="es-ES"/>
+          </a:p>
+        </p:txBody>
       </p:sp>
       <p:sp>
         <p:nvSpPr>
@@ -15178,8 +14575,8 @@
         </p:nvSpPr>
         <p:spPr>
           <a:xfrm>
-            <a:off x="594360" y="2926080"/>
-            <a:ext cx="3361944" cy="822960"/>
+            <a:off x="594360" y="3840480"/>
+            <a:ext cx="3361944" cy="1188720"/>
           </a:xfrm>
           <a:prstGeom prst="rect">
             <a:avLst/>
@@ -15191,11 +14588,11 @@
           <a:bodyPr wrap="square" rtlCol="0" anchor="ctr"/>
           <a:lstStyle/>
           <a:p>
-            <a:pPr algn="ctr" indent="0" marL="0">
-              <a:buNone/>
-            </a:pPr>
-            <a:r>
-              <a:rPr lang="en-US" sz="1550" dirty="0">
+            <a:pPr marL="0" indent="0" algn="ctr">
+              <a:buNone/>
+            </a:pPr>
+            <a:r>
+              <a:rPr lang="en-US" sz="1800" dirty="0">
                 <a:solidFill>
                   <a:srgbClr val="212121"/>
                 </a:solidFill>
@@ -15205,7 +14602,7 @@
               </a:rPr>
               <a:t>📄 Documento</a:t>
             </a:r>
-            <a:endParaRPr lang="en-US" sz="1550" dirty="0"/>
+            <a:endParaRPr lang="en-US" sz="1800" dirty="0"/>
           </a:p>
         </p:txBody>
       </p:sp>
@@ -15217,7 +14614,7 @@
         </p:nvSpPr>
         <p:spPr>
           <a:xfrm>
-            <a:off x="2275332" y="2743200"/>
+            <a:off x="2275332" y="3657600"/>
             <a:ext cx="914" cy="182880"/>
           </a:xfrm>
           <a:prstGeom prst="line">
@@ -15231,6 +14628,13 @@
             <a:prstDash val="solid"/>
           </a:ln>
         </p:spPr>
+        <p:txBody>
+          <a:bodyPr/>
+          <a:lstStyle/>
+          <a:p>
+            <a:endParaRPr lang="es-ES"/>
+          </a:p>
+        </p:txBody>
       </p:sp>
       <p:sp>
         <p:nvSpPr>
@@ -15240,8 +14644,8 @@
         </p:nvSpPr>
         <p:spPr>
           <a:xfrm>
-            <a:off x="4367784" y="2926080"/>
-            <a:ext cx="3453384" cy="822960"/>
+            <a:off x="4367784" y="3840480"/>
+            <a:ext cx="3453384" cy="1188720"/>
           </a:xfrm>
           <a:prstGeom prst="roundRect">
             <a:avLst/>
@@ -15256,6 +14660,13 @@
             <a:prstDash val="solid"/>
           </a:ln>
         </p:spPr>
+        <p:txBody>
+          <a:bodyPr/>
+          <a:lstStyle/>
+          <a:p>
+            <a:endParaRPr lang="es-ES"/>
+          </a:p>
+        </p:txBody>
       </p:sp>
       <p:sp>
         <p:nvSpPr>
@@ -15265,8 +14676,8 @@
         </p:nvSpPr>
         <p:spPr>
           <a:xfrm>
-            <a:off x="4413504" y="2926080"/>
-            <a:ext cx="3361944" cy="822960"/>
+            <a:off x="4413504" y="3840480"/>
+            <a:ext cx="3361944" cy="1188720"/>
           </a:xfrm>
           <a:prstGeom prst="rect">
             <a:avLst/>
@@ -15278,11 +14689,11 @@
           <a:bodyPr wrap="square" rtlCol="0" anchor="ctr"/>
           <a:lstStyle/>
           <a:p>
-            <a:pPr algn="ctr" indent="0" marL="0">
-              <a:buNone/>
-            </a:pPr>
-            <a:r>
-              <a:rPr lang="en-US" sz="1550" dirty="0">
+            <a:pPr marL="0" indent="0" algn="ctr">
+              <a:buNone/>
+            </a:pPr>
+            <a:r>
+              <a:rPr lang="en-US" sz="1800" dirty="0">
                 <a:solidFill>
                   <a:srgbClr val="212121"/>
                 </a:solidFill>
@@ -15292,7 +14703,7 @@
               </a:rPr>
               <a:t>📄 Documento</a:t>
             </a:r>
-            <a:endParaRPr lang="en-US" sz="1550" dirty="0"/>
+            <a:endParaRPr lang="en-US" sz="1800" dirty="0"/>
           </a:p>
         </p:txBody>
       </p:sp>
@@ -15304,7 +14715,7 @@
         </p:nvSpPr>
         <p:spPr>
           <a:xfrm>
-            <a:off x="6094476" y="2743200"/>
+            <a:off x="6094476" y="3657600"/>
             <a:ext cx="914" cy="182880"/>
           </a:xfrm>
           <a:prstGeom prst="line">
@@ -15318,6 +14729,13 @@
             <a:prstDash val="solid"/>
           </a:ln>
         </p:spPr>
+        <p:txBody>
+          <a:bodyPr/>
+          <a:lstStyle/>
+          <a:p>
+            <a:endParaRPr lang="es-ES"/>
+          </a:p>
+        </p:txBody>
       </p:sp>
       <p:sp>
         <p:nvSpPr>
@@ -15327,8 +14745,8 @@
         </p:nvSpPr>
         <p:spPr>
           <a:xfrm>
-            <a:off x="8186928" y="2926080"/>
-            <a:ext cx="3453384" cy="822960"/>
+            <a:off x="8186928" y="3840480"/>
+            <a:ext cx="3453384" cy="1188720"/>
           </a:xfrm>
           <a:prstGeom prst="roundRect">
             <a:avLst/>
@@ -15343,6 +14761,13 @@
             <a:prstDash val="solid"/>
           </a:ln>
         </p:spPr>
+        <p:txBody>
+          <a:bodyPr/>
+          <a:lstStyle/>
+          <a:p>
+            <a:endParaRPr lang="es-ES"/>
+          </a:p>
+        </p:txBody>
       </p:sp>
       <p:sp>
         <p:nvSpPr>
@@ -15352,8 +14777,8 @@
         </p:nvSpPr>
         <p:spPr>
           <a:xfrm>
-            <a:off x="8232648" y="2926080"/>
-            <a:ext cx="3361944" cy="822960"/>
+            <a:off x="8232648" y="3840480"/>
+            <a:ext cx="3361944" cy="1188720"/>
           </a:xfrm>
           <a:prstGeom prst="rect">
             <a:avLst/>
@@ -15365,11 +14790,11 @@
           <a:bodyPr wrap="square" rtlCol="0" anchor="ctr"/>
           <a:lstStyle/>
           <a:p>
-            <a:pPr algn="ctr" indent="0" marL="0">
-              <a:buNone/>
-            </a:pPr>
-            <a:r>
-              <a:rPr lang="en-US" sz="1550" dirty="0">
+            <a:pPr marL="0" indent="0" algn="ctr">
+              <a:buNone/>
+            </a:pPr>
+            <a:r>
+              <a:rPr lang="en-US" sz="1800" dirty="0">
                 <a:solidFill>
                   <a:srgbClr val="212121"/>
                 </a:solidFill>
@@ -15379,7 +14804,7 @@
               </a:rPr>
               <a:t>📄 Documento</a:t>
             </a:r>
-            <a:endParaRPr lang="en-US" sz="1550" dirty="0"/>
+            <a:endParaRPr lang="en-US" sz="1800" dirty="0"/>
           </a:p>
         </p:txBody>
       </p:sp>
@@ -15391,7 +14816,7 @@
         </p:nvSpPr>
         <p:spPr>
           <a:xfrm>
-            <a:off x="9913620" y="2743200"/>
+            <a:off x="9913620" y="3657600"/>
             <a:ext cx="914" cy="182880"/>
           </a:xfrm>
           <a:prstGeom prst="line">
@@ -15405,6 +14830,13 @@
             <a:prstDash val="solid"/>
           </a:ln>
         </p:spPr>
+        <p:txBody>
+          <a:bodyPr/>
+          <a:lstStyle/>
+          <a:p>
+            <a:endParaRPr lang="es-ES"/>
+          </a:p>
+        </p:txBody>
       </p:sp>
       <p:sp>
         <p:nvSpPr>
@@ -15414,7 +14846,7 @@
         </p:nvSpPr>
         <p:spPr>
           <a:xfrm>
-            <a:off x="2275332" y="2743200"/>
+            <a:off x="2275332" y="3657600"/>
             <a:ext cx="7638288" cy="914"/>
           </a:xfrm>
           <a:prstGeom prst="line">
@@ -15428,6 +14860,13 @@
             <a:prstDash val="solid"/>
           </a:ln>
         </p:spPr>
+        <p:txBody>
+          <a:bodyPr/>
+          <a:lstStyle/>
+          <a:p>
+            <a:endParaRPr lang="es-ES"/>
+          </a:p>
+        </p:txBody>
       </p:sp>
     </p:spTree>
   </p:cSld>
@@ -15730,4 +15169,319 @@
     </a:ext>
   </a:extLst>
 </a:theme>
+</file>
+
+<file path=ppt/theme/theme2.xml><?xml version="1.0" encoding="utf-8"?>
+<a:theme xmlns:a="http://schemas.openxmlformats.org/drawingml/2006/main" name="Tema de Office">
+  <a:themeElements>
+    <a:clrScheme name="Office">
+      <a:dk1>
+        <a:sysClr val="windowText" lastClr="000000"/>
+      </a:dk1>
+      <a:lt1>
+        <a:sysClr val="window" lastClr="FFFFFF"/>
+      </a:lt1>
+      <a:dk2>
+        <a:srgbClr val="0E2841"/>
+      </a:dk2>
+      <a:lt2>
+        <a:srgbClr val="E8E8E8"/>
+      </a:lt2>
+      <a:accent1>
+        <a:srgbClr val="156082"/>
+      </a:accent1>
+      <a:accent2>
+        <a:srgbClr val="E97132"/>
+      </a:accent2>
+      <a:accent3>
+        <a:srgbClr val="196B24"/>
+      </a:accent3>
+      <a:accent4>
+        <a:srgbClr val="0F9ED5"/>
+      </a:accent4>
+      <a:accent5>
+        <a:srgbClr val="A02B93"/>
+      </a:accent5>
+      <a:accent6>
+        <a:srgbClr val="4EA72E"/>
+      </a:accent6>
+      <a:hlink>
+        <a:srgbClr val="467886"/>
+      </a:hlink>
+      <a:folHlink>
+        <a:srgbClr val="96607D"/>
+      </a:folHlink>
+    </a:clrScheme>
+    <a:fontScheme name="Office">
+      <a:majorFont>
+        <a:latin typeface="Aptos Display" panose="02110004020202020204"/>
+        <a:ea typeface=""/>
+        <a:cs typeface=""/>
+        <a:font script="Jpan" typeface="游ゴシック Light"/>
+        <a:font script="Hang" typeface="맑은 고딕"/>
+        <a:font script="Hans" typeface="等线 Light"/>
+        <a:font script="Hant" typeface="新細明體"/>
+        <a:font script="Arab" typeface="Times New Roman"/>
+        <a:font script="Hebr" typeface="Times New Roman"/>
+        <a:font script="Thai" typeface="Angsana New"/>
+        <a:font script="Ethi" typeface="Nyala"/>
+        <a:font script="Beng" typeface="Vrinda"/>
+        <a:font script="Gujr" typeface="Shruti"/>
+        <a:font script="Khmr" typeface="MoolBoran"/>
+        <a:font script="Knda" typeface="Tunga"/>
+        <a:font script="Guru" typeface="Raavi"/>
+        <a:font script="Cans" typeface="Euphemia"/>
+        <a:font script="Cher" typeface="Plantagenet Cherokee"/>
+        <a:font script="Yiii" typeface="Microsoft Yi Baiti"/>
+        <a:font script="Tibt" typeface="Microsoft Himalaya"/>
+        <a:font script="Thaa" typeface="MV Boli"/>
+        <a:font script="Deva" typeface="Mangal"/>
+        <a:font script="Telu" typeface="Gautami"/>
+        <a:font script="Taml" typeface="Latha"/>
+        <a:font script="Syrc" typeface="Estrangelo Edessa"/>
+        <a:font script="Orya" typeface="Kalinga"/>
+        <a:font script="Mlym" typeface="Kartika"/>
+        <a:font script="Laoo" typeface="DokChampa"/>
+        <a:font script="Sinh" typeface="Iskoola Pota"/>
+        <a:font script="Mong" typeface="Mongolian Baiti"/>
+        <a:font script="Viet" typeface="Times New Roman"/>
+        <a:font script="Uigh" typeface="Microsoft Uighur"/>
+        <a:font script="Geor" typeface="Sylfaen"/>
+        <a:font script="Armn" typeface="Arial"/>
+        <a:font script="Bugi" typeface="Leelawadee UI"/>
+        <a:font script="Bopo" typeface="Microsoft JhengHei"/>
+        <a:font script="Java" typeface="Javanese Text"/>
+        <a:font script="Lisu" typeface="Segoe UI"/>
+        <a:font script="Mymr" typeface="Myanmar Text"/>
+        <a:font script="Nkoo" typeface="Ebrima"/>
+        <a:font script="Olck" typeface="Nirmala UI"/>
+        <a:font script="Osma" typeface="Ebrima"/>
+        <a:font script="Phag" typeface="Phagspa"/>
+        <a:font script="Syrn" typeface="Estrangelo Edessa"/>
+        <a:font script="Syrj" typeface="Estrangelo Edessa"/>
+        <a:font script="Syre" typeface="Estrangelo Edessa"/>
+        <a:font script="Sora" typeface="Nirmala UI"/>
+        <a:font script="Tale" typeface="Microsoft Tai Le"/>
+        <a:font script="Talu" typeface="Microsoft New Tai Lue"/>
+        <a:font script="Tfng" typeface="Ebrima"/>
+      </a:majorFont>
+      <a:minorFont>
+        <a:latin typeface="Aptos" panose="02110004020202020204"/>
+        <a:ea typeface=""/>
+        <a:cs typeface=""/>
+        <a:font script="Jpan" typeface="游ゴシック"/>
+        <a:font script="Hang" typeface="맑은 고딕"/>
+        <a:font script="Hans" typeface="等线"/>
+        <a:font script="Hant" typeface="新細明體"/>
+        <a:font script="Arab" typeface="Arial"/>
+        <a:font script="Hebr" typeface="Arial"/>
+        <a:font script="Thai" typeface="Cordia New"/>
+        <a:font script="Ethi" typeface="Nyala"/>
+        <a:font script="Beng" typeface="Vrinda"/>
+        <a:font script="Gujr" typeface="Shruti"/>
+        <a:font script="Khmr" typeface="DaunPenh"/>
+        <a:font script="Knda" typeface="Tunga"/>
+        <a:font script="Guru" typeface="Raavi"/>
+        <a:font script="Cans" typeface="Euphemia"/>
+        <a:font script="Cher" typeface="Plantagenet Cherokee"/>
+        <a:font script="Yiii" typeface="Microsoft Yi Baiti"/>
+        <a:font script="Tibt" typeface="Microsoft Himalaya"/>
+        <a:font script="Thaa" typeface="MV Boli"/>
+        <a:font script="Deva" typeface="Mangal"/>
+        <a:font script="Telu" typeface="Gautami"/>
+        <a:font script="Taml" typeface="Latha"/>
+        <a:font script="Syrc" typeface="Estrangelo Edessa"/>
+        <a:font script="Orya" typeface="Kalinga"/>
+        <a:font script="Mlym" typeface="Kartika"/>
+        <a:font script="Laoo" typeface="DokChampa"/>
+        <a:font script="Sinh" typeface="Iskoola Pota"/>
+        <a:font script="Mong" typeface="Mongolian Baiti"/>
+        <a:font script="Viet" typeface="Arial"/>
+        <a:font script="Uigh" typeface="Microsoft Uighur"/>
+        <a:font script="Geor" typeface="Sylfaen"/>
+        <a:font script="Armn" typeface="Arial"/>
+        <a:font script="Bugi" typeface="Leelawadee UI"/>
+        <a:font script="Bopo" typeface="Microsoft JhengHei"/>
+        <a:font script="Java" typeface="Javanese Text"/>
+        <a:font script="Lisu" typeface="Segoe UI"/>
+        <a:font script="Mymr" typeface="Myanmar Text"/>
+        <a:font script="Nkoo" typeface="Ebrima"/>
+        <a:font script="Olck" typeface="Nirmala UI"/>
+        <a:font script="Osma" typeface="Ebrima"/>
+        <a:font script="Phag" typeface="Phagspa"/>
+        <a:font script="Syrn" typeface="Estrangelo Edessa"/>
+        <a:font script="Syrj" typeface="Estrangelo Edessa"/>
+        <a:font script="Syre" typeface="Estrangelo Edessa"/>
+        <a:font script="Sora" typeface="Nirmala UI"/>
+        <a:font script="Tale" typeface="Microsoft Tai Le"/>
+        <a:font script="Talu" typeface="Microsoft New Tai Lue"/>
+        <a:font script="Tfng" typeface="Ebrima"/>
+      </a:minorFont>
+    </a:fontScheme>
+    <a:fmtScheme name="Office">
+      <a:fillStyleLst>
+        <a:solidFill>
+          <a:schemeClr val="phClr"/>
+        </a:solidFill>
+        <a:gradFill rotWithShape="1">
+          <a:gsLst>
+            <a:gs pos="0">
+              <a:schemeClr val="phClr">
+                <a:lumMod val="110000"/>
+                <a:satMod val="105000"/>
+                <a:tint val="67000"/>
+              </a:schemeClr>
+            </a:gs>
+            <a:gs pos="50000">
+              <a:schemeClr val="phClr">
+                <a:lumMod val="105000"/>
+                <a:satMod val="103000"/>
+                <a:tint val="73000"/>
+              </a:schemeClr>
+            </a:gs>
+            <a:gs pos="100000">
+              <a:schemeClr val="phClr">
+                <a:lumMod val="105000"/>
+                <a:satMod val="109000"/>
+                <a:tint val="81000"/>
+              </a:schemeClr>
+            </a:gs>
+          </a:gsLst>
+          <a:lin ang="5400000" scaled="0"/>
+        </a:gradFill>
+        <a:gradFill rotWithShape="1">
+          <a:gsLst>
+            <a:gs pos="0">
+              <a:schemeClr val="phClr">
+                <a:satMod val="103000"/>
+                <a:lumMod val="102000"/>
+                <a:tint val="94000"/>
+              </a:schemeClr>
+            </a:gs>
+            <a:gs pos="50000">
+              <a:schemeClr val="phClr">
+                <a:satMod val="110000"/>
+                <a:lumMod val="100000"/>
+                <a:shade val="100000"/>
+              </a:schemeClr>
+            </a:gs>
+            <a:gs pos="100000">
+              <a:schemeClr val="phClr">
+                <a:lumMod val="99000"/>
+                <a:satMod val="120000"/>
+                <a:shade val="78000"/>
+              </a:schemeClr>
+            </a:gs>
+          </a:gsLst>
+          <a:lin ang="5400000" scaled="0"/>
+        </a:gradFill>
+      </a:fillStyleLst>
+      <a:lnStyleLst>
+        <a:ln w="12700" cap="flat" cmpd="sng" algn="ctr">
+          <a:solidFill>
+            <a:schemeClr val="phClr"/>
+          </a:solidFill>
+          <a:prstDash val="solid"/>
+          <a:miter lim="800000"/>
+        </a:ln>
+        <a:ln w="19050" cap="flat" cmpd="sng" algn="ctr">
+          <a:solidFill>
+            <a:schemeClr val="phClr"/>
+          </a:solidFill>
+          <a:prstDash val="solid"/>
+          <a:miter lim="800000"/>
+        </a:ln>
+        <a:ln w="25400" cap="flat" cmpd="sng" algn="ctr">
+          <a:solidFill>
+            <a:schemeClr val="phClr"/>
+          </a:solidFill>
+          <a:prstDash val="solid"/>
+          <a:miter lim="800000"/>
+        </a:ln>
+      </a:lnStyleLst>
+      <a:effectStyleLst>
+        <a:effectStyle>
+          <a:effectLst/>
+        </a:effectStyle>
+        <a:effectStyle>
+          <a:effectLst/>
+        </a:effectStyle>
+        <a:effectStyle>
+          <a:effectLst>
+            <a:outerShdw blurRad="57150" dist="19050" dir="5400000" algn="ctr" rotWithShape="0">
+              <a:srgbClr val="000000">
+                <a:alpha val="63000"/>
+              </a:srgbClr>
+            </a:outerShdw>
+          </a:effectLst>
+        </a:effectStyle>
+      </a:effectStyleLst>
+      <a:bgFillStyleLst>
+        <a:solidFill>
+          <a:schemeClr val="phClr"/>
+        </a:solidFill>
+        <a:solidFill>
+          <a:schemeClr val="phClr">
+            <a:tint val="95000"/>
+            <a:satMod val="170000"/>
+          </a:schemeClr>
+        </a:solidFill>
+        <a:gradFill rotWithShape="1">
+          <a:gsLst>
+            <a:gs pos="0">
+              <a:schemeClr val="phClr">
+                <a:tint val="93000"/>
+                <a:satMod val="150000"/>
+                <a:shade val="98000"/>
+                <a:lumMod val="102000"/>
+              </a:schemeClr>
+            </a:gs>
+            <a:gs pos="50000">
+              <a:schemeClr val="phClr">
+                <a:tint val="98000"/>
+                <a:satMod val="130000"/>
+                <a:shade val="90000"/>
+                <a:lumMod val="103000"/>
+              </a:schemeClr>
+            </a:gs>
+            <a:gs pos="100000">
+              <a:schemeClr val="phClr">
+                <a:shade val="63000"/>
+                <a:satMod val="120000"/>
+              </a:schemeClr>
+            </a:gs>
+          </a:gsLst>
+          <a:lin ang="5400000" scaled="0"/>
+        </a:gradFill>
+      </a:bgFillStyleLst>
+    </a:fmtScheme>
+  </a:themeElements>
+  <a:objectDefaults>
+    <a:lnDef>
+      <a:spPr/>
+      <a:bodyPr/>
+      <a:lstStyle/>
+      <a:style>
+        <a:lnRef idx="2">
+          <a:schemeClr val="accent1"/>
+        </a:lnRef>
+        <a:fillRef idx="0">
+          <a:schemeClr val="accent1"/>
+        </a:fillRef>
+        <a:effectRef idx="1">
+          <a:schemeClr val="accent1"/>
+        </a:effectRef>
+        <a:fontRef idx="minor">
+          <a:schemeClr val="tx1"/>
+        </a:fontRef>
+      </a:style>
+    </a:lnDef>
+  </a:objectDefaults>
+  <a:extraClrSchemeLst/>
+  <a:extLst>
+    <a:ext uri="{05A4C25C-085E-4340-85A3-A5531E510DB2}">
+      <thm15:themeFamily xmlns:thm15="http://schemas.microsoft.com/office/thememl/2012/main" name="Office Theme" id="{2E142A2C-CD16-42D6-873A-C26D2A0506FA}" vid="{1BDDFF52-6CD6-40A5-AB3C-68EB2F1E4D0A}"/>
+    </a:ext>
+  </a:extLst>
+</a:theme>
 </file>